--- a/manaberu/slides/manaberu-12-final-presentation.pptx
+++ b/manaberu/slides/manaberu-12-final-presentation.pptx
@@ -114,13 +114,13 @@
   <p:extLst>
     <p:ext uri="{521415D9-36F7-43E2-AB2F-B90AF26B5E84}">
       <p14:sectionLst xmlns:p14="http://schemas.microsoft.com/office/powerpoint/2010/main">
-        <p14:section name="導入" id="{d9aff302-080d-974e-59bd-ea1deacad841}">
+        <p14:section name="導入" id="{143cf87e-fe5d-278b-fe80-57569276faa0}">
           <p14:sldIdLst>
             <p14:sldId id="256"/>
             <p14:sldId id="257"/>
           </p14:sldIdLst>
         </p14:section>
-        <p14:section name="本編" id="{6f710df6-4144-eee6-4595-e287e2dc6b84}">
+        <p14:section name="本編" id="{66a1b648-fb47-97c4-d26f-cbc23a0bed84}">
           <p14:sldIdLst>
             <p14:sldId id="258"/>
             <p14:sldId id="259"/>
@@ -128,7 +128,7 @@
             <p14:sldId id="261"/>
           </p14:sldIdLst>
         </p14:section>
-        <p14:section name="まとめ" id="{015c643c-8dc2-abf3-bd47-5cdbfbb984cc}">
+        <p14:section name="まとめ" id="{f11c2003-8691-8d27-f394-b0cf9f78fc14}">
           <p14:sldIdLst>
             <p14:sldId id="262"/>
             <p14:sldId id="263"/>
@@ -1228,12 +1228,19 @@
 
 <file path=ppt/slideLayouts/slideLayout2.xml><?xml version="1.0" encoding="utf-8"?>
 <p:sldLayout xmlns:a="http://schemas.openxmlformats.org/drawingml/2006/main" xmlns:r="http://schemas.openxmlformats.org/officeDocument/2006/relationships" xmlns:p="http://schemas.openxmlformats.org/presentationml/2006/main" preserve="1">
-  <p:cSld name="MANA_TITLE">
+  <p:cSld name="MANA_COVER">
     <p:bg>
       <p:bgPr>
-        <a:solidFill>
-          <a:srgbClr val="FFD600"/>
-        </a:solidFill>
+        <a:blipFill dpi="0" rotWithShape="1">
+          <a:blip r:embed="rId1">
+            <a:lum/>
+          </a:blip>
+          <a:srcRect/>
+          <a:stretch>
+            <a:fillRect/>
+          </a:stretch>
+        </a:blipFill>
+        <a:effectLst/>
       </p:bgPr>
     </p:bg>
     <p:spTree>
@@ -1250,156 +1257,6 @@
           <a:chExt cx="0" cy="0"/>
         </a:xfrm>
       </p:grpSpPr>
-      <p:sp>
-        <p:nvSpPr>
-          <p:cNvPr id="2" name="Text 0"/>
-          <p:cNvSpPr/>
-          <p:nvPr>
-            <p:ph idx="100" type="title" hasCustomPrompt="1"/>
-          </p:nvPr>
-        </p:nvSpPr>
-        <p:spPr>
-          <a:xfrm>
-            <a:off x="548640" y="1691640"/>
-            <a:ext cx="5852160" cy="1371600"/>
-          </a:xfrm>
-          <a:prstGeom prst="rect">
-            <a:avLst/>
-          </a:prstGeom>
-          <a:noFill/>
-          <a:ln/>
-        </p:spPr>
-        <p:txBody>
-          <a:bodyPr wrap="square" rtlCol="0"/>
-          <a:lstStyle>
-            <a:lvl1pPr algn="l" indent="0" marL="0">
-              <a:buNone/>
-              <a:defRPr lang="en-US" sz="3200" b="1" dirty="0">
-                <a:solidFill>
-                  <a:schemeClr val="tx1"/>
-                </a:solidFill>
-              </a:defRPr>
-            </a:lvl1pPr>
-          </a:lstStyle>
-          <a:p>
-            <a:pPr algn="l" indent="0" marL="0">
-              <a:buNone/>
-            </a:pPr>
-            <a:endParaRPr lang="en-US" sz="3200" dirty="0"/>
-          </a:p>
-        </p:txBody>
-      </p:sp>
-      <p:sp>
-        <p:nvSpPr>
-          <p:cNvPr id="3" name="Text 0"/>
-          <p:cNvSpPr/>
-          <p:nvPr>
-            <p:ph idx="101" type="body" hasCustomPrompt="1"/>
-          </p:nvPr>
-        </p:nvSpPr>
-        <p:spPr>
-          <a:xfrm>
-            <a:off x="548640" y="3246120"/>
-            <a:ext cx="5852160" cy="457200"/>
-          </a:xfrm>
-          <a:prstGeom prst="rect">
-            <a:avLst/>
-          </a:prstGeom>
-          <a:noFill/>
-          <a:ln/>
-        </p:spPr>
-        <p:txBody>
-          <a:bodyPr wrap="square" rtlCol="0"/>
-          <a:lstStyle>
-            <a:lvl1pPr indent="0" marL="0">
-              <a:buNone/>
-              <a:defRPr lang="en-US" sz="1400" dirty="0">
-                <a:solidFill>
-                  <a:schemeClr val="tx1"/>
-                </a:solidFill>
-              </a:defRPr>
-            </a:lvl1pPr>
-          </a:lstStyle>
-          <a:p>
-            <a:pPr indent="0" marL="0">
-              <a:buNone/>
-            </a:pPr>
-            <a:endParaRPr lang="en-US" sz="1400" dirty="0"/>
-          </a:p>
-        </p:txBody>
-      </p:sp>
-      <p:sp>
-        <p:nvSpPr>
-          <p:cNvPr id="4" name="Text 0"/>
-          <p:cNvSpPr/>
-          <p:nvPr/>
-        </p:nvSpPr>
-        <p:spPr>
-          <a:xfrm>
-            <a:off x="548640" y="4526280"/>
-            <a:ext cx="5486400" cy="274320"/>
-          </a:xfrm>
-          <a:prstGeom prst="rect">
-            <a:avLst/>
-          </a:prstGeom>
-          <a:noFill/>
-          <a:ln/>
-        </p:spPr>
-        <p:txBody>
-          <a:bodyPr wrap="square" lIns="0" tIns="0" rIns="0" bIns="0" rtlCol="0" anchor="ctr"/>
-          <a:lstStyle/>
-          <a:p>
-            <a:pPr indent="0" marL="0">
-              <a:buNone/>
-            </a:pPr>
-            <a:r>
-              <a:rPr lang="en-US" sz="1000" dirty="0">
-                <a:solidFill>
-                  <a:schemeClr val="tx1"/>
-                </a:solidFill>
-              </a:rPr>
-              <a:t>マナベル｜AI×Lark 構築者育成講座</a:t>
-            </a:r>
-            <a:endParaRPr lang="en-US" sz="1000" dirty="0"/>
-          </a:p>
-        </p:txBody>
-      </p:sp>
-      <p:sp>
-        <p:nvSpPr>
-          <p:cNvPr id="5" name="Text 1"/>
-          <p:cNvSpPr/>
-          <p:nvPr/>
-        </p:nvSpPr>
-        <p:spPr>
-          <a:xfrm>
-            <a:off x="6766560" y="4526280"/>
-            <a:ext cx="1828800" cy="274320"/>
-          </a:xfrm>
-          <a:prstGeom prst="rect">
-            <a:avLst/>
-          </a:prstGeom>
-          <a:noFill/>
-          <a:ln/>
-        </p:spPr>
-        <p:txBody>
-          <a:bodyPr wrap="square" lIns="0" tIns="0" rIns="0" bIns="0" rtlCol="0" anchor="ctr"/>
-          <a:lstStyle/>
-          <a:p>
-            <a:pPr algn="r" indent="0" marL="0">
-              <a:buNone/>
-            </a:pPr>
-            <a:r>
-              <a:rPr lang="en-US" sz="1000" b="1" dirty="0">
-                <a:solidFill>
-                  <a:schemeClr val="tx1"/>
-                </a:solidFill>
-              </a:rPr>
-              <a:t>ささエール</a:t>
-            </a:r>
-            <a:endParaRPr lang="en-US" sz="1000" dirty="0"/>
-          </a:p>
-        </p:txBody>
-      </p:sp>
     </p:spTree>
   </p:cSld>
   <p:clrMapOvr>
@@ -1413,9 +1270,16 @@
   <p:cSld name="MANA_CONTENT">
     <p:bg>
       <p:bgPr>
-        <a:solidFill>
-          <a:srgbClr val="FFFFFF"/>
-        </a:solidFill>
+        <a:blipFill dpi="0" rotWithShape="1">
+          <a:blip r:embed="rId1">
+            <a:lum/>
+          </a:blip>
+          <a:srcRect/>
+          <a:stretch>
+            <a:fillRect/>
+          </a:stretch>
+        </a:blipFill>
+        <a:effectLst/>
       </p:bgPr>
     </p:bg>
     <p:spTree>
@@ -1434,53 +1298,36 @@
       </p:grpSpPr>
       <p:sp>
         <p:nvSpPr>
-          <p:cNvPr id="2" name="Text 0"/>
+          <p:cNvPr id="2" name="Shape 0"/>
           <p:cNvSpPr/>
-          <p:nvPr>
-            <p:ph idx="100" type="title" hasCustomPrompt="1"/>
-          </p:nvPr>
-        </p:nvSpPr>
-        <p:spPr>
-          <a:xfrm>
-            <a:off x="548640" y="658368"/>
-            <a:ext cx="8046720" cy="566928"/>
-          </a:xfrm>
-          <a:prstGeom prst="rect">
-            <a:avLst/>
-          </a:prstGeom>
-          <a:noFill/>
+          <p:nvPr/>
+        </p:nvSpPr>
+        <p:spPr>
+          <a:xfrm>
+            <a:off x="6400800" y="4754880"/>
+            <a:ext cx="2423160" cy="274320"/>
+          </a:xfrm>
+          <a:prstGeom prst="rect">
+            <a:avLst>
+              <a:gd name="adj" fmla="val 50000"/>
+            </a:avLst>
+          </a:prstGeom>
+          <a:solidFill>
+            <a:srgbClr val="1A1A1A"/>
+          </a:solidFill>
           <a:ln/>
         </p:spPr>
-        <p:txBody>
-          <a:bodyPr wrap="square" rtlCol="0"/>
-          <a:lstStyle>
-            <a:lvl1pPr algn="l" indent="0" marL="0">
-              <a:buNone/>
-              <a:defRPr lang="en-US" sz="2400" b="1" dirty="0">
-                <a:solidFill>
-                  <a:schemeClr val="tx1"/>
-                </a:solidFill>
-              </a:defRPr>
-            </a:lvl1pPr>
-          </a:lstStyle>
-          <a:p>
-            <a:pPr algn="l" indent="0" marL="0">
-              <a:buNone/>
-            </a:pPr>
-            <a:endParaRPr lang="en-US" sz="2400" dirty="0"/>
-          </a:p>
-        </p:txBody>
-      </p:sp>
-      <p:sp>
-        <p:nvSpPr>
-          <p:cNvPr id="3" name="Text 0"/>
+      </p:sp>
+      <p:sp>
+        <p:nvSpPr>
+          <p:cNvPr id="3" name="Text 1"/>
           <p:cNvSpPr/>
           <p:nvPr/>
         </p:nvSpPr>
         <p:spPr>
           <a:xfrm>
-            <a:off x="548640" y="4773168"/>
-            <a:ext cx="6400800" cy="228600"/>
+            <a:off x="6510528" y="4754880"/>
+            <a:ext cx="1828800" cy="274320"/>
           </a:xfrm>
           <a:prstGeom prst="rect">
             <a:avLst/>
@@ -1496,14 +1343,56 @@
               <a:buNone/>
             </a:pPr>
             <a:r>
-              <a:rPr lang="en-US" sz="900" dirty="0">
+              <a:rPr lang="ja-JP" altLang="en-US" sz="850" b="1" dirty="0">
                 <a:solidFill>
-                  <a:schemeClr val="tx2"/>
+                  <a:srgbClr val="FFFFFF"/>
                 </a:solidFill>
+                <a:latin typeface="Noto Sans JP" pitchFamily="34" charset="0"/>
+                <a:ea typeface="Noto Sans JP" pitchFamily="34" charset="-122"/>
+                <a:cs typeface="Noto Sans JP" pitchFamily="34" charset="-120"/>
+              </a:rPr>
+              <a:t>ささエール｜OFFICE PLATA</a:t>
+            </a:r>
+            <a:endParaRPr lang="ja-JP" sz="850" dirty="0"/>
+          </a:p>
+        </p:txBody>
+      </p:sp>
+      <p:sp>
+        <p:nvSpPr>
+          <p:cNvPr id="4" name="Text 2"/>
+          <p:cNvSpPr/>
+          <p:nvPr/>
+        </p:nvSpPr>
+        <p:spPr>
+          <a:xfrm>
+            <a:off x="365760" y="4754880"/>
+            <a:ext cx="5852160" cy="274320"/>
+          </a:xfrm>
+          <a:prstGeom prst="rect">
+            <a:avLst/>
+          </a:prstGeom>
+          <a:noFill/>
+          <a:ln/>
+        </p:spPr>
+        <p:txBody>
+          <a:bodyPr wrap="square" lIns="0" tIns="0" rIns="0" bIns="0" rtlCol="0" anchor="ctr"/>
+          <a:lstStyle/>
+          <a:p>
+            <a:pPr indent="0" marL="0">
+              <a:buNone/>
+            </a:pPr>
+            <a:r>
+              <a:rPr lang="ja-JP" altLang="en-US" sz="850" dirty="0">
+                <a:solidFill>
+                  <a:srgbClr val="1A1A1A"/>
+                </a:solidFill>
+                <a:latin typeface="Noto Sans JP Medium" pitchFamily="34" charset="0"/>
+                <a:ea typeface="Noto Sans JP Medium" pitchFamily="34" charset="-122"/>
+                <a:cs typeface="Noto Sans JP Medium" pitchFamily="34" charset="-120"/>
               </a:rPr>
               <a:t>マナベル　第12回　成果発表・構築者チェック</a:t>
             </a:r>
-            <a:endParaRPr lang="en-US" sz="900" dirty="0"/>
+            <a:endParaRPr lang="ja-JP" sz="850" dirty="0"/>
           </a:p>
         </p:txBody>
       </p:sp>
@@ -1519,8 +1408,8 @@
         </p:nvSpPr>
         <p:spPr>
           <a:xfrm>
-            <a:off x="8229600" y="4773168"/>
-            <a:ext cx="365760" cy="228600"/>
+            <a:off x="8366760" y="4754880"/>
+            <a:ext cx="365760" cy="274320"/>
           </a:xfrm>
           <a:prstGeom prst="rect">
             <a:avLst/>
@@ -1532,169 +1421,26 @@
           </a:extLst>
         </p:spPr>
         <p:txBody>
-          <a:bodyPr/>
+          <a:bodyPr anchor="ctr"/>
           <a:lstStyle>
             <a:lvl1pPr>
-              <a:defRPr sz="900">
+              <a:defRPr sz="850">
                 <a:solidFill>
-                  <a:srgbClr val="5A6872"/>
+                  <a:srgbClr val="FFFFFF"/>
                 </a:solidFill>
+                <a:latin typeface="Noto Sans JP"/>
+                <a:ea typeface="Noto Sans JP"/>
+                <a:cs typeface="Noto Sans JP"/>
               </a:defRPr>
             </a:lvl1pPr>
           </a:lstStyle>
           <a:p>
             <a:pPr algn="r"/>
             <a:fld id="{F7021451-1387-4CA6-816F-3879F97B5CBC}" type="slidenum">
-              <a:rPr b="0" lang="en-US"/>
+              <a:rPr b="1" lang="en-US"/>
               <a:t>1003</a:t>
             </a:fld>
             <a:endParaRPr lang="en-US"/>
-          </a:p>
-        </p:txBody>
-      </p:sp>
-    </p:spTree>
-  </p:cSld>
-  <p:clrMapOvr>
-    <a:masterClrMapping/>
-  </p:clrMapOvr>
-</p:sldLayout>
-</file>
-
-<file path=ppt/slideLayouts/slideLayout4.xml><?xml version="1.0" encoding="utf-8"?>
-<p:sldLayout xmlns:a="http://schemas.openxmlformats.org/drawingml/2006/main" xmlns:r="http://schemas.openxmlformats.org/officeDocument/2006/relationships" xmlns:p="http://schemas.openxmlformats.org/presentationml/2006/main" preserve="1">
-  <p:cSld name="MANA_DARK">
-    <p:bg>
-      <p:bgPr>
-        <a:solidFill>
-          <a:srgbClr val="1A1A1A"/>
-        </a:solidFill>
-      </p:bgPr>
-    </p:bg>
-    <p:spTree>
-      <p:nvGrpSpPr>
-        <p:cNvPr id="1" name=""/>
-        <p:cNvGrpSpPr/>
-        <p:nvPr/>
-      </p:nvGrpSpPr>
-      <p:grpSpPr>
-        <a:xfrm>
-          <a:off x="0" y="0"/>
-          <a:ext cx="0" cy="0"/>
-          <a:chOff x="0" y="0"/>
-          <a:chExt cx="0" cy="0"/>
-        </a:xfrm>
-      </p:grpSpPr>
-      <p:sp>
-        <p:nvSpPr>
-          <p:cNvPr id="2" name="Text 0"/>
-          <p:cNvSpPr/>
-          <p:nvPr>
-            <p:ph idx="100" type="title" hasCustomPrompt="1"/>
-          </p:nvPr>
-        </p:nvSpPr>
-        <p:spPr>
-          <a:xfrm>
-            <a:off x="548640" y="1463040"/>
-            <a:ext cx="8046720" cy="1005840"/>
-          </a:xfrm>
-          <a:prstGeom prst="rect">
-            <a:avLst/>
-          </a:prstGeom>
-          <a:noFill/>
-          <a:ln/>
-        </p:spPr>
-        <p:txBody>
-          <a:bodyPr wrap="square" rtlCol="0"/>
-          <a:lstStyle>
-            <a:lvl1pPr algn="l" indent="0" marL="0">
-              <a:buNone/>
-              <a:defRPr lang="en-US" sz="3000" b="1" dirty="0">
-                <a:solidFill>
-                  <a:schemeClr val="accent1"/>
-                </a:solidFill>
-              </a:defRPr>
-            </a:lvl1pPr>
-          </a:lstStyle>
-          <a:p>
-            <a:pPr algn="l" indent="0" marL="0">
-              <a:buNone/>
-            </a:pPr>
-            <a:endParaRPr lang="en-US" sz="3000" dirty="0"/>
-          </a:p>
-        </p:txBody>
-      </p:sp>
-      <p:sp>
-        <p:nvSpPr>
-          <p:cNvPr id="3" name="Text 0"/>
-          <p:cNvSpPr/>
-          <p:nvPr>
-            <p:ph idx="101" type="body" hasCustomPrompt="1"/>
-          </p:nvPr>
-        </p:nvSpPr>
-        <p:spPr>
-          <a:xfrm>
-            <a:off x="548640" y="2606040"/>
-            <a:ext cx="8046720" cy="1097280"/>
-          </a:xfrm>
-          <a:prstGeom prst="rect">
-            <a:avLst/>
-          </a:prstGeom>
-          <a:noFill/>
-          <a:ln/>
-        </p:spPr>
-        <p:txBody>
-          <a:bodyPr wrap="square" rtlCol="0"/>
-          <a:lstStyle>
-            <a:lvl1pPr indent="0" marL="0">
-              <a:buNone/>
-              <a:defRPr lang="en-US" sz="1500" dirty="0">
-                <a:solidFill>
-                  <a:schemeClr val="bg1"/>
-                </a:solidFill>
-              </a:defRPr>
-            </a:lvl1pPr>
-          </a:lstStyle>
-          <a:p>
-            <a:pPr indent="0" marL="0">
-              <a:buNone/>
-            </a:pPr>
-            <a:endParaRPr lang="en-US" sz="1500" dirty="0"/>
-          </a:p>
-        </p:txBody>
-      </p:sp>
-      <p:sp>
-        <p:nvSpPr>
-          <p:cNvPr id="4" name="Text 0"/>
-          <p:cNvSpPr/>
-          <p:nvPr/>
-        </p:nvSpPr>
-        <p:spPr>
-          <a:xfrm>
-            <a:off x="548640" y="4526280"/>
-            <a:ext cx="5486400" cy="274320"/>
-          </a:xfrm>
-          <a:prstGeom prst="rect">
-            <a:avLst/>
-          </a:prstGeom>
-          <a:noFill/>
-          <a:ln/>
-        </p:spPr>
-        <p:txBody>
-          <a:bodyPr wrap="square" lIns="0" tIns="0" rIns="0" bIns="0" rtlCol="0" anchor="ctr"/>
-          <a:lstStyle/>
-          <a:p>
-            <a:pPr indent="0" marL="0">
-              <a:buNone/>
-            </a:pPr>
-            <a:r>
-              <a:rPr lang="en-US" sz="1000" dirty="0">
-                <a:solidFill>
-                  <a:schemeClr val="bg1"/>
-                </a:solidFill>
-              </a:rPr>
-              <a:t>マナベル｜AI×Lark 構築者育成講座</a:t>
-            </a:r>
-            <a:endParaRPr lang="en-US" sz="1000" dirty="0"/>
           </a:p>
         </p:txBody>
       </p:sp>
@@ -1735,8 +1481,8 @@
         </p:nvSpPr>
         <p:spPr>
           <a:xfrm>
-            <a:off x="8229600" y="4773168"/>
-            <a:ext cx="365760" cy="228600"/>
+            <a:off x="8366760" y="4754880"/>
+            <a:ext cx="365760" cy="274320"/>
           </a:xfrm>
           <a:prstGeom prst="rect">
             <a:avLst/>
@@ -1748,20 +1494,23 @@
           </a:extLst>
         </p:spPr>
         <p:txBody>
-          <a:bodyPr/>
+          <a:bodyPr anchor="ctr"/>
           <a:lstStyle>
             <a:lvl1pPr>
-              <a:defRPr sz="900">
+              <a:defRPr sz="850">
                 <a:solidFill>
-                  <a:srgbClr val="5A6872"/>
+                  <a:srgbClr val="FFFFFF"/>
                 </a:solidFill>
+                <a:latin typeface="Noto Sans JP"/>
+                <a:ea typeface="Noto Sans JP"/>
+                <a:cs typeface="Noto Sans JP"/>
               </a:defRPr>
             </a:lvl1pPr>
           </a:lstStyle>
           <a:p>
             <a:pPr algn="r"/>
             <a:fld id="{F7021451-1387-4CA6-816F-3879F97B5CBC}" type="slidenum">
-              <a:rPr b="0" lang="en-US"/>
+              <a:rPr b="1" lang="en-US"/>
               <a:t>null</a:t>
             </a:fld>
             <a:endParaRPr lang="en-US"/>
@@ -1775,7 +1524,6 @@
     <p:sldLayoutId id="2147483649" r:id="rId1"/>
     <p:sldLayoutId id="2147483650" r:id="rId2"/>
     <p:sldLayoutId id="2147483651" r:id="rId3"/>
-    <p:sldLayoutId id="2147483652" r:id="rId4"/>
   </p:sldLayoutIdLst>
   <p:hf sldNum="0" hdr="0" ftr="0" dt="0"/>
   <p:txStyles>
@@ -2048,57 +1796,60 @@
           <a:chExt cx="0" cy="0"/>
         </a:xfrm>
       </p:grpSpPr>
-      <p:sp>
-        <p:nvSpPr>
-          <p:cNvPr id="2" name="lesson-badge"/>
-          <p:cNvSpPr/>
-          <p:nvPr/>
-        </p:nvSpPr>
-        <p:spPr>
-          <a:xfrm>
-            <a:off x="548640" y="822960"/>
-            <a:ext cx="1828800" cy="566928"/>
-          </a:xfrm>
-          <a:prstGeom prst="roundRect">
-            <a:avLst>
-              <a:gd name="adj" fmla="val 50000"/>
-            </a:avLst>
+      <p:pic>
+        <p:nvPicPr>
+          <p:cNvPr id="2" name="portrait" descr="講師 笹原彰朗">    </p:cNvPr>
+          <p:cNvPicPr>
+            <a:picLocks noChangeAspect="1"/>
+          </p:cNvPicPr>
+          <p:nvPr/>
+        </p:nvPicPr>
+        <p:blipFill>
+          <a:blip r:embed="rId1"/>
+          <a:stretch>
+            <a:fillRect/>
+          </a:stretch>
+        </p:blipFill>
+        <p:spPr>
+          <a:xfrm>
+            <a:off x="6003588" y="1211580"/>
+            <a:ext cx="2866092" cy="3931920"/>
+          </a:xfrm>
+          <a:prstGeom prst="rect">
+            <a:avLst/>
+          </a:prstGeom>
+        </p:spPr>
+      </p:pic>
+      <p:sp>
+        <p:nvSpPr>
+          <p:cNvPr id="3" name="Text 0"/>
+          <p:cNvSpPr txBox="1"/>
+          <p:nvPr/>
+        </p:nvSpPr>
+        <p:spPr>
+          <a:xfrm rot="-240000">
+            <a:off x="457200" y="411480"/>
+            <a:ext cx="1600200" cy="603504"/>
+          </a:xfrm>
+          <a:prstGeom prst="rect">
+            <a:avLst/>
           </a:prstGeom>
           <a:solidFill>
             <a:srgbClr val="1A1A1A"/>
           </a:solidFill>
-          <a:ln w="12700">
+          <a:ln>
             <a:solidFill>
               <a:srgbClr val="1A1A1A"/>
             </a:solidFill>
-            <a:prstDash val="solid"/>
           </a:ln>
           <a:effectLst>
             <a:outerShdw sx="100000" sy="100000" kx="0" ky="0" algn="bl" rotWithShape="0" blurRad="101600" dist="38100" dir="2700000">
-              <a:srgbClr val="000000">
-                <a:alpha val="18000"/>
+              <a:srgbClr val="1A1A1A">
+                <a:alpha val="100000"/>
               </a:srgbClr>
             </a:outerShdw>
           </a:effectLst>
         </p:spPr>
-      </p:sp>
-      <p:sp>
-        <p:nvSpPr>
-          <p:cNvPr id="3" name="Text 1"/>
-          <p:cNvSpPr txBox="1"/>
-          <p:nvPr/>
-        </p:nvSpPr>
-        <p:spPr>
-          <a:xfrm>
-            <a:off x="548640" y="822960"/>
-            <a:ext cx="1828800" cy="566928"/>
-          </a:xfrm>
-          <a:prstGeom prst="rect">
-            <a:avLst/>
-          </a:prstGeom>
-          <a:noFill/>
-          <a:ln/>
-        </p:spPr>
         <p:txBody>
           <a:bodyPr wrap="square" lIns="0" tIns="0" rIns="0" bIns="0" rtlCol="0" anchor="ctr"/>
           <a:lstStyle/>
@@ -2107,29 +1858,30 @@
               <a:buNone/>
             </a:pPr>
             <a:r>
-              <a:rPr lang="en-US" sz="2200" b="1" dirty="0">
+              <a:rPr lang="ja-JP" altLang="en-US" sz="2200" dirty="0">
                 <a:solidFill>
-                  <a:schemeClr val="accent1"/>
+                  <a:srgbClr val="FFD600"/>
                 </a:solidFill>
+                <a:latin typeface="Dela Gothic One" pitchFamily="34" charset="0"/>
+                <a:ea typeface="けいふぉんと" pitchFamily="34" charset="-122"/>
+                <a:cs typeface="Dela Gothic One" pitchFamily="34" charset="-120"/>
               </a:rPr>
               <a:t>第12回</a:t>
             </a:r>
-            <a:endParaRPr lang="en-US" sz="2200" dirty="0"/>
+            <a:endParaRPr lang="ja-JP" sz="2200" dirty="0"/>
           </a:p>
         </p:txBody>
       </p:sp>
       <p:sp>
         <p:nvSpPr>
-          <p:cNvPr id="4" name="Text 0"/>
-          <p:cNvSpPr/>
-          <p:nvPr>
-            <p:ph idx="100" type="title" hasCustomPrompt="1"/>
-          </p:nvPr>
-        </p:nvSpPr>
-        <p:spPr>
-          <a:xfrm>
-            <a:off x="548640" y="1691640"/>
-            <a:ext cx="5852160" cy="1371600"/>
+          <p:cNvPr id="4" name="Text 1"/>
+          <p:cNvSpPr txBox="1"/>
+          <p:nvPr/>
+        </p:nvSpPr>
+        <p:spPr>
+          <a:xfrm>
+            <a:off x="457200" y="1188720"/>
+            <a:ext cx="6035040" cy="1600200"/>
           </a:xfrm>
           <a:prstGeom prst="rect">
             <a:avLst/>
@@ -2138,78 +1890,102 @@
           <a:ln/>
         </p:spPr>
         <p:txBody>
-          <a:bodyPr wrap="square" lIns="0" tIns="0" rIns="0" bIns="0" rtlCol="0" anchor="t"/>
+          <a:bodyPr wrap="square" lIns="0" tIns="0" rIns="0" bIns="0" rtlCol="0" anchor="ctr">
+            <a:normAutofit/>
+          </a:bodyPr>
           <a:lstStyle/>
           <a:p>
-            <a:pPr algn="l" indent="0" marL="0">
+            <a:pPr indent="0" marL="0">
+              <a:lnSpc>
+                <a:spcPct val="105000"/>
+              </a:lnSpc>
               <a:buNone/>
             </a:pPr>
             <a:r>
-              <a:rPr lang="en-US" sz="3200" b="1" dirty="0">
+              <a:rPr lang="ja-JP" altLang="en-US" sz="3600" dirty="0">
                 <a:solidFill>
-                  <a:schemeClr val="tx1"/>
+                  <a:srgbClr val="1A1A1A"/>
                 </a:solidFill>
+                <a:latin typeface="Dela Gothic One" pitchFamily="34" charset="0"/>
+                <a:ea typeface="けいふぉんと" pitchFamily="34" charset="-122"/>
+                <a:cs typeface="Dela Gothic One" pitchFamily="34" charset="-120"/>
               </a:rPr>
               <a:t>成果発表・構築者チェック</a:t>
             </a:r>
-            <a:endParaRPr lang="en-US" sz="3200" dirty="0"/>
+            <a:endParaRPr lang="ja-JP" sz="3600" dirty="0"/>
           </a:p>
         </p:txBody>
       </p:sp>
       <p:sp>
         <p:nvSpPr>
-          <p:cNvPr id="5" name="Text 0"/>
-          <p:cNvSpPr/>
-          <p:nvPr>
-            <p:ph idx="101" type="body" hasCustomPrompt="1"/>
-          </p:nvPr>
-        </p:nvSpPr>
-        <p:spPr>
-          <a:xfrm>
-            <a:off x="548640" y="3246120"/>
-            <a:ext cx="5852160" cy="457200"/>
-          </a:xfrm>
-          <a:prstGeom prst="rect">
-            <a:avLst/>
-          </a:prstGeom>
-          <a:noFill/>
-          <a:ln/>
+          <p:cNvPr id="5" name="Text 2"/>
+          <p:cNvSpPr txBox="1"/>
+          <p:nvPr/>
+        </p:nvSpPr>
+        <p:spPr>
+          <a:xfrm rot="-120000">
+            <a:off x="457200" y="2971800"/>
+            <a:ext cx="4937760" cy="502920"/>
+          </a:xfrm>
+          <a:prstGeom prst="rect">
+            <a:avLst/>
+          </a:prstGeom>
+          <a:solidFill>
+            <a:srgbClr val="DD6420"/>
+          </a:solidFill>
+          <a:ln w="19050">
+            <a:solidFill>
+              <a:srgbClr val="1A1A1A"/>
+            </a:solidFill>
+          </a:ln>
+          <a:effectLst>
+            <a:outerShdw sx="100000" sy="100000" kx="0" ky="0" algn="bl" rotWithShape="0" blurRad="101600" dist="38100" dir="2700000">
+              <a:srgbClr val="1A1A1A">
+                <a:alpha val="100000"/>
+              </a:srgbClr>
+            </a:outerShdw>
+          </a:effectLst>
         </p:spPr>
         <p:txBody>
-          <a:bodyPr wrap="square" lIns="0" tIns="0" rIns="0" bIns="0" rtlCol="0"/>
+          <a:bodyPr wrap="square" lIns="0" tIns="0" rIns="0" bIns="0" rtlCol="0" anchor="ctr"/>
           <a:lstStyle/>
           <a:p>
-            <a:pPr indent="0" marL="0">
+            <a:pPr algn="ctr" indent="0" marL="0">
               <a:buNone/>
             </a:pPr>
             <a:r>
-              <a:rPr lang="en-US" sz="1400" dirty="0">
+              <a:rPr lang="ja-JP" altLang="en-US" sz="1600" b="1" dirty="0">
                 <a:solidFill>
-                  <a:schemeClr val="tx1"/>
+                  <a:srgbClr val="FFFFFF"/>
                 </a:solidFill>
+                <a:latin typeface="Noto Sans JP" pitchFamily="34" charset="0"/>
+                <a:ea typeface="Noto Sans JP" pitchFamily="34" charset="-122"/>
+                <a:cs typeface="Noto Sans JP" pitchFamily="34" charset="-120"/>
               </a:rPr>
-              <a:t>フェーズ4 サービスにする　｜　第8週</a:t>
-            </a:r>
-            <a:endParaRPr lang="en-US" sz="1400" dirty="0"/>
+              <a:t>フェーズ4 サービスにする｜第8週</a:t>
+            </a:r>
+            <a:endParaRPr lang="ja-JP" sz="1600" dirty="0"/>
           </a:p>
         </p:txBody>
       </p:sp>
       <p:sp>
         <p:nvSpPr>
-          <p:cNvPr id="6" name="title-circle"/>
+          <p:cNvPr id="6" name="card"/>
           <p:cNvSpPr/>
           <p:nvPr/>
         </p:nvSpPr>
         <p:spPr>
           <a:xfrm>
-            <a:off x="6537960" y="1188720"/>
-            <a:ext cx="2103120" cy="2103120"/>
-          </a:xfrm>
-          <a:prstGeom prst="ellipse">
-            <a:avLst/>
+            <a:off x="457200" y="3730752"/>
+            <a:ext cx="4937760" cy="896112"/>
+          </a:xfrm>
+          <a:prstGeom prst="roundRect">
+            <a:avLst>
+              <a:gd name="adj" fmla="val 10204"/>
+            </a:avLst>
           </a:prstGeom>
           <a:solidFill>
-            <a:schemeClr val="bg1"/>
+            <a:srgbClr val="FFFFFF"/>
           </a:solidFill>
           <a:ln w="25400">
             <a:solidFill>
@@ -2218,38 +1994,76 @@
             <a:prstDash val="solid"/>
           </a:ln>
           <a:effectLst>
-            <a:outerShdw sx="100000" sy="100000" kx="0" ky="0" algn="bl" rotWithShape="0" blurRad="101600" dist="38100" dir="2700000">
-              <a:srgbClr val="000000">
-                <a:alpha val="18000"/>
+            <a:outerShdw sx="100000" sy="100000" kx="0" ky="0" algn="bl" rotWithShape="0" blurRad="101600" dist="50800" dir="2700000">
+              <a:srgbClr val="1A1A1A">
+                <a:alpha val="100000"/>
               </a:srgbClr>
             </a:outerShdw>
           </a:effectLst>
         </p:spPr>
       </p:sp>
-      <p:pic>
-        <p:nvPicPr>
-          <p:cNvPr id="7" name="title-icon" descr="preencoded.png">    </p:cNvPr>
-          <p:cNvPicPr>
-            <a:picLocks noChangeAspect="1"/>
-          </p:cNvPicPr>
-          <p:nvPr/>
-        </p:nvPicPr>
-        <p:blipFill>
-          <a:blip r:embed="rId1"/>
-          <a:stretch>
-            <a:fillRect/>
-          </a:stretch>
-        </p:blipFill>
-        <p:spPr>
-          <a:xfrm>
-            <a:off x="7086600" y="1737360"/>
-            <a:ext cx="1005840" cy="1005840"/>
-          </a:xfrm>
-          <a:prstGeom prst="rect">
-            <a:avLst/>
-          </a:prstGeom>
-        </p:spPr>
-      </p:pic>
+      <p:sp>
+        <p:nvSpPr>
+          <p:cNvPr id="7" name="Text 4"/>
+          <p:cNvSpPr txBox="1"/>
+          <p:nvPr/>
+        </p:nvSpPr>
+        <p:spPr>
+          <a:xfrm>
+            <a:off x="658368" y="3767328"/>
+            <a:ext cx="4572000" cy="822960"/>
+          </a:xfrm>
+          <a:prstGeom prst="rect">
+            <a:avLst/>
+          </a:prstGeom>
+          <a:noFill/>
+          <a:ln/>
+        </p:spPr>
+        <p:txBody>
+          <a:bodyPr wrap="square" lIns="0" tIns="0" rIns="0" bIns="0" rtlCol="0" anchor="ctr"/>
+          <a:lstStyle/>
+          <a:p>
+            <a:pPr indent="0" marL="0">
+              <a:spcAft>
+                <a:spcPts val="200"/>
+              </a:spcAft>
+              <a:buNone/>
+            </a:pPr>
+            <a:r>
+              <a:rPr lang="ja-JP" altLang="en-US" sz="1500" b="1" dirty="0">
+                <a:solidFill>
+                  <a:srgbClr val="1A1A1A"/>
+                </a:solidFill>
+                <a:latin typeface="Noto Sans JP" pitchFamily="34" charset="0"/>
+                <a:ea typeface="Noto Sans JP" pitchFamily="34" charset="-122"/>
+                <a:cs typeface="Noto Sans JP" pitchFamily="34" charset="-120"/>
+              </a:rPr>
+              <a:t>マナベル｜AI×Lark 構築者育成講座</a:t>
+            </a:r>
+            <a:endParaRPr lang="ja-JP" sz="1500" dirty="0"/>
+          </a:p>
+          <a:p>
+            <a:pPr indent="0" marL="0">
+              <a:spcAft>
+                <a:spcPts val="200"/>
+              </a:spcAft>
+              <a:buNone/>
+            </a:pPr>
+            <a:r>
+              <a:rPr lang="ja-JP" altLang="en-US" sz="1150" b="1" dirty="0">
+                <a:solidFill>
+                  <a:srgbClr val="DD6420"/>
+                </a:solidFill>
+                <a:latin typeface="Noto Sans JP" pitchFamily="34" charset="0"/>
+                <a:ea typeface="Noto Sans JP" pitchFamily="34" charset="-122"/>
+                <a:cs typeface="Noto Sans JP" pitchFamily="34" charset="-120"/>
+              </a:rPr>
+              <a:t>ささエール ／ OFFICE PLATA　笹原 彰朗</a:t>
+            </a:r>
+            <a:endParaRPr lang="ja-JP" sz="1500" dirty="0"/>
+          </a:p>
+        </p:txBody>
+      </p:sp>
     </p:spTree>
   </p:cSld>
   <p:clrMapOvr>
@@ -2278,122 +2092,139 @@
       <p:sp>
         <p:nvSpPr>
           <p:cNvPr id="2" name="Text 0"/>
-          <p:cNvSpPr/>
-          <p:nvPr>
-            <p:ph idx="100" type="title" hasCustomPrompt="1"/>
-          </p:nvPr>
-        </p:nvSpPr>
-        <p:spPr>
-          <a:xfrm>
-            <a:off x="548640" y="658368"/>
-            <a:ext cx="8046720" cy="566928"/>
-          </a:xfrm>
-          <a:prstGeom prst="rect">
-            <a:avLst/>
-          </a:prstGeom>
-          <a:noFill/>
-          <a:ln/>
+          <p:cNvSpPr txBox="1"/>
+          <p:nvPr/>
+        </p:nvSpPr>
+        <p:spPr>
+          <a:xfrm rot="-180000">
+            <a:off x="411480" y="201168"/>
+            <a:ext cx="1040587" cy="352044"/>
+          </a:xfrm>
+          <a:prstGeom prst="rect">
+            <a:avLst/>
+          </a:prstGeom>
+          <a:solidFill>
+            <a:srgbClr val="1A1A1A"/>
+          </a:solidFill>
+          <a:ln>
+            <a:solidFill>
+              <a:srgbClr val="1A1A1A"/>
+            </a:solidFill>
+          </a:ln>
         </p:spPr>
         <p:txBody>
           <a:bodyPr wrap="square" lIns="0" tIns="0" rIns="0" bIns="0" rtlCol="0" anchor="ctr"/>
           <a:lstStyle/>
           <a:p>
-            <a:pPr algn="l" indent="0" marL="0">
+            <a:pPr algn="ctr" indent="0" marL="0">
               <a:buNone/>
             </a:pPr>
             <a:r>
-              <a:rPr lang="en-US" sz="2400" b="1" dirty="0">
+              <a:rPr lang="ja-JP" altLang="en-US" sz="1100" dirty="0">
                 <a:solidFill>
-                  <a:schemeClr val="tx1"/>
+                  <a:srgbClr val="FFFFFF"/>
                 </a:solidFill>
+                <a:latin typeface="Dela Gothic One" pitchFamily="34" charset="0"/>
+                <a:ea typeface="けいふぉんと" pitchFamily="34" charset="-122"/>
+                <a:cs typeface="Dela Gothic One" pitchFamily="34" charset="-120"/>
+              </a:rPr>
+              <a:t>はじめに</a:t>
+            </a:r>
+            <a:endParaRPr lang="ja-JP" sz="1100" dirty="0"/>
+          </a:p>
+        </p:txBody>
+      </p:sp>
+      <p:sp>
+        <p:nvSpPr>
+          <p:cNvPr id="3" name="Text 1"/>
+          <p:cNvSpPr txBox="1"/>
+          <p:nvPr/>
+        </p:nvSpPr>
+        <p:spPr>
+          <a:xfrm>
+            <a:off x="411480" y="502920"/>
+            <a:ext cx="8321040" cy="685800"/>
+          </a:xfrm>
+          <a:prstGeom prst="rect">
+            <a:avLst/>
+          </a:prstGeom>
+          <a:noFill/>
+          <a:ln/>
+        </p:spPr>
+        <p:txBody>
+          <a:bodyPr wrap="square" lIns="0" tIns="0" rIns="0" bIns="0" rtlCol="0" anchor="ctr">
+            <a:normAutofit/>
+          </a:bodyPr>
+          <a:lstStyle/>
+          <a:p>
+            <a:pPr indent="0" marL="0">
+              <a:buNone/>
+            </a:pPr>
+            <a:r>
+              <a:rPr lang="ja-JP" altLang="en-US" sz="2600" dirty="0">
+                <a:solidFill>
+                  <a:srgbClr val="1A1A1A"/>
+                </a:solidFill>
+                <a:latin typeface="Dela Gothic One" pitchFamily="34" charset="0"/>
+                <a:ea typeface="けいふぉんと" pitchFamily="34" charset="-122"/>
+                <a:cs typeface="Dela Gothic One" pitchFamily="34" charset="-120"/>
               </a:rPr>
               <a:t>今日のゴールと流れ</a:t>
             </a:r>
-            <a:endParaRPr lang="en-US" sz="2400" dirty="0"/>
+            <a:endParaRPr lang="ja-JP" sz="2600" dirty="0"/>
           </a:p>
         </p:txBody>
       </p:sp>
       <p:sp>
         <p:nvSpPr>
-          <p:cNvPr id="3" name="chip"/>
+          <p:cNvPr id="4" name="card"/>
           <p:cNvSpPr/>
           <p:nvPr/>
         </p:nvSpPr>
         <p:spPr>
           <a:xfrm>
-            <a:off x="548640" y="292608"/>
-            <a:ext cx="932688" cy="292608"/>
+            <a:off x="502920" y="1371600"/>
+            <a:ext cx="2542032" cy="1280160"/>
           </a:xfrm>
           <a:prstGeom prst="roundRect">
             <a:avLst>
-              <a:gd name="adj" fmla="val 50000"/>
+              <a:gd name="adj" fmla="val 7143"/>
             </a:avLst>
           </a:prstGeom>
           <a:solidFill>
-            <a:schemeClr val="tx1"/>
+            <a:srgbClr val="FFFFFF"/>
           </a:solidFill>
-          <a:ln w="12700">
+          <a:ln w="25400">
             <a:solidFill>
-              <a:schemeClr val="tx1"/>
+              <a:srgbClr val="1A1A1A"/>
             </a:solidFill>
             <a:prstDash val="solid"/>
           </a:ln>
-        </p:spPr>
-      </p:sp>
-      <p:sp>
-        <p:nvSpPr>
-          <p:cNvPr id="4" name="chip-text"/>
-          <p:cNvSpPr txBox="1"/>
-          <p:nvPr/>
-        </p:nvSpPr>
-        <p:spPr>
-          <a:xfrm>
-            <a:off x="548640" y="292608"/>
-            <a:ext cx="932688" cy="292608"/>
-          </a:xfrm>
-          <a:prstGeom prst="rect">
-            <a:avLst/>
-          </a:prstGeom>
-          <a:noFill/>
-          <a:ln/>
-        </p:spPr>
-        <p:txBody>
-          <a:bodyPr wrap="square" lIns="0" tIns="0" rIns="0" bIns="0" rtlCol="0" anchor="ctr"/>
-          <a:lstStyle/>
-          <a:p>
-            <a:pPr algn="ctr" indent="0" marL="0">
-              <a:buNone/>
-            </a:pPr>
-            <a:r>
-              <a:rPr lang="en-US" sz="1100" b="1" dirty="0">
-                <a:solidFill>
-                  <a:schemeClr val="accent1"/>
-                </a:solidFill>
-              </a:rPr>
-              <a:t>はじめに</a:t>
-            </a:r>
-            <a:endParaRPr lang="en-US" sz="1100" dirty="0"/>
-          </a:p>
-        </p:txBody>
-      </p:sp>
-      <p:sp>
-        <p:nvSpPr>
-          <p:cNvPr id="5" name="card"/>
+          <a:effectLst>
+            <a:outerShdw sx="100000" sy="100000" kx="0" ky="0" algn="bl" rotWithShape="0" blurRad="101600" dist="50800" dir="2700000">
+              <a:srgbClr val="1A1A1A">
+                <a:alpha val="100000"/>
+              </a:srgbClr>
+            </a:outerShdw>
+          </a:effectLst>
+        </p:spPr>
+      </p:sp>
+      <p:sp>
+        <p:nvSpPr>
+          <p:cNvPr id="5" name="icon-circle"/>
           <p:cNvSpPr/>
           <p:nvPr/>
         </p:nvSpPr>
         <p:spPr>
           <a:xfrm>
-            <a:off x="548640" y="1417320"/>
-            <a:ext cx="2529840" cy="1280160"/>
-          </a:xfrm>
-          <a:prstGeom prst="roundRect">
-            <a:avLst>
-              <a:gd name="adj" fmla="val 8571"/>
-            </a:avLst>
+            <a:off x="685800" y="1572768"/>
+            <a:ext cx="438912" cy="438912"/>
+          </a:xfrm>
+          <a:prstGeom prst="ellipse">
+            <a:avLst/>
           </a:prstGeom>
           <a:solidFill>
-            <a:schemeClr val="bg2"/>
+            <a:srgbClr val="DD6420"/>
           </a:solidFill>
           <a:ln w="19050">
             <a:solidFill>
@@ -2401,43 +2232,11 @@
             </a:solidFill>
             <a:prstDash val="solid"/>
           </a:ln>
-          <a:effectLst>
-            <a:outerShdw sx="100000" sy="100000" kx="0" ky="0" algn="bl" rotWithShape="0" blurRad="101600" dist="38100" dir="2700000">
-              <a:srgbClr val="000000">
-                <a:alpha val="18000"/>
-              </a:srgbClr>
-            </a:outerShdw>
-          </a:effectLst>
-        </p:spPr>
-      </p:sp>
-      <p:sp>
-        <p:nvSpPr>
-          <p:cNvPr id="6" name="icon-circle"/>
-          <p:cNvSpPr/>
-          <p:nvPr/>
-        </p:nvSpPr>
-        <p:spPr>
-          <a:xfrm>
-            <a:off x="731520" y="1600200"/>
-            <a:ext cx="411480" cy="411480"/>
-          </a:xfrm>
-          <a:prstGeom prst="ellipse">
-            <a:avLst/>
-          </a:prstGeom>
-          <a:solidFill>
-            <a:schemeClr val="accent1"/>
-          </a:solidFill>
-          <a:ln w="15875">
-            <a:solidFill>
-              <a:srgbClr val="1A1A1A"/>
-            </a:solidFill>
-            <a:prstDash val="solid"/>
-          </a:ln>
         </p:spPr>
       </p:sp>
       <p:pic>
         <p:nvPicPr>
-          <p:cNvPr id="7" name="icon" descr="preencoded.png">    </p:cNvPr>
+          <p:cNvPr id="6" name="icon" descr="preencoded.png">    </p:cNvPr>
           <p:cNvPicPr>
             <a:picLocks noChangeAspect="1"/>
           </p:cNvPicPr>
@@ -2451,8 +2250,8 @@
         </p:blipFill>
         <p:spPr>
           <a:xfrm>
-            <a:off x="838505" y="1707185"/>
-            <a:ext cx="197510" cy="197510"/>
+            <a:off x="795528" y="1682496"/>
+            <a:ext cx="219456" cy="219456"/>
           </a:xfrm>
           <a:prstGeom prst="rect">
             <a:avLst/>
@@ -2461,14 +2260,14 @@
       </p:pic>
       <p:sp>
         <p:nvSpPr>
-          <p:cNvPr id="8" name="goal"/>
+          <p:cNvPr id="7" name="goal"/>
           <p:cNvSpPr txBox="1"/>
           <p:nvPr/>
         </p:nvSpPr>
         <p:spPr>
           <a:xfrm>
-            <a:off x="1280160" y="1508760"/>
-            <a:ext cx="1615440" cy="1097280"/>
+            <a:off x="1252728" y="1463040"/>
+            <a:ext cx="1627632" cy="1097280"/>
           </a:xfrm>
           <a:prstGeom prst="rect">
             <a:avLst/>
@@ -2477,42 +2276,79 @@
           <a:ln/>
         </p:spPr>
         <p:txBody>
-          <a:bodyPr wrap="square" lIns="0" tIns="0" rIns="0" bIns="0" rtlCol="0" anchor="ctr"/>
+          <a:bodyPr wrap="square" lIns="0" tIns="0" rIns="0" bIns="0" rtlCol="0" anchor="ctr">
+            <a:normAutofit/>
+          </a:bodyPr>
           <a:lstStyle/>
           <a:p>
             <a:pPr indent="0" marL="0">
               <a:buNone/>
             </a:pPr>
             <a:r>
-              <a:rPr lang="en-US" sz="1400" b="1" dirty="0">
+              <a:rPr lang="ja-JP" altLang="en-US" sz="1400" b="1" dirty="0">
                 <a:solidFill>
-                  <a:schemeClr val="tx1"/>
+                  <a:srgbClr val="1A1A1A"/>
                 </a:solidFill>
+                <a:latin typeface="Noto Sans JP" pitchFamily="34" charset="0"/>
+                <a:ea typeface="Noto Sans JP" pitchFamily="34" charset="-122"/>
+                <a:cs typeface="Noto Sans JP" pitchFamily="34" charset="-120"/>
               </a:rPr>
               <a:t>作ったしくみを、5分で人に説明できる</a:t>
             </a:r>
-            <a:endParaRPr lang="en-US" sz="1400" dirty="0"/>
+            <a:endParaRPr lang="ja-JP" sz="1400" dirty="0"/>
           </a:p>
         </p:txBody>
       </p:sp>
       <p:sp>
         <p:nvSpPr>
-          <p:cNvPr id="9" name="card"/>
+          <p:cNvPr id="8" name="card"/>
           <p:cNvSpPr/>
           <p:nvPr/>
         </p:nvSpPr>
         <p:spPr>
           <a:xfrm>
-            <a:off x="3307080" y="1417320"/>
-            <a:ext cx="2529840" cy="1280160"/>
+            <a:off x="3300984" y="1371600"/>
+            <a:ext cx="2542032" cy="1280160"/>
           </a:xfrm>
           <a:prstGeom prst="roundRect">
             <a:avLst>
-              <a:gd name="adj" fmla="val 8571"/>
+              <a:gd name="adj" fmla="val 7143"/>
             </a:avLst>
           </a:prstGeom>
           <a:solidFill>
-            <a:schemeClr val="bg2"/>
+            <a:srgbClr val="FFFFFF"/>
+          </a:solidFill>
+          <a:ln w="25400">
+            <a:solidFill>
+              <a:srgbClr val="1A1A1A"/>
+            </a:solidFill>
+            <a:prstDash val="solid"/>
+          </a:ln>
+          <a:effectLst>
+            <a:outerShdw sx="100000" sy="100000" kx="0" ky="0" algn="bl" rotWithShape="0" blurRad="101600" dist="50800" dir="2700000">
+              <a:srgbClr val="1A1A1A">
+                <a:alpha val="100000"/>
+              </a:srgbClr>
+            </a:outerShdw>
+          </a:effectLst>
+        </p:spPr>
+      </p:sp>
+      <p:sp>
+        <p:nvSpPr>
+          <p:cNvPr id="9" name="icon-circle"/>
+          <p:cNvSpPr/>
+          <p:nvPr/>
+        </p:nvSpPr>
+        <p:spPr>
+          <a:xfrm>
+            <a:off x="3483864" y="1572768"/>
+            <a:ext cx="438912" cy="438912"/>
+          </a:xfrm>
+          <a:prstGeom prst="ellipse">
+            <a:avLst/>
+          </a:prstGeom>
+          <a:solidFill>
+            <a:srgbClr val="DD6420"/>
           </a:solidFill>
           <a:ln w="19050">
             <a:solidFill>
@@ -2520,43 +2356,11 @@
             </a:solidFill>
             <a:prstDash val="solid"/>
           </a:ln>
-          <a:effectLst>
-            <a:outerShdw sx="100000" sy="100000" kx="0" ky="0" algn="bl" rotWithShape="0" blurRad="101600" dist="38100" dir="2700000">
-              <a:srgbClr val="000000">
-                <a:alpha val="18000"/>
-              </a:srgbClr>
-            </a:outerShdw>
-          </a:effectLst>
-        </p:spPr>
-      </p:sp>
-      <p:sp>
-        <p:nvSpPr>
-          <p:cNvPr id="10" name="icon-circle"/>
-          <p:cNvSpPr/>
-          <p:nvPr/>
-        </p:nvSpPr>
-        <p:spPr>
-          <a:xfrm>
-            <a:off x="3489960" y="1600200"/>
-            <a:ext cx="411480" cy="411480"/>
-          </a:xfrm>
-          <a:prstGeom prst="ellipse">
-            <a:avLst/>
-          </a:prstGeom>
-          <a:solidFill>
-            <a:schemeClr val="accent1"/>
-          </a:solidFill>
-          <a:ln w="15875">
-            <a:solidFill>
-              <a:srgbClr val="1A1A1A"/>
-            </a:solidFill>
-            <a:prstDash val="solid"/>
-          </a:ln>
         </p:spPr>
       </p:sp>
       <p:pic>
         <p:nvPicPr>
-          <p:cNvPr id="11" name="icon" descr="preencoded.png">    </p:cNvPr>
+          <p:cNvPr id="10" name="icon" descr="preencoded.png">    </p:cNvPr>
           <p:cNvPicPr>
             <a:picLocks noChangeAspect="1"/>
           </p:cNvPicPr>
@@ -2570,8 +2374,8 @@
         </p:blipFill>
         <p:spPr>
           <a:xfrm>
-            <a:off x="3596945" y="1707185"/>
-            <a:ext cx="197510" cy="197510"/>
+            <a:off x="3593592" y="1682496"/>
+            <a:ext cx="219456" cy="219456"/>
           </a:xfrm>
           <a:prstGeom prst="rect">
             <a:avLst/>
@@ -2580,14 +2384,14 @@
       </p:pic>
       <p:sp>
         <p:nvSpPr>
-          <p:cNvPr id="12" name="goal"/>
+          <p:cNvPr id="11" name="goal"/>
           <p:cNvSpPr txBox="1"/>
           <p:nvPr/>
         </p:nvSpPr>
         <p:spPr>
           <a:xfrm>
-            <a:off x="4038600" y="1508760"/>
-            <a:ext cx="1615440" cy="1097280"/>
+            <a:off x="4050792" y="1463040"/>
+            <a:ext cx="1627632" cy="1097280"/>
           </a:xfrm>
           <a:prstGeom prst="rect">
             <a:avLst/>
@@ -2596,42 +2400,79 @@
           <a:ln/>
         </p:spPr>
         <p:txBody>
-          <a:bodyPr wrap="square" lIns="0" tIns="0" rIns="0" bIns="0" rtlCol="0" anchor="ctr"/>
+          <a:bodyPr wrap="square" lIns="0" tIns="0" rIns="0" bIns="0" rtlCol="0" anchor="ctr">
+            <a:normAutofit/>
+          </a:bodyPr>
           <a:lstStyle/>
           <a:p>
             <a:pPr indent="0" marL="0">
               <a:buNone/>
             </a:pPr>
             <a:r>
-              <a:rPr lang="en-US" sz="1400" b="1" dirty="0">
+              <a:rPr lang="ja-JP" altLang="en-US" sz="1400" b="1" dirty="0">
                 <a:solidFill>
-                  <a:schemeClr val="tx1"/>
+                  <a:srgbClr val="1A1A1A"/>
                 </a:solidFill>
+                <a:latin typeface="Noto Sans JP" pitchFamily="34" charset="0"/>
+                <a:ea typeface="Noto Sans JP" pitchFamily="34" charset="-122"/>
+                <a:cs typeface="Noto Sans JP" pitchFamily="34" charset="-120"/>
               </a:rPr>
               <a:t>構築者チェックで、自分の到達点を確かめる</a:t>
             </a:r>
-            <a:endParaRPr lang="en-US" sz="1400" dirty="0"/>
+            <a:endParaRPr lang="ja-JP" sz="1400" dirty="0"/>
           </a:p>
         </p:txBody>
       </p:sp>
       <p:sp>
         <p:nvSpPr>
-          <p:cNvPr id="13" name="card"/>
+          <p:cNvPr id="12" name="card"/>
           <p:cNvSpPr/>
           <p:nvPr/>
         </p:nvSpPr>
         <p:spPr>
           <a:xfrm>
-            <a:off x="6065520" y="1417320"/>
-            <a:ext cx="2529840" cy="1280160"/>
+            <a:off x="6099048" y="1371600"/>
+            <a:ext cx="2542032" cy="1280160"/>
           </a:xfrm>
           <a:prstGeom prst="roundRect">
             <a:avLst>
-              <a:gd name="adj" fmla="val 8571"/>
+              <a:gd name="adj" fmla="val 7143"/>
             </a:avLst>
           </a:prstGeom>
           <a:solidFill>
-            <a:schemeClr val="bg2"/>
+            <a:srgbClr val="FFFFFF"/>
+          </a:solidFill>
+          <a:ln w="25400">
+            <a:solidFill>
+              <a:srgbClr val="1A1A1A"/>
+            </a:solidFill>
+            <a:prstDash val="solid"/>
+          </a:ln>
+          <a:effectLst>
+            <a:outerShdw sx="100000" sy="100000" kx="0" ky="0" algn="bl" rotWithShape="0" blurRad="101600" dist="50800" dir="2700000">
+              <a:srgbClr val="1A1A1A">
+                <a:alpha val="100000"/>
+              </a:srgbClr>
+            </a:outerShdw>
+          </a:effectLst>
+        </p:spPr>
+      </p:sp>
+      <p:sp>
+        <p:nvSpPr>
+          <p:cNvPr id="13" name="icon-circle"/>
+          <p:cNvSpPr/>
+          <p:nvPr/>
+        </p:nvSpPr>
+        <p:spPr>
+          <a:xfrm>
+            <a:off x="6281928" y="1572768"/>
+            <a:ext cx="438912" cy="438912"/>
+          </a:xfrm>
+          <a:prstGeom prst="ellipse">
+            <a:avLst/>
+          </a:prstGeom>
+          <a:solidFill>
+            <a:srgbClr val="DD6420"/>
           </a:solidFill>
           <a:ln w="19050">
             <a:solidFill>
@@ -2639,43 +2480,11 @@
             </a:solidFill>
             <a:prstDash val="solid"/>
           </a:ln>
-          <a:effectLst>
-            <a:outerShdw sx="100000" sy="100000" kx="0" ky="0" algn="bl" rotWithShape="0" blurRad="101600" dist="38100" dir="2700000">
-              <a:srgbClr val="000000">
-                <a:alpha val="18000"/>
-              </a:srgbClr>
-            </a:outerShdw>
-          </a:effectLst>
-        </p:spPr>
-      </p:sp>
-      <p:sp>
-        <p:nvSpPr>
-          <p:cNvPr id="14" name="icon-circle"/>
-          <p:cNvSpPr/>
-          <p:nvPr/>
-        </p:nvSpPr>
-        <p:spPr>
-          <a:xfrm>
-            <a:off x="6248400" y="1600200"/>
-            <a:ext cx="411480" cy="411480"/>
-          </a:xfrm>
-          <a:prstGeom prst="ellipse">
-            <a:avLst/>
-          </a:prstGeom>
-          <a:solidFill>
-            <a:schemeClr val="accent1"/>
-          </a:solidFill>
-          <a:ln w="15875">
-            <a:solidFill>
-              <a:srgbClr val="1A1A1A"/>
-            </a:solidFill>
-            <a:prstDash val="solid"/>
-          </a:ln>
         </p:spPr>
       </p:sp>
       <p:pic>
         <p:nvPicPr>
-          <p:cNvPr id="15" name="icon" descr="preencoded.png">    </p:cNvPr>
+          <p:cNvPr id="14" name="icon" descr="preencoded.png">    </p:cNvPr>
           <p:cNvPicPr>
             <a:picLocks noChangeAspect="1"/>
           </p:cNvPicPr>
@@ -2689,8 +2498,8 @@
         </p:blipFill>
         <p:spPr>
           <a:xfrm>
-            <a:off x="6355385" y="1707185"/>
-            <a:ext cx="197510" cy="197510"/>
+            <a:off x="6391656" y="1682496"/>
+            <a:ext cx="219456" cy="219456"/>
           </a:xfrm>
           <a:prstGeom prst="rect">
             <a:avLst/>
@@ -2699,75 +2508,121 @@
       </p:pic>
       <p:sp>
         <p:nvSpPr>
-          <p:cNvPr id="16" name="goal"/>
+          <p:cNvPr id="15" name="goal"/>
           <p:cNvSpPr txBox="1"/>
           <p:nvPr/>
         </p:nvSpPr>
         <p:spPr>
           <a:xfrm>
-            <a:off x="6797040" y="1508760"/>
-            <a:ext cx="1615440" cy="1097280"/>
+            <a:off x="6848856" y="1463040"/>
+            <a:ext cx="1627632" cy="1097280"/>
           </a:xfrm>
           <a:prstGeom prst="rect">
             <a:avLst/>
           </a:prstGeom>
           <a:noFill/>
           <a:ln/>
+        </p:spPr>
+        <p:txBody>
+          <a:bodyPr wrap="square" lIns="0" tIns="0" rIns="0" bIns="0" rtlCol="0" anchor="ctr">
+            <a:normAutofit/>
+          </a:bodyPr>
+          <a:lstStyle/>
+          <a:p>
+            <a:pPr indent="0" marL="0">
+              <a:buNone/>
+            </a:pPr>
+            <a:r>
+              <a:rPr lang="ja-JP" altLang="en-US" sz="1400" b="1" dirty="0">
+                <a:solidFill>
+                  <a:srgbClr val="1A1A1A"/>
+                </a:solidFill>
+                <a:latin typeface="Noto Sans JP" pitchFamily="34" charset="0"/>
+                <a:ea typeface="Noto Sans JP" pitchFamily="34" charset="-122"/>
+                <a:cs typeface="Noto Sans JP" pitchFamily="34" charset="-120"/>
+              </a:rPr>
+              <a:t>これから半年の改善計画がある</a:t>
+            </a:r>
+            <a:endParaRPr lang="ja-JP" sz="1400" dirty="0"/>
+          </a:p>
+        </p:txBody>
+      </p:sp>
+      <p:sp>
+        <p:nvSpPr>
+          <p:cNvPr id="16" name="Text 11"/>
+          <p:cNvSpPr txBox="1"/>
+          <p:nvPr/>
+        </p:nvSpPr>
+        <p:spPr>
+          <a:xfrm rot="-120000">
+            <a:off x="457200" y="2907792"/>
+            <a:ext cx="1915668" cy="352044"/>
+          </a:xfrm>
+          <a:prstGeom prst="rect">
+            <a:avLst/>
+          </a:prstGeom>
+          <a:solidFill>
+            <a:srgbClr val="1A1A1A"/>
+          </a:solidFill>
+          <a:ln>
+            <a:solidFill>
+              <a:srgbClr val="1A1A1A"/>
+            </a:solidFill>
+          </a:ln>
         </p:spPr>
         <p:txBody>
           <a:bodyPr wrap="square" lIns="0" tIns="0" rIns="0" bIns="0" rtlCol="0" anchor="ctr"/>
           <a:lstStyle/>
           <a:p>
-            <a:pPr indent="0" marL="0">
+            <a:pPr algn="ctr" indent="0" marL="0">
               <a:buNone/>
             </a:pPr>
             <a:r>
-              <a:rPr lang="en-US" sz="1400" b="1" dirty="0">
+              <a:rPr lang="ja-JP" altLang="en-US" sz="1100" dirty="0">
                 <a:solidFill>
-                  <a:schemeClr val="tx1"/>
+                  <a:srgbClr val="FFFFFF"/>
                 </a:solidFill>
-              </a:rPr>
-              <a:t>これから半年の改善計画がある</a:t>
-            </a:r>
-            <a:endParaRPr lang="en-US" sz="1400" dirty="0"/>
-          </a:p>
-        </p:txBody>
-      </p:sp>
-      <p:sp>
-        <p:nvSpPr>
-          <p:cNvPr id="17" name="Text 12"/>
-          <p:cNvSpPr txBox="1"/>
-          <p:nvPr/>
-        </p:nvSpPr>
-        <p:spPr>
-          <a:xfrm>
-            <a:off x="548640" y="2971800"/>
-            <a:ext cx="3657600" cy="320040"/>
-          </a:xfrm>
-          <a:prstGeom prst="rect">
-            <a:avLst/>
-          </a:prstGeom>
-          <a:noFill/>
-          <a:ln/>
-        </p:spPr>
-        <p:txBody>
-          <a:bodyPr wrap="square" lIns="0" tIns="0" rIns="0" bIns="0" rtlCol="0" anchor="ctr"/>
-          <a:lstStyle/>
-          <a:p>
-            <a:pPr indent="0" marL="0">
-              <a:buNone/>
-            </a:pPr>
-            <a:r>
-              <a:rPr lang="en-US" sz="1300" b="1" dirty="0">
-                <a:solidFill>
-                  <a:schemeClr val="tx1"/>
-                </a:solidFill>
+                <a:latin typeface="Dela Gothic One" pitchFamily="34" charset="0"/>
+                <a:ea typeface="けいふぉんと" pitchFamily="34" charset="-122"/>
+                <a:cs typeface="Dela Gothic One" pitchFamily="34" charset="-120"/>
               </a:rPr>
               <a:t>今日の流れ（90分）</a:t>
             </a:r>
-            <a:endParaRPr lang="en-US" sz="1300" dirty="0"/>
+            <a:endParaRPr lang="ja-JP" sz="1100" dirty="0"/>
           </a:p>
         </p:txBody>
+      </p:sp>
+      <p:sp>
+        <p:nvSpPr>
+          <p:cNvPr id="17" name="Shape 12"/>
+          <p:cNvSpPr/>
+          <p:nvPr/>
+        </p:nvSpPr>
+        <p:spPr>
+          <a:xfrm>
+            <a:off x="502920" y="3364992"/>
+            <a:ext cx="8138160" cy="685800"/>
+          </a:xfrm>
+          <a:prstGeom prst="rect">
+            <a:avLst/>
+          </a:prstGeom>
+          <a:solidFill>
+            <a:srgbClr val="FFFFFF"/>
+          </a:solidFill>
+          <a:ln w="25400">
+            <a:solidFill>
+              <a:srgbClr val="1A1A1A"/>
+            </a:solidFill>
+            <a:prstDash val="solid"/>
+          </a:ln>
+          <a:effectLst>
+            <a:outerShdw sx="100000" sy="100000" kx="0" ky="0" algn="bl" rotWithShape="0" blurRad="101600" dist="50800" dir="2700000">
+              <a:srgbClr val="1A1A1A">
+                <a:alpha val="100000"/>
+              </a:srgbClr>
+            </a:outerShdw>
+          </a:effectLst>
+        </p:spPr>
       </p:sp>
       <p:sp>
         <p:nvSpPr>
@@ -2777,8 +2632,8 @@
         </p:nvSpPr>
         <p:spPr>
           <a:xfrm>
-            <a:off x="548640" y="3383280"/>
-            <a:ext cx="447040" cy="685800"/>
+            <a:off x="502920" y="3364992"/>
+            <a:ext cx="452120" cy="685800"/>
           </a:xfrm>
           <a:prstGeom prst="rect">
             <a:avLst/>
@@ -2802,8 +2657,8 @@
         </p:nvSpPr>
         <p:spPr>
           <a:xfrm>
-            <a:off x="548640" y="3383280"/>
-            <a:ext cx="447040" cy="685800"/>
+            <a:off x="502920" y="3364992"/>
+            <a:ext cx="452120" cy="685800"/>
           </a:xfrm>
           <a:prstGeom prst="rect">
             <a:avLst/>
@@ -2819,28 +2674,34 @@
               <a:buNone/>
             </a:pPr>
             <a:r>
-              <a:rPr lang="en-US" sz="850" b="1" dirty="0">
+              <a:rPr lang="ja-JP" altLang="en-US" sz="850" b="1" dirty="0">
                 <a:solidFill>
                   <a:srgbClr val="FFD600"/>
                 </a:solidFill>
+                <a:latin typeface="Noto Sans JP" pitchFamily="34" charset="0"/>
+                <a:ea typeface="Noto Sans JP" pitchFamily="34" charset="-122"/>
+                <a:cs typeface="Noto Sans JP" pitchFamily="34" charset="-120"/>
               </a:rPr>
               <a:t>進め方</a:t>
             </a:r>
-            <a:endParaRPr lang="en-US" sz="850" dirty="0"/>
+            <a:endParaRPr lang="ja-JP" sz="850" dirty="0"/>
           </a:p>
           <a:p>
             <a:pPr algn="ctr" indent="0" marL="0">
               <a:buNone/>
             </a:pPr>
             <a:r>
-              <a:rPr lang="en-US" sz="900" b="1" dirty="0">
+              <a:rPr lang="ja-JP" altLang="en-US" sz="900" b="1" dirty="0">
                 <a:solidFill>
                   <a:srgbClr val="FFD600"/>
                 </a:solidFill>
+                <a:latin typeface="Noto Sans JP" pitchFamily="34" charset="0"/>
+                <a:ea typeface="Noto Sans JP" pitchFamily="34" charset="-122"/>
+                <a:cs typeface="Noto Sans JP" pitchFamily="34" charset="-120"/>
               </a:rPr>
               <a:t>5分</a:t>
             </a:r>
-            <a:endParaRPr lang="en-US" sz="850" dirty="0"/>
+            <a:endParaRPr lang="ja-JP" sz="850" dirty="0"/>
           </a:p>
         </p:txBody>
       </p:sp>
@@ -2852,8 +2713,8 @@
         </p:nvSpPr>
         <p:spPr>
           <a:xfrm>
-            <a:off x="995680" y="3383280"/>
-            <a:ext cx="4470400" cy="685800"/>
+            <a:off x="955040" y="3364992"/>
+            <a:ext cx="4521200" cy="685800"/>
           </a:xfrm>
           <a:prstGeom prst="rect">
             <a:avLst/>
@@ -2877,8 +2738,8 @@
         </p:nvSpPr>
         <p:spPr>
           <a:xfrm>
-            <a:off x="995680" y="3383280"/>
-            <a:ext cx="4470400" cy="685800"/>
+            <a:off x="955040" y="3364992"/>
+            <a:ext cx="4521200" cy="685800"/>
           </a:xfrm>
           <a:prstGeom prst="rect">
             <a:avLst/>
@@ -2894,28 +2755,34 @@
               <a:buNone/>
             </a:pPr>
             <a:r>
-              <a:rPr lang="en-US" sz="1050" b="1" dirty="0">
+              <a:rPr lang="ja-JP" altLang="en-US" sz="1050" b="1" dirty="0">
                 <a:solidFill>
                   <a:srgbClr val="FFFFFF"/>
                 </a:solidFill>
+                <a:latin typeface="Noto Sans JP" pitchFamily="34" charset="0"/>
+                <a:ea typeface="Noto Sans JP" pitchFamily="34" charset="-122"/>
+                <a:cs typeface="Noto Sans JP" pitchFamily="34" charset="-120"/>
               </a:rPr>
               <a:t>発表（1人5分＋質疑3分）</a:t>
             </a:r>
-            <a:endParaRPr lang="en-US" sz="1050" dirty="0"/>
+            <a:endParaRPr lang="ja-JP" sz="1050" dirty="0"/>
           </a:p>
           <a:p>
             <a:pPr algn="ctr" indent="0" marL="0">
               <a:buNone/>
             </a:pPr>
             <a:r>
-              <a:rPr lang="en-US" sz="900" b="1" dirty="0">
+              <a:rPr lang="ja-JP" altLang="en-US" sz="900" b="1" dirty="0">
                 <a:solidFill>
                   <a:srgbClr val="FFFFFF"/>
                 </a:solidFill>
+                <a:latin typeface="Noto Sans JP" pitchFamily="34" charset="0"/>
+                <a:ea typeface="Noto Sans JP" pitchFamily="34" charset="-122"/>
+                <a:cs typeface="Noto Sans JP" pitchFamily="34" charset="-120"/>
               </a:rPr>
               <a:t>50分</a:t>
             </a:r>
-            <a:endParaRPr lang="en-US" sz="1050" dirty="0"/>
+            <a:endParaRPr lang="ja-JP" sz="1050" dirty="0"/>
           </a:p>
         </p:txBody>
       </p:sp>
@@ -2927,8 +2794,8 @@
         </p:nvSpPr>
         <p:spPr>
           <a:xfrm>
-            <a:off x="5466080" y="3383280"/>
-            <a:ext cx="1341120" cy="685800"/>
+            <a:off x="5476240" y="3364992"/>
+            <a:ext cx="1356360" cy="685800"/>
           </a:xfrm>
           <a:prstGeom prst="rect">
             <a:avLst/>
@@ -2952,8 +2819,8 @@
         </p:nvSpPr>
         <p:spPr>
           <a:xfrm>
-            <a:off x="5466080" y="3383280"/>
-            <a:ext cx="1341120" cy="685800"/>
+            <a:off x="5476240" y="3364992"/>
+            <a:ext cx="1356360" cy="685800"/>
           </a:xfrm>
           <a:prstGeom prst="rect">
             <a:avLst/>
@@ -2969,28 +2836,34 @@
               <a:buNone/>
             </a:pPr>
             <a:r>
-              <a:rPr lang="en-US" sz="1050" b="1" dirty="0">
+              <a:rPr lang="ja-JP" altLang="en-US" sz="1050" b="1" dirty="0">
                 <a:solidFill>
                   <a:srgbClr val="FFD600"/>
                 </a:solidFill>
+                <a:latin typeface="Noto Sans JP" pitchFamily="34" charset="0"/>
+                <a:ea typeface="Noto Sans JP" pitchFamily="34" charset="-122"/>
+                <a:cs typeface="Noto Sans JP" pitchFamily="34" charset="-120"/>
               </a:rPr>
               <a:t>講評・チェック</a:t>
             </a:r>
-            <a:endParaRPr lang="en-US" sz="1050" dirty="0"/>
+            <a:endParaRPr lang="ja-JP" sz="1050" dirty="0"/>
           </a:p>
           <a:p>
             <a:pPr algn="ctr" indent="0" marL="0">
               <a:buNone/>
             </a:pPr>
             <a:r>
-              <a:rPr lang="en-US" sz="900" b="1" dirty="0">
+              <a:rPr lang="ja-JP" altLang="en-US" sz="900" b="1" dirty="0">
                 <a:solidFill>
                   <a:srgbClr val="FFD600"/>
                 </a:solidFill>
+                <a:latin typeface="Noto Sans JP" pitchFamily="34" charset="0"/>
+                <a:ea typeface="Noto Sans JP" pitchFamily="34" charset="-122"/>
+                <a:cs typeface="Noto Sans JP" pitchFamily="34" charset="-120"/>
               </a:rPr>
               <a:t>15分</a:t>
             </a:r>
-            <a:endParaRPr lang="en-US" sz="1050" dirty="0"/>
+            <a:endParaRPr lang="ja-JP" sz="1050" dirty="0"/>
           </a:p>
         </p:txBody>
       </p:sp>
@@ -3002,8 +2875,8 @@
         </p:nvSpPr>
         <p:spPr>
           <a:xfrm>
-            <a:off x="6807200" y="3383280"/>
-            <a:ext cx="1341120" cy="685800"/>
+            <a:off x="6832600" y="3364992"/>
+            <a:ext cx="1356360" cy="685800"/>
           </a:xfrm>
           <a:prstGeom prst="rect">
             <a:avLst/>
@@ -3027,8 +2900,8 @@
         </p:nvSpPr>
         <p:spPr>
           <a:xfrm>
-            <a:off x="6807200" y="3383280"/>
-            <a:ext cx="1341120" cy="685800"/>
+            <a:off x="6832600" y="3364992"/>
+            <a:ext cx="1356360" cy="685800"/>
           </a:xfrm>
           <a:prstGeom prst="rect">
             <a:avLst/>
@@ -3044,28 +2917,34 @@
               <a:buNone/>
             </a:pPr>
             <a:r>
-              <a:rPr lang="en-US" sz="1050" b="1" dirty="0">
+              <a:rPr lang="ja-JP" altLang="en-US" sz="1050" b="1" dirty="0">
                 <a:solidFill>
                   <a:srgbClr val="FFFFFF"/>
                 </a:solidFill>
+                <a:latin typeface="Noto Sans JP" pitchFamily="34" charset="0"/>
+                <a:ea typeface="Noto Sans JP" pitchFamily="34" charset="-122"/>
+                <a:cs typeface="Noto Sans JP" pitchFamily="34" charset="-120"/>
               </a:rPr>
               <a:t>改善計画</a:t>
             </a:r>
-            <a:endParaRPr lang="en-US" sz="1050" dirty="0"/>
+            <a:endParaRPr lang="ja-JP" sz="1050" dirty="0"/>
           </a:p>
           <a:p>
             <a:pPr algn="ctr" indent="0" marL="0">
               <a:buNone/>
             </a:pPr>
             <a:r>
-              <a:rPr lang="en-US" sz="900" b="1" dirty="0">
+              <a:rPr lang="ja-JP" altLang="en-US" sz="900" b="1" dirty="0">
                 <a:solidFill>
                   <a:srgbClr val="FFFFFF"/>
                 </a:solidFill>
+                <a:latin typeface="Noto Sans JP" pitchFamily="34" charset="0"/>
+                <a:ea typeface="Noto Sans JP" pitchFamily="34" charset="-122"/>
+                <a:cs typeface="Noto Sans JP" pitchFamily="34" charset="-120"/>
               </a:rPr>
               <a:t>15分</a:t>
             </a:r>
-            <a:endParaRPr lang="en-US" sz="1050" dirty="0"/>
+            <a:endParaRPr lang="ja-JP" sz="1050" dirty="0"/>
           </a:p>
         </p:txBody>
       </p:sp>
@@ -3077,8 +2956,8 @@
         </p:nvSpPr>
         <p:spPr>
           <a:xfrm>
-            <a:off x="8148320" y="3383280"/>
-            <a:ext cx="447040" cy="685800"/>
+            <a:off x="8188960" y="3364992"/>
+            <a:ext cx="452120" cy="685800"/>
           </a:xfrm>
           <a:prstGeom prst="rect">
             <a:avLst/>
@@ -3102,8 +2981,8 @@
         </p:nvSpPr>
         <p:spPr>
           <a:xfrm>
-            <a:off x="8148320" y="3383280"/>
-            <a:ext cx="447040" cy="685800"/>
+            <a:off x="8188960" y="3364992"/>
+            <a:ext cx="452120" cy="685800"/>
           </a:xfrm>
           <a:prstGeom prst="rect">
             <a:avLst/>
@@ -3119,28 +2998,34 @@
               <a:buNone/>
             </a:pPr>
             <a:r>
-              <a:rPr lang="en-US" sz="850" b="1" dirty="0">
+              <a:rPr lang="ja-JP" altLang="en-US" sz="850" b="1" dirty="0">
                 <a:solidFill>
                   <a:srgbClr val="FFD600"/>
                 </a:solidFill>
+                <a:latin typeface="Noto Sans JP" pitchFamily="34" charset="0"/>
+                <a:ea typeface="Noto Sans JP" pitchFamily="34" charset="-122"/>
+                <a:cs typeface="Noto Sans JP" pitchFamily="34" charset="-120"/>
               </a:rPr>
               <a:t>修了</a:t>
             </a:r>
-            <a:endParaRPr lang="en-US" sz="850" dirty="0"/>
+            <a:endParaRPr lang="ja-JP" sz="850" dirty="0"/>
           </a:p>
           <a:p>
             <a:pPr algn="ctr" indent="0" marL="0">
               <a:buNone/>
             </a:pPr>
             <a:r>
-              <a:rPr lang="en-US" sz="900" b="1" dirty="0">
+              <a:rPr lang="ja-JP" altLang="en-US" sz="900" b="1" dirty="0">
                 <a:solidFill>
                   <a:srgbClr val="FFD600"/>
                 </a:solidFill>
+                <a:latin typeface="Noto Sans JP" pitchFamily="34" charset="0"/>
+                <a:ea typeface="Noto Sans JP" pitchFamily="34" charset="-122"/>
+                <a:cs typeface="Noto Sans JP" pitchFamily="34" charset="-120"/>
               </a:rPr>
               <a:t>5分</a:t>
             </a:r>
-            <a:endParaRPr lang="en-US" sz="850" dirty="0"/>
+            <a:endParaRPr lang="ja-JP" sz="850" dirty="0"/>
           </a:p>
         </p:txBody>
       </p:sp>
@@ -3152,7 +3037,7 @@
         </p:nvSpPr>
         <p:spPr>
           <a:xfrm>
-            <a:off x="548640" y="4160520"/>
+            <a:off x="502920" y="4187952"/>
             <a:ext cx="3657600" cy="274320"/>
           </a:xfrm>
           <a:prstGeom prst="rect">
@@ -3169,10 +3054,13 @@
               <a:buNone/>
             </a:pPr>
             <a:r>
-              <a:rPr lang="en-US" sz="1000" dirty="0">
+              <a:rPr lang="ja-JP" altLang="en-US" sz="1050" b="1" dirty="0">
                 <a:solidFill>
                   <a:srgbClr val="1A1A1A"/>
                 </a:solidFill>
+                <a:latin typeface="Noto Sans JP" pitchFamily="34" charset="0"/>
+                <a:ea typeface="Noto Sans JP" pitchFamily="34" charset="-122"/>
+                <a:cs typeface="Noto Sans JP" pitchFamily="34" charset="-120"/>
               </a:rPr>
               <a:t>■ </a:t>
             </a:r>
@@ -3180,10 +3068,13 @@
               <a:buNone/>
             </a:pPr>
             <a:r>
-              <a:rPr lang="en-US" sz="1000" dirty="0">
+              <a:rPr lang="ja-JP" altLang="en-US" sz="1050" b="1" dirty="0">
                 <a:solidFill>
-                  <a:schemeClr val="tx2"/>
+                  <a:srgbClr val="1A1A1A"/>
                 </a:solidFill>
+                <a:latin typeface="Noto Sans JP" pitchFamily="34" charset="0"/>
+                <a:ea typeface="Noto Sans JP" pitchFamily="34" charset="-122"/>
+                <a:cs typeface="Noto Sans JP" pitchFamily="34" charset="-120"/>
               </a:rPr>
               <a:t>聞く　</a:t>
             </a:r>
@@ -3191,10 +3082,13 @@
               <a:buNone/>
             </a:pPr>
             <a:r>
-              <a:rPr lang="en-US" sz="1000" dirty="0">
+              <a:rPr lang="ja-JP" altLang="en-US" sz="1050" b="1" dirty="0">
                 <a:solidFill>
                   <a:srgbClr val="DD6420"/>
                 </a:solidFill>
+                <a:latin typeface="Noto Sans JP" pitchFamily="34" charset="0"/>
+                <a:ea typeface="Noto Sans JP" pitchFamily="34" charset="-122"/>
+                <a:cs typeface="Noto Sans JP" pitchFamily="34" charset="-120"/>
               </a:rPr>
               <a:t>■ </a:t>
             </a:r>
@@ -3202,14 +3096,17 @@
               <a:buNone/>
             </a:pPr>
             <a:r>
-              <a:rPr lang="en-US" sz="1000" dirty="0">
+              <a:rPr lang="ja-JP" altLang="en-US" sz="1050" b="1" dirty="0">
                 <a:solidFill>
-                  <a:schemeClr val="tx2"/>
+                  <a:srgbClr val="1A1A1A"/>
                 </a:solidFill>
+                <a:latin typeface="Noto Sans JP" pitchFamily="34" charset="0"/>
+                <a:ea typeface="Noto Sans JP" pitchFamily="34" charset="-122"/>
+                <a:cs typeface="Noto Sans JP" pitchFamily="34" charset="-120"/>
               </a:rPr>
               <a:t>手を動かす</a:t>
             </a:r>
-            <a:endParaRPr lang="en-US" sz="1000" dirty="0"/>
+            <a:endParaRPr lang="ja-JP" sz="1050" dirty="0"/>
           </a:p>
         </p:txBody>
       </p:sp>
@@ -3225,8 +3122,8 @@
         </p:nvSpPr>
         <p:spPr>
           <a:xfrm>
-            <a:off x="8229600" y="4773168"/>
-            <a:ext cx="365760" cy="228600"/>
+            <a:off x="8366760" y="4754880"/>
+            <a:ext cx="365760" cy="274320"/>
           </a:xfrm>
           <a:prstGeom prst="rect">
             <a:avLst/>
@@ -3238,20 +3135,23 @@
           </a:extLst>
         </p:spPr>
         <p:txBody>
-          <a:bodyPr/>
+          <a:bodyPr anchor="ctr"/>
           <a:lstStyle>
             <a:lvl1pPr>
-              <a:defRPr sz="900">
+              <a:defRPr sz="850">
                 <a:solidFill>
-                  <a:srgbClr val="5A6872"/>
+                  <a:srgbClr val="FFFFFF"/>
                 </a:solidFill>
+                <a:latin typeface="Noto Sans JP"/>
+                <a:ea typeface="Noto Sans JP"/>
+                <a:cs typeface="Noto Sans JP"/>
               </a:defRPr>
             </a:lvl1pPr>
           </a:lstStyle>
           <a:p>
             <a:pPr algn="r"/>
             <a:fld id="{F7021451-1387-4CA6-816F-3879F97B5CBC}" type="slidenum">
-              <a:rPr b="0" lang="en-US"/>
+              <a:rPr b="1" lang="en-US"/>
               <a:t>2</a:t>
             </a:fld>
             <a:endParaRPr lang="en-US"/>
@@ -3286,133 +3186,118 @@
       <p:sp>
         <p:nvSpPr>
           <p:cNvPr id="2" name="Text 0"/>
-          <p:cNvSpPr/>
-          <p:nvPr>
-            <p:ph idx="100" type="title" hasCustomPrompt="1"/>
-          </p:nvPr>
-        </p:nvSpPr>
-        <p:spPr>
-          <a:xfrm>
-            <a:off x="548640" y="658368"/>
-            <a:ext cx="8046720" cy="566928"/>
-          </a:xfrm>
-          <a:prstGeom prst="rect">
-            <a:avLst/>
-          </a:prstGeom>
-          <a:noFill/>
-          <a:ln/>
+          <p:cNvSpPr txBox="1"/>
+          <p:nvPr/>
+        </p:nvSpPr>
+        <p:spPr>
+          <a:xfrm rot="-180000">
+            <a:off x="411480" y="201168"/>
+            <a:ext cx="1186434" cy="352044"/>
+          </a:xfrm>
+          <a:prstGeom prst="rect">
+            <a:avLst/>
+          </a:prstGeom>
+          <a:solidFill>
+            <a:srgbClr val="1A1A1A"/>
+          </a:solidFill>
+          <a:ln>
+            <a:solidFill>
+              <a:srgbClr val="1A1A1A"/>
+            </a:solidFill>
+          </a:ln>
         </p:spPr>
         <p:txBody>
           <a:bodyPr wrap="square" lIns="0" tIns="0" rIns="0" bIns="0" rtlCol="0" anchor="ctr"/>
           <a:lstStyle/>
           <a:p>
-            <a:pPr algn="l" indent="0" marL="0">
-              <a:buNone/>
-            </a:pPr>
-            <a:r>
-              <a:rPr lang="en-US" sz="2400" b="1" dirty="0">
-                <a:solidFill>
-                  <a:schemeClr val="tx1"/>
-                </a:solidFill>
-              </a:rPr>
-              <a:t>発表の組み立て</a:t>
-            </a:r>
-            <a:endParaRPr lang="en-US" sz="2400" dirty="0"/>
-          </a:p>
-        </p:txBody>
-      </p:sp>
-      <p:sp>
-        <p:nvSpPr>
-          <p:cNvPr id="3" name="chip"/>
-          <p:cNvSpPr/>
-          <p:nvPr/>
-        </p:nvSpPr>
-        <p:spPr>
-          <a:xfrm>
-            <a:off x="548640" y="292608"/>
-            <a:ext cx="1069848" cy="292608"/>
-          </a:xfrm>
-          <a:prstGeom prst="roundRect">
-            <a:avLst>
-              <a:gd name="adj" fmla="val 50000"/>
-            </a:avLst>
-          </a:prstGeom>
-          <a:solidFill>
-            <a:schemeClr val="tx1"/>
-          </a:solidFill>
-          <a:ln w="12700">
-            <a:solidFill>
-              <a:schemeClr val="tx1"/>
-            </a:solidFill>
-            <a:prstDash val="solid"/>
-          </a:ln>
-        </p:spPr>
-      </p:sp>
-      <p:sp>
-        <p:nvSpPr>
-          <p:cNvPr id="4" name="chip-text"/>
-          <p:cNvSpPr txBox="1"/>
-          <p:nvPr/>
-        </p:nvSpPr>
-        <p:spPr>
-          <a:xfrm>
-            <a:off x="548640" y="292608"/>
-            <a:ext cx="1069848" cy="292608"/>
-          </a:xfrm>
-          <a:prstGeom prst="rect">
-            <a:avLst/>
-          </a:prstGeom>
-          <a:noFill/>
-          <a:ln/>
-        </p:spPr>
-        <p:txBody>
-          <a:bodyPr wrap="square" lIns="0" tIns="0" rIns="0" bIns="0" rtlCol="0" anchor="ctr"/>
-          <a:lstStyle/>
-          <a:p>
             <a:pPr algn="ctr" indent="0" marL="0">
               <a:buNone/>
             </a:pPr>
             <a:r>
-              <a:rPr lang="en-US" sz="1100" b="1" dirty="0">
+              <a:rPr lang="ja-JP" altLang="en-US" sz="1100" dirty="0">
                 <a:solidFill>
-                  <a:schemeClr val="accent1"/>
+                  <a:srgbClr val="FFFFFF"/>
                 </a:solidFill>
+                <a:latin typeface="Dela Gothic One" pitchFamily="34" charset="0"/>
+                <a:ea typeface="けいふぉんと" pitchFamily="34" charset="-122"/>
+                <a:cs typeface="Dela Gothic One" pitchFamily="34" charset="-120"/>
               </a:rPr>
               <a:t>発表 5分</a:t>
             </a:r>
-            <a:endParaRPr lang="en-US" sz="1100" dirty="0"/>
+            <a:endParaRPr lang="ja-JP" sz="1100" dirty="0"/>
           </a:p>
         </p:txBody>
       </p:sp>
       <p:sp>
         <p:nvSpPr>
-          <p:cNvPr id="6" name="card"/>
+          <p:cNvPr id="3" name="Text 1"/>
+          <p:cNvSpPr txBox="1"/>
+          <p:nvPr/>
+        </p:nvSpPr>
+        <p:spPr>
+          <a:xfrm>
+            <a:off x="411480" y="502920"/>
+            <a:ext cx="8321040" cy="685800"/>
+          </a:xfrm>
+          <a:prstGeom prst="rect">
+            <a:avLst/>
+          </a:prstGeom>
+          <a:noFill/>
+          <a:ln/>
+        </p:spPr>
+        <p:txBody>
+          <a:bodyPr wrap="square" lIns="0" tIns="0" rIns="0" bIns="0" rtlCol="0" anchor="ctr">
+            <a:normAutofit/>
+          </a:bodyPr>
+          <a:lstStyle/>
+          <a:p>
+            <a:pPr indent="0" marL="0">
+              <a:buNone/>
+            </a:pPr>
+            <a:r>
+              <a:rPr lang="ja-JP" altLang="en-US" sz="2600" dirty="0">
+                <a:solidFill>
+                  <a:srgbClr val="1A1A1A"/>
+                </a:solidFill>
+                <a:latin typeface="Dela Gothic One" pitchFamily="34" charset="0"/>
+                <a:ea typeface="けいふぉんと" pitchFamily="34" charset="-122"/>
+                <a:cs typeface="Dela Gothic One" pitchFamily="34" charset="-120"/>
+              </a:rPr>
+              <a:t>発表の組み立て</a:t>
+            </a:r>
+            <a:endParaRPr lang="ja-JP" sz="2600" dirty="0"/>
+          </a:p>
+        </p:txBody>
+      </p:sp>
+      <p:sp>
+        <p:nvSpPr>
+          <p:cNvPr id="5" name="card"/>
           <p:cNvSpPr/>
           <p:nvPr/>
         </p:nvSpPr>
         <p:spPr>
           <a:xfrm>
-            <a:off x="548640" y="1828800"/>
-            <a:ext cx="1302106" cy="1463040"/>
+            <a:off x="502920" y="1691640"/>
+            <a:ext cx="1320394" cy="1600200"/>
           </a:xfrm>
           <a:prstGeom prst="roundRect">
             <a:avLst>
-              <a:gd name="adj" fmla="val 8427"/>
+              <a:gd name="adj" fmla="val 6925"/>
             </a:avLst>
           </a:prstGeom>
           <a:solidFill>
-            <a:schemeClr val="bg1"/>
+            <a:srgbClr val="FFFFFF"/>
           </a:solidFill>
-          <a:ln w="19050">
+          <a:ln w="25400">
             <a:solidFill>
               <a:srgbClr val="1A1A1A"/>
             </a:solidFill>
             <a:prstDash val="solid"/>
           </a:ln>
           <a:effectLst>
-            <a:outerShdw sx="100000" sy="100000" kx="0" ky="0" algn="bl" rotWithShape="0" blurRad="101600" dist="38100" dir="2700000">
-              <a:srgbClr val="000000">
-                <a:alpha val="18000"/>
+            <a:outerShdw sx="100000" sy="100000" kx="0" ky="0" algn="bl" rotWithShape="0" blurRad="101600" dist="50800" dir="2700000">
+              <a:srgbClr val="1A1A1A">
+                <a:alpha val="100000"/>
               </a:srgbClr>
             </a:outerShdw>
           </a:effectLst>
@@ -3420,20 +3305,26 @@
       </p:sp>
       <p:sp>
         <p:nvSpPr>
-          <p:cNvPr id="7" name="Text 4"/>
+          <p:cNvPr id="6" name="Text 3"/>
           <p:cNvSpPr txBox="1"/>
           <p:nvPr/>
         </p:nvSpPr>
         <p:spPr>
-          <a:xfrm>
-            <a:off x="548640" y="1993392"/>
-            <a:ext cx="1302106" cy="274320"/>
-          </a:xfrm>
-          <a:prstGeom prst="rect">
-            <a:avLst/>
-          </a:prstGeom>
-          <a:noFill/>
-          <a:ln/>
+          <a:xfrm rot="-180000">
+            <a:off x="705917" y="1545336"/>
+            <a:ext cx="914400" cy="292608"/>
+          </a:xfrm>
+          <a:prstGeom prst="rect">
+            <a:avLst/>
+          </a:prstGeom>
+          <a:solidFill>
+            <a:srgbClr val="1A1A1A"/>
+          </a:solidFill>
+          <a:ln>
+            <a:solidFill>
+              <a:srgbClr val="1A1A1A"/>
+            </a:solidFill>
+          </a:ln>
         </p:spPr>
         <p:txBody>
           <a:bodyPr wrap="square" lIns="0" tIns="0" rIns="0" bIns="0" rtlCol="0" anchor="ctr"/>
@@ -3443,27 +3334,30 @@
               <a:buNone/>
             </a:pPr>
             <a:r>
-              <a:rPr lang="en-US" sz="1000" b="1" dirty="0">
+              <a:rPr lang="ja-JP" altLang="en-US" sz="1000" dirty="0">
                 <a:solidFill>
-                  <a:schemeClr val="accent2"/>
+                  <a:srgbClr val="FFFFFF"/>
                 </a:solidFill>
+                <a:latin typeface="Dela Gothic One" pitchFamily="34" charset="0"/>
+                <a:ea typeface="けいふぉんと" pitchFamily="34" charset="-122"/>
+                <a:cs typeface="Dela Gothic One" pitchFamily="34" charset="-120"/>
               </a:rPr>
               <a:t>STEP 1</a:t>
             </a:r>
-            <a:endParaRPr lang="en-US" sz="1000" dirty="0"/>
+            <a:endParaRPr lang="ja-JP" sz="1000" dirty="0"/>
           </a:p>
         </p:txBody>
       </p:sp>
       <p:sp>
         <p:nvSpPr>
-          <p:cNvPr id="8" name="flow-node"/>
+          <p:cNvPr id="7" name="flow-node"/>
           <p:cNvSpPr txBox="1"/>
           <p:nvPr/>
         </p:nvSpPr>
         <p:spPr>
           <a:xfrm>
-            <a:off x="640080" y="2286000"/>
-            <a:ext cx="1119226" cy="868680"/>
+            <a:off x="612648" y="1965960"/>
+            <a:ext cx="1100938" cy="1234440"/>
           </a:xfrm>
           <a:prstGeom prst="rect">
             <a:avLst/>
@@ -3472,41 +3366,49 @@
           <a:ln/>
         </p:spPr>
         <p:txBody>
-          <a:bodyPr wrap="square" lIns="0" tIns="0" rIns="0" bIns="0" rtlCol="0" anchor="ctr"/>
+          <a:bodyPr wrap="square" lIns="0" tIns="0" rIns="0" bIns="0" rtlCol="0" anchor="ctr">
+            <a:normAutofit/>
+          </a:bodyPr>
           <a:lstStyle/>
           <a:p>
             <a:pPr algn="ctr" indent="0" marL="0">
               <a:buNone/>
             </a:pPr>
             <a:r>
-              <a:rPr lang="en-US" sz="1250" b="1" dirty="0">
+              <a:rPr lang="ja-JP" altLang="en-US" sz="1250" b="1" dirty="0">
                 <a:solidFill>
-                  <a:schemeClr val="tx1"/>
+                  <a:srgbClr val="1A1A1A"/>
                 </a:solidFill>
+                <a:latin typeface="Noto Sans JP" pitchFamily="34" charset="0"/>
+                <a:ea typeface="Noto Sans JP" pitchFamily="34" charset="-122"/>
+                <a:cs typeface="Noto Sans JP" pitchFamily="34" charset="-120"/>
               </a:rPr>
               <a:t>困りごと</a:t>
             </a:r>
-            <a:endParaRPr lang="en-US" sz="1250" dirty="0"/>
+            <a:endParaRPr lang="ja-JP" sz="1250" dirty="0"/>
           </a:p>
           <a:p>
             <a:pPr algn="ctr" indent="0" marL="0">
               <a:buNone/>
             </a:pPr>
             <a:r>
-              <a:rPr lang="en-US" sz="1250" b="1" dirty="0">
+              <a:rPr lang="ja-JP" altLang="en-US" sz="1250" b="1" dirty="0">
                 <a:solidFill>
-                  <a:schemeClr val="tx1"/>
+                  <a:srgbClr val="1A1A1A"/>
                 </a:solidFill>
+                <a:latin typeface="Noto Sans JP" pitchFamily="34" charset="0"/>
+                <a:ea typeface="Noto Sans JP" pitchFamily="34" charset="-122"/>
+                <a:cs typeface="Noto Sans JP" pitchFamily="34" charset="-120"/>
               </a:rPr>
               <a:t>30秒</a:t>
             </a:r>
-            <a:endParaRPr lang="en-US" sz="1250" dirty="0"/>
+            <a:endParaRPr lang="ja-JP" sz="1250" dirty="0"/>
           </a:p>
         </p:txBody>
       </p:sp>
       <p:pic>
         <p:nvPicPr>
-          <p:cNvPr id="9" name="flow-arrow" descr="preencoded.png">    </p:cNvPr>
+          <p:cNvPr id="8" name="flow-arrow" descr="preencoded.png">    </p:cNvPr>
           <p:cNvPicPr>
             <a:picLocks noChangeAspect="1"/>
           </p:cNvPicPr>
@@ -3520,8 +3422,8 @@
         </p:blipFill>
         <p:spPr>
           <a:xfrm>
-            <a:off x="1923898" y="2441448"/>
-            <a:ext cx="237744" cy="237744"/>
+            <a:off x="1887322" y="2363724"/>
+            <a:ext cx="256032" cy="256032"/>
           </a:xfrm>
           <a:prstGeom prst="rect">
             <a:avLst/>
@@ -3530,33 +3432,33 @@
       </p:pic>
       <p:sp>
         <p:nvSpPr>
-          <p:cNvPr id="10" name="card"/>
+          <p:cNvPr id="9" name="card"/>
           <p:cNvSpPr/>
           <p:nvPr/>
         </p:nvSpPr>
         <p:spPr>
           <a:xfrm>
-            <a:off x="2234794" y="1828800"/>
-            <a:ext cx="1302106" cy="1463040"/>
+            <a:off x="2207362" y="1691640"/>
+            <a:ext cx="1320394" cy="1600200"/>
           </a:xfrm>
           <a:prstGeom prst="roundRect">
             <a:avLst>
-              <a:gd name="adj" fmla="val 8427"/>
+              <a:gd name="adj" fmla="val 6925"/>
             </a:avLst>
           </a:prstGeom>
           <a:solidFill>
-            <a:schemeClr val="bg1"/>
+            <a:srgbClr val="FFFFFF"/>
           </a:solidFill>
-          <a:ln w="19050">
+          <a:ln w="25400">
             <a:solidFill>
               <a:srgbClr val="1A1A1A"/>
             </a:solidFill>
             <a:prstDash val="solid"/>
           </a:ln>
           <a:effectLst>
-            <a:outerShdw sx="100000" sy="100000" kx="0" ky="0" algn="bl" rotWithShape="0" blurRad="101600" dist="38100" dir="2700000">
-              <a:srgbClr val="000000">
-                <a:alpha val="18000"/>
+            <a:outerShdw sx="100000" sy="100000" kx="0" ky="0" algn="bl" rotWithShape="0" blurRad="101600" dist="50800" dir="2700000">
+              <a:srgbClr val="1A1A1A">
+                <a:alpha val="100000"/>
               </a:srgbClr>
             </a:outerShdw>
           </a:effectLst>
@@ -3564,20 +3466,26 @@
       </p:sp>
       <p:sp>
         <p:nvSpPr>
-          <p:cNvPr id="11" name="Text 7"/>
+          <p:cNvPr id="10" name="Text 6"/>
           <p:cNvSpPr txBox="1"/>
           <p:nvPr/>
         </p:nvSpPr>
         <p:spPr>
-          <a:xfrm>
-            <a:off x="2234794" y="1993392"/>
-            <a:ext cx="1302106" cy="274320"/>
-          </a:xfrm>
-          <a:prstGeom prst="rect">
-            <a:avLst/>
-          </a:prstGeom>
-          <a:noFill/>
-          <a:ln/>
+          <a:xfrm rot="-180000">
+            <a:off x="2410358" y="1545336"/>
+            <a:ext cx="914400" cy="292608"/>
+          </a:xfrm>
+          <a:prstGeom prst="rect">
+            <a:avLst/>
+          </a:prstGeom>
+          <a:solidFill>
+            <a:srgbClr val="1A1A1A"/>
+          </a:solidFill>
+          <a:ln>
+            <a:solidFill>
+              <a:srgbClr val="1A1A1A"/>
+            </a:solidFill>
+          </a:ln>
         </p:spPr>
         <p:txBody>
           <a:bodyPr wrap="square" lIns="0" tIns="0" rIns="0" bIns="0" rtlCol="0" anchor="ctr"/>
@@ -3587,27 +3495,30 @@
               <a:buNone/>
             </a:pPr>
             <a:r>
-              <a:rPr lang="en-US" sz="1000" b="1" dirty="0">
+              <a:rPr lang="ja-JP" altLang="en-US" sz="1000" dirty="0">
                 <a:solidFill>
-                  <a:schemeClr val="accent2"/>
+                  <a:srgbClr val="FFFFFF"/>
                 </a:solidFill>
+                <a:latin typeface="Dela Gothic One" pitchFamily="34" charset="0"/>
+                <a:ea typeface="けいふぉんと" pitchFamily="34" charset="-122"/>
+                <a:cs typeface="Dela Gothic One" pitchFamily="34" charset="-120"/>
               </a:rPr>
               <a:t>STEP 2</a:t>
             </a:r>
-            <a:endParaRPr lang="en-US" sz="1000" dirty="0"/>
+            <a:endParaRPr lang="ja-JP" sz="1000" dirty="0"/>
           </a:p>
         </p:txBody>
       </p:sp>
       <p:sp>
         <p:nvSpPr>
-          <p:cNvPr id="12" name="flow-node"/>
+          <p:cNvPr id="11" name="flow-node"/>
           <p:cNvSpPr txBox="1"/>
           <p:nvPr/>
         </p:nvSpPr>
         <p:spPr>
           <a:xfrm>
-            <a:off x="2326234" y="2286000"/>
-            <a:ext cx="1119226" cy="868680"/>
+            <a:off x="2317090" y="1965960"/>
+            <a:ext cx="1100938" cy="1234440"/>
           </a:xfrm>
           <a:prstGeom prst="rect">
             <a:avLst/>
@@ -3616,41 +3527,49 @@
           <a:ln/>
         </p:spPr>
         <p:txBody>
-          <a:bodyPr wrap="square" lIns="0" tIns="0" rIns="0" bIns="0" rtlCol="0" anchor="ctr"/>
+          <a:bodyPr wrap="square" lIns="0" tIns="0" rIns="0" bIns="0" rtlCol="0" anchor="ctr">
+            <a:normAutofit/>
+          </a:bodyPr>
           <a:lstStyle/>
           <a:p>
             <a:pPr algn="ctr" indent="0" marL="0">
               <a:buNone/>
             </a:pPr>
             <a:r>
-              <a:rPr lang="en-US" sz="1250" b="1" dirty="0">
+              <a:rPr lang="ja-JP" altLang="en-US" sz="1250" b="1" dirty="0">
                 <a:solidFill>
-                  <a:schemeClr val="tx1"/>
+                  <a:srgbClr val="1A1A1A"/>
                 </a:solidFill>
+                <a:latin typeface="Noto Sans JP" pitchFamily="34" charset="0"/>
+                <a:ea typeface="Noto Sans JP" pitchFamily="34" charset="-122"/>
+                <a:cs typeface="Noto Sans JP" pitchFamily="34" charset="-120"/>
               </a:rPr>
               <a:t>デモ</a:t>
             </a:r>
-            <a:endParaRPr lang="en-US" sz="1250" dirty="0"/>
+            <a:endParaRPr lang="ja-JP" sz="1250" dirty="0"/>
           </a:p>
           <a:p>
             <a:pPr algn="ctr" indent="0" marL="0">
               <a:buNone/>
             </a:pPr>
             <a:r>
-              <a:rPr lang="en-US" sz="1250" b="1" dirty="0">
+              <a:rPr lang="ja-JP" altLang="en-US" sz="1250" b="1" dirty="0">
                 <a:solidFill>
-                  <a:schemeClr val="tx1"/>
+                  <a:srgbClr val="1A1A1A"/>
                 </a:solidFill>
+                <a:latin typeface="Noto Sans JP" pitchFamily="34" charset="0"/>
+                <a:ea typeface="Noto Sans JP" pitchFamily="34" charset="-122"/>
+                <a:cs typeface="Noto Sans JP" pitchFamily="34" charset="-120"/>
               </a:rPr>
               <a:t>2分</a:t>
             </a:r>
-            <a:endParaRPr lang="en-US" sz="1250" dirty="0"/>
+            <a:endParaRPr lang="ja-JP" sz="1250" dirty="0"/>
           </a:p>
         </p:txBody>
       </p:sp>
       <p:pic>
         <p:nvPicPr>
-          <p:cNvPr id="13" name="flow-arrow" descr="preencoded.png">    </p:cNvPr>
+          <p:cNvPr id="12" name="flow-arrow" descr="preencoded.png">    </p:cNvPr>
           <p:cNvPicPr>
             <a:picLocks noChangeAspect="1"/>
           </p:cNvPicPr>
@@ -3664,8 +3583,8 @@
         </p:blipFill>
         <p:spPr>
           <a:xfrm>
-            <a:off x="3610051" y="2441448"/>
-            <a:ext cx="237744" cy="237744"/>
+            <a:off x="3591763" y="2363724"/>
+            <a:ext cx="256032" cy="256032"/>
           </a:xfrm>
           <a:prstGeom prst="rect">
             <a:avLst/>
@@ -3674,33 +3593,33 @@
       </p:pic>
       <p:sp>
         <p:nvSpPr>
-          <p:cNvPr id="14" name="card"/>
+          <p:cNvPr id="13" name="card"/>
           <p:cNvSpPr/>
           <p:nvPr/>
         </p:nvSpPr>
         <p:spPr>
           <a:xfrm>
-            <a:off x="3920947" y="1828800"/>
-            <a:ext cx="1302106" cy="1463040"/>
+            <a:off x="3911803" y="1691640"/>
+            <a:ext cx="1320394" cy="1600200"/>
           </a:xfrm>
           <a:prstGeom prst="roundRect">
             <a:avLst>
-              <a:gd name="adj" fmla="val 8427"/>
+              <a:gd name="adj" fmla="val 6925"/>
             </a:avLst>
           </a:prstGeom>
           <a:solidFill>
-            <a:schemeClr val="bg1"/>
+            <a:srgbClr val="FFFFFF"/>
           </a:solidFill>
-          <a:ln w="19050">
+          <a:ln w="25400">
             <a:solidFill>
               <a:srgbClr val="1A1A1A"/>
             </a:solidFill>
             <a:prstDash val="solid"/>
           </a:ln>
           <a:effectLst>
-            <a:outerShdw sx="100000" sy="100000" kx="0" ky="0" algn="bl" rotWithShape="0" blurRad="101600" dist="38100" dir="2700000">
-              <a:srgbClr val="000000">
-                <a:alpha val="18000"/>
+            <a:outerShdw sx="100000" sy="100000" kx="0" ky="0" algn="bl" rotWithShape="0" blurRad="101600" dist="50800" dir="2700000">
+              <a:srgbClr val="1A1A1A">
+                <a:alpha val="100000"/>
               </a:srgbClr>
             </a:outerShdw>
           </a:effectLst>
@@ -3708,20 +3627,26 @@
       </p:sp>
       <p:sp>
         <p:nvSpPr>
-          <p:cNvPr id="15" name="Text 10"/>
+          <p:cNvPr id="14" name="Text 9"/>
           <p:cNvSpPr txBox="1"/>
           <p:nvPr/>
         </p:nvSpPr>
         <p:spPr>
-          <a:xfrm>
-            <a:off x="3920947" y="1993392"/>
-            <a:ext cx="1302106" cy="274320"/>
-          </a:xfrm>
-          <a:prstGeom prst="rect">
-            <a:avLst/>
-          </a:prstGeom>
-          <a:noFill/>
-          <a:ln/>
+          <a:xfrm rot="-180000">
+            <a:off x="4114800" y="1545336"/>
+            <a:ext cx="914400" cy="292608"/>
+          </a:xfrm>
+          <a:prstGeom prst="rect">
+            <a:avLst/>
+          </a:prstGeom>
+          <a:solidFill>
+            <a:srgbClr val="1A1A1A"/>
+          </a:solidFill>
+          <a:ln>
+            <a:solidFill>
+              <a:srgbClr val="1A1A1A"/>
+            </a:solidFill>
+          </a:ln>
         </p:spPr>
         <p:txBody>
           <a:bodyPr wrap="square" lIns="0" tIns="0" rIns="0" bIns="0" rtlCol="0" anchor="ctr"/>
@@ -3731,27 +3656,30 @@
               <a:buNone/>
             </a:pPr>
             <a:r>
-              <a:rPr lang="en-US" sz="1000" b="1" dirty="0">
+              <a:rPr lang="ja-JP" altLang="en-US" sz="1000" dirty="0">
                 <a:solidFill>
-                  <a:schemeClr val="accent2"/>
+                  <a:srgbClr val="FFFFFF"/>
                 </a:solidFill>
+                <a:latin typeface="Dela Gothic One" pitchFamily="34" charset="0"/>
+                <a:ea typeface="けいふぉんと" pitchFamily="34" charset="-122"/>
+                <a:cs typeface="Dela Gothic One" pitchFamily="34" charset="-120"/>
               </a:rPr>
               <a:t>STEP 3</a:t>
             </a:r>
-            <a:endParaRPr lang="en-US" sz="1000" dirty="0"/>
+            <a:endParaRPr lang="ja-JP" sz="1000" dirty="0"/>
           </a:p>
         </p:txBody>
       </p:sp>
       <p:sp>
         <p:nvSpPr>
-          <p:cNvPr id="16" name="flow-node"/>
+          <p:cNvPr id="15" name="flow-node"/>
           <p:cNvSpPr txBox="1"/>
           <p:nvPr/>
         </p:nvSpPr>
         <p:spPr>
           <a:xfrm>
-            <a:off x="4012387" y="2286000"/>
-            <a:ext cx="1119226" cy="868680"/>
+            <a:off x="4021531" y="1965960"/>
+            <a:ext cx="1100938" cy="1234440"/>
           </a:xfrm>
           <a:prstGeom prst="rect">
             <a:avLst/>
@@ -3760,41 +3688,49 @@
           <a:ln/>
         </p:spPr>
         <p:txBody>
-          <a:bodyPr wrap="square" lIns="0" tIns="0" rIns="0" bIns="0" rtlCol="0" anchor="ctr"/>
+          <a:bodyPr wrap="square" lIns="0" tIns="0" rIns="0" bIns="0" rtlCol="0" anchor="ctr">
+            <a:normAutofit/>
+          </a:bodyPr>
           <a:lstStyle/>
           <a:p>
             <a:pPr algn="ctr" indent="0" marL="0">
               <a:buNone/>
             </a:pPr>
             <a:r>
-              <a:rPr lang="en-US" sz="1250" b="1" dirty="0">
+              <a:rPr lang="ja-JP" altLang="en-US" sz="1250" b="1" dirty="0">
                 <a:solidFill>
-                  <a:schemeClr val="tx1"/>
+                  <a:srgbClr val="1A1A1A"/>
                 </a:solidFill>
+                <a:latin typeface="Noto Sans JP" pitchFamily="34" charset="0"/>
+                <a:ea typeface="Noto Sans JP" pitchFamily="34" charset="-122"/>
+                <a:cs typeface="Noto Sans JP" pitchFamily="34" charset="-120"/>
               </a:rPr>
               <a:t>Lark／AIで</a:t>
             </a:r>
-            <a:endParaRPr lang="en-US" sz="1250" dirty="0"/>
+            <a:endParaRPr lang="ja-JP" sz="1250" dirty="0"/>
           </a:p>
           <a:p>
             <a:pPr algn="ctr" indent="0" marL="0">
               <a:buNone/>
             </a:pPr>
             <a:r>
-              <a:rPr lang="en-US" sz="1250" b="1" dirty="0">
+              <a:rPr lang="ja-JP" altLang="en-US" sz="1250" b="1" dirty="0">
                 <a:solidFill>
-                  <a:schemeClr val="tx1"/>
+                  <a:srgbClr val="1A1A1A"/>
                 </a:solidFill>
+                <a:latin typeface="Noto Sans JP" pitchFamily="34" charset="0"/>
+                <a:ea typeface="Noto Sans JP" pitchFamily="34" charset="-122"/>
+                <a:cs typeface="Noto Sans JP" pitchFamily="34" charset="-120"/>
               </a:rPr>
               <a:t>作った所 1分</a:t>
             </a:r>
-            <a:endParaRPr lang="en-US" sz="1250" dirty="0"/>
+            <a:endParaRPr lang="ja-JP" sz="1250" dirty="0"/>
           </a:p>
         </p:txBody>
       </p:sp>
       <p:pic>
         <p:nvPicPr>
-          <p:cNvPr id="17" name="flow-arrow" descr="preencoded.png">    </p:cNvPr>
+          <p:cNvPr id="16" name="flow-arrow" descr="preencoded.png">    </p:cNvPr>
           <p:cNvPicPr>
             <a:picLocks noChangeAspect="1"/>
           </p:cNvPicPr>
@@ -3808,8 +3744,8 @@
         </p:blipFill>
         <p:spPr>
           <a:xfrm>
-            <a:off x="5296205" y="2441448"/>
-            <a:ext cx="237744" cy="237744"/>
+            <a:off x="5296205" y="2363724"/>
+            <a:ext cx="256032" cy="256032"/>
           </a:xfrm>
           <a:prstGeom prst="rect">
             <a:avLst/>
@@ -3818,33 +3754,33 @@
       </p:pic>
       <p:sp>
         <p:nvSpPr>
-          <p:cNvPr id="18" name="card"/>
+          <p:cNvPr id="17" name="card"/>
           <p:cNvSpPr/>
           <p:nvPr/>
         </p:nvSpPr>
         <p:spPr>
           <a:xfrm>
-            <a:off x="5607101" y="1828800"/>
-            <a:ext cx="1302106" cy="1463040"/>
+            <a:off x="5616245" y="1691640"/>
+            <a:ext cx="1320394" cy="1600200"/>
           </a:xfrm>
           <a:prstGeom prst="roundRect">
             <a:avLst>
-              <a:gd name="adj" fmla="val 8427"/>
+              <a:gd name="adj" fmla="val 6925"/>
             </a:avLst>
           </a:prstGeom>
           <a:solidFill>
-            <a:schemeClr val="bg1"/>
+            <a:srgbClr val="FFFFFF"/>
           </a:solidFill>
-          <a:ln w="19050">
+          <a:ln w="25400">
             <a:solidFill>
               <a:srgbClr val="1A1A1A"/>
             </a:solidFill>
             <a:prstDash val="solid"/>
           </a:ln>
           <a:effectLst>
-            <a:outerShdw sx="100000" sy="100000" kx="0" ky="0" algn="bl" rotWithShape="0" blurRad="101600" dist="38100" dir="2700000">
-              <a:srgbClr val="000000">
-                <a:alpha val="18000"/>
+            <a:outerShdw sx="100000" sy="100000" kx="0" ky="0" algn="bl" rotWithShape="0" blurRad="101600" dist="50800" dir="2700000">
+              <a:srgbClr val="1A1A1A">
+                <a:alpha val="100000"/>
               </a:srgbClr>
             </a:outerShdw>
           </a:effectLst>
@@ -3852,20 +3788,26 @@
       </p:sp>
       <p:sp>
         <p:nvSpPr>
-          <p:cNvPr id="19" name="Text 13"/>
+          <p:cNvPr id="18" name="Text 12"/>
           <p:cNvSpPr txBox="1"/>
           <p:nvPr/>
         </p:nvSpPr>
         <p:spPr>
-          <a:xfrm>
-            <a:off x="5607101" y="1993392"/>
-            <a:ext cx="1302106" cy="274320"/>
-          </a:xfrm>
-          <a:prstGeom prst="rect">
-            <a:avLst/>
-          </a:prstGeom>
-          <a:noFill/>
-          <a:ln/>
+          <a:xfrm rot="-180000">
+            <a:off x="5819242" y="1545336"/>
+            <a:ext cx="914400" cy="292608"/>
+          </a:xfrm>
+          <a:prstGeom prst="rect">
+            <a:avLst/>
+          </a:prstGeom>
+          <a:solidFill>
+            <a:srgbClr val="1A1A1A"/>
+          </a:solidFill>
+          <a:ln>
+            <a:solidFill>
+              <a:srgbClr val="1A1A1A"/>
+            </a:solidFill>
+          </a:ln>
         </p:spPr>
         <p:txBody>
           <a:bodyPr wrap="square" lIns="0" tIns="0" rIns="0" bIns="0" rtlCol="0" anchor="ctr"/>
@@ -3875,27 +3817,30 @@
               <a:buNone/>
             </a:pPr>
             <a:r>
-              <a:rPr lang="en-US" sz="1000" b="1" dirty="0">
+              <a:rPr lang="ja-JP" altLang="en-US" sz="1000" dirty="0">
                 <a:solidFill>
-                  <a:schemeClr val="accent2"/>
+                  <a:srgbClr val="FFFFFF"/>
                 </a:solidFill>
+                <a:latin typeface="Dela Gothic One" pitchFamily="34" charset="0"/>
+                <a:ea typeface="けいふぉんと" pitchFamily="34" charset="-122"/>
+                <a:cs typeface="Dela Gothic One" pitchFamily="34" charset="-120"/>
               </a:rPr>
               <a:t>STEP 4</a:t>
             </a:r>
-            <a:endParaRPr lang="en-US" sz="1000" dirty="0"/>
+            <a:endParaRPr lang="ja-JP" sz="1000" dirty="0"/>
           </a:p>
         </p:txBody>
       </p:sp>
       <p:sp>
         <p:nvSpPr>
-          <p:cNvPr id="20" name="flow-node"/>
+          <p:cNvPr id="19" name="flow-node"/>
           <p:cNvSpPr txBox="1"/>
           <p:nvPr/>
         </p:nvSpPr>
         <p:spPr>
           <a:xfrm>
-            <a:off x="5698541" y="2286000"/>
-            <a:ext cx="1119226" cy="868680"/>
+            <a:off x="5725973" y="1965960"/>
+            <a:ext cx="1100938" cy="1234440"/>
           </a:xfrm>
           <a:prstGeom prst="rect">
             <a:avLst/>
@@ -3904,41 +3849,49 @@
           <a:ln/>
         </p:spPr>
         <p:txBody>
-          <a:bodyPr wrap="square" lIns="0" tIns="0" rIns="0" bIns="0" rtlCol="0" anchor="ctr"/>
+          <a:bodyPr wrap="square" lIns="0" tIns="0" rIns="0" bIns="0" rtlCol="0" anchor="ctr">
+            <a:normAutofit/>
+          </a:bodyPr>
           <a:lstStyle/>
           <a:p>
             <a:pPr algn="ctr" indent="0" marL="0">
               <a:buNone/>
             </a:pPr>
             <a:r>
-              <a:rPr lang="en-US" sz="1250" b="1" dirty="0">
+              <a:rPr lang="ja-JP" altLang="en-US" sz="1250" b="1" dirty="0">
                 <a:solidFill>
-                  <a:schemeClr val="tx1"/>
+                  <a:srgbClr val="1A1A1A"/>
                 </a:solidFill>
+                <a:latin typeface="Noto Sans JP" pitchFamily="34" charset="0"/>
+                <a:ea typeface="Noto Sans JP" pitchFamily="34" charset="-122"/>
+                <a:cs typeface="Noto Sans JP" pitchFamily="34" charset="-120"/>
               </a:rPr>
               <a:t>結果・反応</a:t>
             </a:r>
-            <a:endParaRPr lang="en-US" sz="1250" dirty="0"/>
+            <a:endParaRPr lang="ja-JP" sz="1250" dirty="0"/>
           </a:p>
           <a:p>
             <a:pPr algn="ctr" indent="0" marL="0">
               <a:buNone/>
             </a:pPr>
             <a:r>
-              <a:rPr lang="en-US" sz="1250" b="1" dirty="0">
+              <a:rPr lang="ja-JP" altLang="en-US" sz="1250" b="1" dirty="0">
                 <a:solidFill>
-                  <a:schemeClr val="tx1"/>
+                  <a:srgbClr val="1A1A1A"/>
                 </a:solidFill>
+                <a:latin typeface="Noto Sans JP" pitchFamily="34" charset="0"/>
+                <a:ea typeface="Noto Sans JP" pitchFamily="34" charset="-122"/>
+                <a:cs typeface="Noto Sans JP" pitchFamily="34" charset="-120"/>
               </a:rPr>
               <a:t>1分</a:t>
             </a:r>
-            <a:endParaRPr lang="en-US" sz="1250" dirty="0"/>
+            <a:endParaRPr lang="ja-JP" sz="1250" dirty="0"/>
           </a:p>
         </p:txBody>
       </p:sp>
       <p:pic>
         <p:nvPicPr>
-          <p:cNvPr id="21" name="flow-arrow" descr="preencoded.png">    </p:cNvPr>
+          <p:cNvPr id="20" name="flow-arrow" descr="preencoded.png">    </p:cNvPr>
           <p:cNvPicPr>
             <a:picLocks noChangeAspect="1"/>
           </p:cNvPicPr>
@@ -3952,8 +3905,8 @@
         </p:blipFill>
         <p:spPr>
           <a:xfrm>
-            <a:off x="6982358" y="2441448"/>
-            <a:ext cx="237744" cy="237744"/>
+            <a:off x="7000646" y="2363724"/>
+            <a:ext cx="256032" cy="256032"/>
           </a:xfrm>
           <a:prstGeom prst="rect">
             <a:avLst/>
@@ -3962,33 +3915,33 @@
       </p:pic>
       <p:sp>
         <p:nvSpPr>
-          <p:cNvPr id="22" name="card"/>
+          <p:cNvPr id="21" name="card"/>
           <p:cNvSpPr/>
           <p:nvPr/>
         </p:nvSpPr>
         <p:spPr>
           <a:xfrm>
-            <a:off x="7293254" y="1828800"/>
-            <a:ext cx="1302106" cy="1463040"/>
+            <a:off x="7320686" y="1691640"/>
+            <a:ext cx="1320394" cy="1600200"/>
           </a:xfrm>
           <a:prstGeom prst="roundRect">
             <a:avLst>
-              <a:gd name="adj" fmla="val 8427"/>
+              <a:gd name="adj" fmla="val 6925"/>
             </a:avLst>
           </a:prstGeom>
           <a:solidFill>
-            <a:schemeClr val="accent1"/>
+            <a:srgbClr val="F5A623"/>
           </a:solidFill>
-          <a:ln w="19050">
+          <a:ln w="25400">
             <a:solidFill>
               <a:srgbClr val="1A1A1A"/>
             </a:solidFill>
             <a:prstDash val="solid"/>
           </a:ln>
           <a:effectLst>
-            <a:outerShdw sx="100000" sy="100000" kx="0" ky="0" algn="bl" rotWithShape="0" blurRad="101600" dist="38100" dir="2700000">
-              <a:srgbClr val="000000">
-                <a:alpha val="18000"/>
+            <a:outerShdw sx="100000" sy="100000" kx="0" ky="0" algn="bl" rotWithShape="0" blurRad="101600" dist="50800" dir="2700000">
+              <a:srgbClr val="1A1A1A">
+                <a:alpha val="100000"/>
               </a:srgbClr>
             </a:outerShdw>
           </a:effectLst>
@@ -3996,20 +3949,26 @@
       </p:sp>
       <p:sp>
         <p:nvSpPr>
-          <p:cNvPr id="23" name="Text 16"/>
+          <p:cNvPr id="22" name="Text 15"/>
           <p:cNvSpPr txBox="1"/>
           <p:nvPr/>
         </p:nvSpPr>
         <p:spPr>
-          <a:xfrm>
-            <a:off x="7293254" y="1993392"/>
-            <a:ext cx="1302106" cy="274320"/>
-          </a:xfrm>
-          <a:prstGeom prst="rect">
-            <a:avLst/>
-          </a:prstGeom>
-          <a:noFill/>
-          <a:ln/>
+          <a:xfrm rot="-180000">
+            <a:off x="7523683" y="1545336"/>
+            <a:ext cx="914400" cy="292608"/>
+          </a:xfrm>
+          <a:prstGeom prst="rect">
+            <a:avLst/>
+          </a:prstGeom>
+          <a:solidFill>
+            <a:srgbClr val="1A1A1A"/>
+          </a:solidFill>
+          <a:ln>
+            <a:solidFill>
+              <a:srgbClr val="1A1A1A"/>
+            </a:solidFill>
+          </a:ln>
         </p:spPr>
         <p:txBody>
           <a:bodyPr wrap="square" lIns="0" tIns="0" rIns="0" bIns="0" rtlCol="0" anchor="ctr"/>
@@ -4019,27 +3978,30 @@
               <a:buNone/>
             </a:pPr>
             <a:r>
-              <a:rPr lang="en-US" sz="1000" b="1" dirty="0">
+              <a:rPr lang="ja-JP" altLang="en-US" sz="1000" dirty="0">
                 <a:solidFill>
-                  <a:schemeClr val="accent2"/>
+                  <a:srgbClr val="FFFFFF"/>
                 </a:solidFill>
+                <a:latin typeface="Dela Gothic One" pitchFamily="34" charset="0"/>
+                <a:ea typeface="けいふぉんと" pitchFamily="34" charset="-122"/>
+                <a:cs typeface="Dela Gothic One" pitchFamily="34" charset="-120"/>
               </a:rPr>
               <a:t>STEP 5</a:t>
             </a:r>
-            <a:endParaRPr lang="en-US" sz="1000" dirty="0"/>
+            <a:endParaRPr lang="ja-JP" sz="1000" dirty="0"/>
           </a:p>
         </p:txBody>
       </p:sp>
       <p:sp>
         <p:nvSpPr>
-          <p:cNvPr id="24" name="flow-node"/>
+          <p:cNvPr id="23" name="flow-node"/>
           <p:cNvSpPr txBox="1"/>
           <p:nvPr/>
         </p:nvSpPr>
         <p:spPr>
           <a:xfrm>
-            <a:off x="7384694" y="2286000"/>
-            <a:ext cx="1119226" cy="868680"/>
+            <a:off x="7430414" y="1965960"/>
+            <a:ext cx="1100938" cy="1234440"/>
           </a:xfrm>
           <a:prstGeom prst="rect">
             <a:avLst/>
@@ -4048,122 +4010,125 @@
           <a:ln/>
         </p:spPr>
         <p:txBody>
-          <a:bodyPr wrap="square" lIns="0" tIns="0" rIns="0" bIns="0" rtlCol="0" anchor="ctr"/>
+          <a:bodyPr wrap="square" lIns="0" tIns="0" rIns="0" bIns="0" rtlCol="0" anchor="ctr">
+            <a:normAutofit/>
+          </a:bodyPr>
           <a:lstStyle/>
           <a:p>
             <a:pPr algn="ctr" indent="0" marL="0">
               <a:buNone/>
             </a:pPr>
             <a:r>
-              <a:rPr lang="en-US" sz="1250" b="1" dirty="0">
+              <a:rPr lang="ja-JP" altLang="en-US" sz="1250" b="1" dirty="0">
                 <a:solidFill>
-                  <a:schemeClr val="tx1"/>
+                  <a:srgbClr val="1A1A1A"/>
                 </a:solidFill>
+                <a:latin typeface="Noto Sans JP" pitchFamily="34" charset="0"/>
+                <a:ea typeface="Noto Sans JP" pitchFamily="34" charset="-122"/>
+                <a:cs typeface="Noto Sans JP" pitchFamily="34" charset="-120"/>
               </a:rPr>
               <a:t>次に足す</a:t>
             </a:r>
-            <a:endParaRPr lang="en-US" sz="1250" dirty="0"/>
+            <a:endParaRPr lang="ja-JP" sz="1250" dirty="0"/>
           </a:p>
           <a:p>
             <a:pPr algn="ctr" indent="0" marL="0">
               <a:buNone/>
             </a:pPr>
             <a:r>
-              <a:rPr lang="en-US" sz="1250" b="1" dirty="0">
+              <a:rPr lang="ja-JP" altLang="en-US" sz="1250" b="1" dirty="0">
                 <a:solidFill>
-                  <a:schemeClr val="tx1"/>
+                  <a:srgbClr val="1A1A1A"/>
                 </a:solidFill>
+                <a:latin typeface="Noto Sans JP" pitchFamily="34" charset="0"/>
+                <a:ea typeface="Noto Sans JP" pitchFamily="34" charset="-122"/>
+                <a:cs typeface="Noto Sans JP" pitchFamily="34" charset="-120"/>
               </a:rPr>
               <a:t>30秒</a:t>
             </a:r>
-            <a:endParaRPr lang="en-US" sz="1250" dirty="0"/>
+            <a:endParaRPr lang="ja-JP" sz="1250" dirty="0"/>
           </a:p>
         </p:txBody>
       </p:sp>
       <p:sp>
         <p:nvSpPr>
-          <p:cNvPr id="25" name="foot-box"/>
-          <p:cNvSpPr/>
-          <p:nvPr/>
-        </p:nvSpPr>
-        <p:spPr>
-          <a:xfrm>
-            <a:off x="548640" y="3794760"/>
-            <a:ext cx="8046720" cy="502920"/>
-          </a:xfrm>
-          <a:prstGeom prst="roundRect">
-            <a:avLst>
-              <a:gd name="adj" fmla="val 18182"/>
-            </a:avLst>
+          <p:cNvPr id="24" name="Text 17"/>
+          <p:cNvSpPr txBox="1"/>
+          <p:nvPr/>
+        </p:nvSpPr>
+        <p:spPr>
+          <a:xfrm rot="-60000">
+            <a:off x="502920" y="3794760"/>
+            <a:ext cx="8138160" cy="502920"/>
+          </a:xfrm>
+          <a:prstGeom prst="rect">
+            <a:avLst/>
           </a:prstGeom>
           <a:solidFill>
-            <a:schemeClr val="bg2"/>
+            <a:srgbClr val="DD6420"/>
           </a:solidFill>
-          <a:ln w="12700">
+          <a:ln w="19050">
             <a:solidFill>
-              <a:schemeClr val="bg2"/>
+              <a:srgbClr val="1A1A1A"/>
             </a:solidFill>
-            <a:prstDash val="solid"/>
           </a:ln>
-        </p:spPr>
-      </p:sp>
-      <p:pic>
-        <p:nvPicPr>
-          <p:cNvPr id="26" name="foot-icon" descr="preencoded.png">    </p:cNvPr>
-          <p:cNvPicPr>
-            <a:picLocks noChangeAspect="1"/>
-          </p:cNvPicPr>
-          <p:nvPr/>
-        </p:nvPicPr>
-        <p:blipFill>
-          <a:blip r:embed="rId5"/>
-          <a:stretch>
-            <a:fillRect/>
-          </a:stretch>
-        </p:blipFill>
-        <p:spPr>
-          <a:xfrm>
-            <a:off x="685800" y="3922776"/>
-            <a:ext cx="246888" cy="246888"/>
-          </a:xfrm>
-          <a:prstGeom prst="rect">
-            <a:avLst/>
-          </a:prstGeom>
-        </p:spPr>
-      </p:pic>
-      <p:sp>
-        <p:nvSpPr>
-          <p:cNvPr id="27" name="foot-text"/>
-          <p:cNvSpPr txBox="1"/>
-          <p:nvPr/>
-        </p:nvSpPr>
-        <p:spPr>
-          <a:xfrm>
-            <a:off x="1051560" y="3794760"/>
-            <a:ext cx="7406640" cy="502920"/>
-          </a:xfrm>
-          <a:prstGeom prst="rect">
-            <a:avLst/>
-          </a:prstGeom>
-          <a:noFill/>
-          <a:ln/>
+          <a:effectLst>
+            <a:outerShdw sx="100000" sy="100000" kx="0" ky="0" algn="bl" rotWithShape="0" blurRad="101600" dist="38100" dir="2700000">
+              <a:srgbClr val="1A1A1A">
+                <a:alpha val="100000"/>
+              </a:srgbClr>
+            </a:outerShdw>
+          </a:effectLst>
         </p:spPr>
         <p:txBody>
-          <a:bodyPr wrap="square" lIns="0" tIns="0" rIns="0" bIns="0" rtlCol="0" anchor="ctr"/>
+          <a:bodyPr wrap="square" lIns="0" tIns="1905" rIns="1905" bIns="0" rtlCol="0" anchor="ctr">
+            <a:normAutofit/>
+          </a:bodyPr>
           <a:lstStyle/>
           <a:p>
-            <a:pPr indent="0" marL="0">
+            <a:pPr algn="ctr" indent="0" marL="0">
               <a:buNone/>
             </a:pPr>
             <a:r>
-              <a:rPr lang="en-US" sz="1150" dirty="0">
+              <a:rPr lang="ja-JP" altLang="en-US" sz="1300" b="1" dirty="0">
                 <a:solidFill>
-                  <a:schemeClr val="tx1"/>
+                  <a:srgbClr val="FFFFFF"/>
                 </a:solidFill>
+                <a:latin typeface="Noto Sans JP" pitchFamily="34" charset="0"/>
+                <a:ea typeface="Noto Sans JP" pitchFamily="34" charset="-122"/>
+                <a:cs typeface="Noto Sans JP" pitchFamily="34" charset="-120"/>
               </a:rPr>
-              <a:t>デモは「入力 → BASE → 通知 → 集計」を通しで見せる</a:t>
-            </a:r>
-            <a:endParaRPr lang="en-US" sz="1150" dirty="0"/>
+              <a:t>デモは</a:t>
+            </a:r>
+            <a:pPr algn="ctr" indent="0" marL="0">
+              <a:buNone/>
+            </a:pPr>
+            <a:r>
+              <a:rPr lang="ja-JP" altLang="en-US" sz="1300" b="1" dirty="0">
+                <a:solidFill>
+                  <a:srgbClr val="FFD600"/>
+                </a:solidFill>
+                <a:latin typeface="Noto Sans JP" pitchFamily="34" charset="0"/>
+                <a:ea typeface="Noto Sans JP" pitchFamily="34" charset="-122"/>
+                <a:cs typeface="Noto Sans JP" pitchFamily="34" charset="-120"/>
+              </a:rPr>
+              <a:t>「入力 → BASE → 通知 → 集計」</a:t>
+            </a:r>
+            <a:pPr algn="ctr" indent="0" marL="0">
+              <a:buNone/>
+            </a:pPr>
+            <a:r>
+              <a:rPr lang="ja-JP" altLang="en-US" sz="1300" b="1" dirty="0">
+                <a:solidFill>
+                  <a:srgbClr val="FFFFFF"/>
+                </a:solidFill>
+                <a:latin typeface="Noto Sans JP" pitchFamily="34" charset="0"/>
+                <a:ea typeface="Noto Sans JP" pitchFamily="34" charset="-122"/>
+                <a:cs typeface="Noto Sans JP" pitchFamily="34" charset="-120"/>
+              </a:rPr>
+              <a:t>を通しで見せる</a:t>
+            </a:r>
+            <a:endParaRPr lang="ja-JP" sz="1300" dirty="0"/>
           </a:p>
         </p:txBody>
       </p:sp>
@@ -4179,8 +4144,8 @@
         </p:nvSpPr>
         <p:spPr>
           <a:xfrm>
-            <a:off x="8229600" y="4773168"/>
-            <a:ext cx="365760" cy="228600"/>
+            <a:off x="8366760" y="4754880"/>
+            <a:ext cx="365760" cy="274320"/>
           </a:xfrm>
           <a:prstGeom prst="rect">
             <a:avLst/>
@@ -4192,20 +4157,23 @@
           </a:extLst>
         </p:spPr>
         <p:txBody>
-          <a:bodyPr/>
+          <a:bodyPr anchor="ctr"/>
           <a:lstStyle>
             <a:lvl1pPr>
-              <a:defRPr sz="900">
+              <a:defRPr sz="850">
                 <a:solidFill>
-                  <a:srgbClr val="5A6872"/>
+                  <a:srgbClr val="FFFFFF"/>
                 </a:solidFill>
+                <a:latin typeface="Noto Sans JP"/>
+                <a:ea typeface="Noto Sans JP"/>
+                <a:cs typeface="Noto Sans JP"/>
               </a:defRPr>
             </a:lvl1pPr>
           </a:lstStyle>
           <a:p>
             <a:pPr algn="r"/>
             <a:fld id="{F7021451-1387-4CA6-816F-3879F97B5CBC}" type="slidenum">
-              <a:rPr b="0" lang="en-US"/>
+              <a:rPr b="1" lang="en-US"/>
               <a:t>3</a:t>
             </a:fld>
             <a:endParaRPr lang="en-US"/>
@@ -4240,103 +4208,120 @@
       <p:sp>
         <p:nvSpPr>
           <p:cNvPr id="2" name="Text 0"/>
-          <p:cNvSpPr/>
-          <p:nvPr>
-            <p:ph idx="100" type="title" hasCustomPrompt="1"/>
-          </p:nvPr>
-        </p:nvSpPr>
-        <p:spPr>
-          <a:xfrm>
-            <a:off x="548640" y="658368"/>
-            <a:ext cx="8046720" cy="566928"/>
-          </a:xfrm>
-          <a:prstGeom prst="rect">
-            <a:avLst/>
-          </a:prstGeom>
-          <a:noFill/>
-          <a:ln/>
+          <p:cNvSpPr txBox="1"/>
+          <p:nvPr/>
+        </p:nvSpPr>
+        <p:spPr>
+          <a:xfrm rot="-180000">
+            <a:off x="411480" y="201168"/>
+            <a:ext cx="1478128" cy="352044"/>
+          </a:xfrm>
+          <a:prstGeom prst="rect">
+            <a:avLst/>
+          </a:prstGeom>
+          <a:solidFill>
+            <a:srgbClr val="1A1A1A"/>
+          </a:solidFill>
+          <a:ln>
+            <a:solidFill>
+              <a:srgbClr val="1A1A1A"/>
+            </a:solidFill>
+          </a:ln>
         </p:spPr>
         <p:txBody>
           <a:bodyPr wrap="square" lIns="0" tIns="0" rIns="0" bIns="0" rtlCol="0" anchor="ctr"/>
           <a:lstStyle/>
           <a:p>
-            <a:pPr algn="l" indent="0" marL="0">
+            <a:pPr algn="ctr" indent="0" marL="0">
               <a:buNone/>
             </a:pPr>
             <a:r>
-              <a:rPr lang="en-US" sz="2400" b="1" dirty="0">
+              <a:rPr lang="ja-JP" altLang="en-US" sz="1100" dirty="0">
                 <a:solidFill>
-                  <a:schemeClr val="tx1"/>
+                  <a:srgbClr val="FFFFFF"/>
                 </a:solidFill>
+                <a:latin typeface="Dela Gothic One" pitchFamily="34" charset="0"/>
+                <a:ea typeface="けいふぉんと" pitchFamily="34" charset="-122"/>
+                <a:cs typeface="Dela Gothic One" pitchFamily="34" charset="-120"/>
+              </a:rPr>
+              <a:t>構築者チェック</a:t>
+            </a:r>
+            <a:endParaRPr lang="ja-JP" sz="1100" dirty="0"/>
+          </a:p>
+        </p:txBody>
+      </p:sp>
+      <p:sp>
+        <p:nvSpPr>
+          <p:cNvPr id="3" name="Text 1"/>
+          <p:cNvSpPr txBox="1"/>
+          <p:nvPr/>
+        </p:nvSpPr>
+        <p:spPr>
+          <a:xfrm>
+            <a:off x="411480" y="502920"/>
+            <a:ext cx="8321040" cy="685800"/>
+          </a:xfrm>
+          <a:prstGeom prst="rect">
+            <a:avLst/>
+          </a:prstGeom>
+          <a:noFill/>
+          <a:ln/>
+        </p:spPr>
+        <p:txBody>
+          <a:bodyPr wrap="square" lIns="0" tIns="0" rIns="0" bIns="0" rtlCol="0" anchor="ctr">
+            <a:normAutofit/>
+          </a:bodyPr>
+          <a:lstStyle/>
+          <a:p>
+            <a:pPr indent="0" marL="0">
+              <a:buNone/>
+            </a:pPr>
+            <a:r>
+              <a:rPr lang="ja-JP" altLang="en-US" sz="2600" dirty="0">
+                <a:solidFill>
+                  <a:srgbClr val="1A1A1A"/>
+                </a:solidFill>
+                <a:latin typeface="Dela Gothic One" pitchFamily="34" charset="0"/>
+                <a:ea typeface="けいふぉんと" pitchFamily="34" charset="-122"/>
+                <a:cs typeface="Dela Gothic One" pitchFamily="34" charset="-120"/>
               </a:rPr>
               <a:t>構築者の8つの力</a:t>
             </a:r>
-            <a:endParaRPr lang="en-US" sz="2400" dirty="0"/>
+            <a:endParaRPr lang="ja-JP" sz="2600" dirty="0"/>
           </a:p>
         </p:txBody>
       </p:sp>
       <p:sp>
         <p:nvSpPr>
-          <p:cNvPr id="3" name="chip"/>
+          <p:cNvPr id="5" name="Shape 2"/>
           <p:cNvSpPr/>
           <p:nvPr/>
         </p:nvSpPr>
         <p:spPr>
           <a:xfrm>
-            <a:off x="548640" y="292608"/>
-            <a:ext cx="1344168" cy="292608"/>
-          </a:xfrm>
-          <a:prstGeom prst="roundRect">
-            <a:avLst>
-              <a:gd name="adj" fmla="val 50000"/>
-            </a:avLst>
+            <a:off x="502920" y="1417320"/>
+            <a:ext cx="8138160" cy="2194560"/>
+          </a:xfrm>
+          <a:prstGeom prst="rect">
+            <a:avLst/>
           </a:prstGeom>
           <a:solidFill>
-            <a:schemeClr val="tx1"/>
+            <a:srgbClr val="FFFFFF"/>
           </a:solidFill>
-          <a:ln w="12700">
+          <a:ln w="25400">
             <a:solidFill>
-              <a:schemeClr val="tx1"/>
+              <a:srgbClr val="1A1A1A"/>
             </a:solidFill>
             <a:prstDash val="solid"/>
           </a:ln>
-        </p:spPr>
-      </p:sp>
-      <p:sp>
-        <p:nvSpPr>
-          <p:cNvPr id="4" name="chip-text"/>
-          <p:cNvSpPr txBox="1"/>
-          <p:nvPr/>
-        </p:nvSpPr>
-        <p:spPr>
-          <a:xfrm>
-            <a:off x="548640" y="292608"/>
-            <a:ext cx="1344168" cy="292608"/>
-          </a:xfrm>
-          <a:prstGeom prst="rect">
-            <a:avLst/>
-          </a:prstGeom>
-          <a:noFill/>
-          <a:ln/>
-        </p:spPr>
-        <p:txBody>
-          <a:bodyPr wrap="square" lIns="0" tIns="0" rIns="0" bIns="0" rtlCol="0" anchor="ctr"/>
-          <a:lstStyle/>
-          <a:p>
-            <a:pPr algn="ctr" indent="0" marL="0">
-              <a:buNone/>
-            </a:pPr>
-            <a:r>
-              <a:rPr lang="en-US" sz="1100" b="1" dirty="0">
-                <a:solidFill>
-                  <a:schemeClr val="accent1"/>
-                </a:solidFill>
-              </a:rPr>
-              <a:t>構築者チェック</a:t>
-            </a:r>
-            <a:endParaRPr lang="en-US" sz="1100" dirty="0"/>
-          </a:p>
-        </p:txBody>
+          <a:effectLst>
+            <a:outerShdw sx="100000" sy="100000" kx="0" ky="0" algn="bl" rotWithShape="0" blurRad="101600" dist="50800" dir="2700000">
+              <a:srgbClr val="1A1A1A">
+                <a:alpha val="100000"/>
+              </a:srgbClr>
+            </a:outerShdw>
+          </a:effectLst>
+        </p:spPr>
       </p:sp>
       <p:graphicFrame>
         <p:nvGraphicFramePr>
@@ -4353,16 +4338,16 @@
           </p:nvPr>
         </p:nvGraphicFramePr>
         <p:xfrm>
-          <a:off x="548640" y="1463040"/>
-          <a:ext cx="8046720" cy="914400"/>
+          <a:off x="502920" y="1417320"/>
+          <a:ext cx="8138160" cy="914400"/>
         </p:xfrm>
         <a:graphic>
           <a:graphicData uri="http://schemas.openxmlformats.org/drawingml/2006/table">
             <a:tbl>
               <a:tblPr/>
               <a:tblGrid>
-                <a:gridCol w="2145792"/>
-                <a:gridCol w="5900928"/>
+                <a:gridCol w="2170176"/>
+                <a:gridCol w="5967984"/>
               </a:tblGrid>
               <a:tr h="365760">
                 <a:tc>
@@ -4374,47 +4359,54 @@
                         <a:buNone/>
                       </a:pPr>
                       <a:r>
-                        <a:rPr lang="en-US" sz="1200" b="1" dirty="0">
+                        <a:rPr lang="en-US" sz="1250" b="1" dirty="0">
                           <a:solidFill>
-                            <a:srgbClr val="FFD600"/>
+                            <a:srgbClr val="FFFFFF"/>
                           </a:solidFill>
+                          <a:latin typeface="Noto Sans JP" pitchFamily="34" charset="0"/>
+                          <a:ea typeface="Noto Sans JP" pitchFamily="34" charset="-122"/>
+                          <a:cs typeface="Noto Sans JP" pitchFamily="34" charset="-120"/>
                         </a:rPr>
                         <a:t>力</a:t>
                       </a:r>
-                      <a:endParaRPr lang="en-US" sz="1200" dirty="0"/>
+                      <a:endParaRPr lang="en-US" sz="1250" dirty="0">
+                        <a:latin typeface="Noto Sans JP" charset="0"/>
+                        <a:ea typeface="Noto Sans JP" charset="0"/>
+                        <a:cs typeface="Noto Sans JP" charset="0"/>
+                      </a:endParaRPr>
                     </a:p>
                   </a:txBody>
                   <a:tcPr marL="91440" marR="91440" marT="0" marB="0" anchor="ctr">
-                    <a:lnL w="9525" cap="flat" cmpd="sng" algn="ctr">
-                      <a:solidFill>
-                        <a:srgbClr val="BBBBBB"/>
+                    <a:lnL w="12700" cap="flat" cmpd="sng" algn="ctr">
+                      <a:solidFill>
+                        <a:srgbClr val="1A1A1A"/>
                       </a:solidFill>
                       <a:prstDash val="solid"/>
                       <a:round/>
                       <a:headEnd type="none" w="med" len="med"/>
                       <a:tailEnd type="none" w="med" len="med"/>
                     </a:lnL>
-                    <a:lnR w="9525" cap="flat" cmpd="sng" algn="ctr">
-                      <a:solidFill>
-                        <a:srgbClr val="BBBBBB"/>
+                    <a:lnR w="12700" cap="flat" cmpd="sng" algn="ctr">
+                      <a:solidFill>
+                        <a:srgbClr val="1A1A1A"/>
                       </a:solidFill>
                       <a:prstDash val="solid"/>
                       <a:round/>
                       <a:headEnd type="none" w="med" len="med"/>
                       <a:tailEnd type="none" w="med" len="med"/>
                     </a:lnR>
-                    <a:lnT w="9525" cap="flat" cmpd="sng" algn="ctr">
-                      <a:solidFill>
-                        <a:srgbClr val="BBBBBB"/>
+                    <a:lnT w="12700" cap="flat" cmpd="sng" algn="ctr">
+                      <a:solidFill>
+                        <a:srgbClr val="1A1A1A"/>
                       </a:solidFill>
                       <a:prstDash val="solid"/>
                       <a:round/>
                       <a:headEnd type="none" w="med" len="med"/>
                       <a:tailEnd type="none" w="med" len="med"/>
                     </a:lnT>
-                    <a:lnB w="9525" cap="flat" cmpd="sng" algn="ctr">
-                      <a:solidFill>
-                        <a:srgbClr val="BBBBBB"/>
+                    <a:lnB w="12700" cap="flat" cmpd="sng" algn="ctr">
+                      <a:solidFill>
+                        <a:srgbClr val="1A1A1A"/>
                       </a:solidFill>
                       <a:prstDash val="solid"/>
                       <a:round/>
@@ -4435,47 +4427,54 @@
                         <a:buNone/>
                       </a:pPr>
                       <a:r>
-                        <a:rPr lang="en-US" sz="1200" b="1" dirty="0">
+                        <a:rPr lang="en-US" sz="1250" b="1" dirty="0">
                           <a:solidFill>
-                            <a:srgbClr val="FFD600"/>
+                            <a:srgbClr val="FFFFFF"/>
                           </a:solidFill>
+                          <a:latin typeface="Noto Sans JP" pitchFamily="34" charset="0"/>
+                          <a:ea typeface="Noto Sans JP" pitchFamily="34" charset="-122"/>
+                          <a:cs typeface="Noto Sans JP" pitchFamily="34" charset="-120"/>
                         </a:rPr>
                         <a:t>確かめること</a:t>
                       </a:r>
-                      <a:endParaRPr lang="en-US" sz="1200" dirty="0"/>
+                      <a:endParaRPr lang="en-US" sz="1250" dirty="0">
+                        <a:latin typeface="Noto Sans JP" charset="0"/>
+                        <a:ea typeface="Noto Sans JP" charset="0"/>
+                        <a:cs typeface="Noto Sans JP" charset="0"/>
+                      </a:endParaRPr>
                     </a:p>
                   </a:txBody>
                   <a:tcPr marL="91440" marR="91440" marT="0" marB="0" anchor="ctr">
-                    <a:lnL w="9525" cap="flat" cmpd="sng" algn="ctr">
-                      <a:solidFill>
-                        <a:srgbClr val="BBBBBB"/>
+                    <a:lnL w="12700" cap="flat" cmpd="sng" algn="ctr">
+                      <a:solidFill>
+                        <a:srgbClr val="1A1A1A"/>
                       </a:solidFill>
                       <a:prstDash val="solid"/>
                       <a:round/>
                       <a:headEnd type="none" w="med" len="med"/>
                       <a:tailEnd type="none" w="med" len="med"/>
                     </a:lnL>
-                    <a:lnR w="9525" cap="flat" cmpd="sng" algn="ctr">
-                      <a:solidFill>
-                        <a:srgbClr val="BBBBBB"/>
+                    <a:lnR w="12700" cap="flat" cmpd="sng" algn="ctr">
+                      <a:solidFill>
+                        <a:srgbClr val="1A1A1A"/>
                       </a:solidFill>
                       <a:prstDash val="solid"/>
                       <a:round/>
                       <a:headEnd type="none" w="med" len="med"/>
                       <a:tailEnd type="none" w="med" len="med"/>
                     </a:lnR>
-                    <a:lnT w="9525" cap="flat" cmpd="sng" algn="ctr">
-                      <a:solidFill>
-                        <a:srgbClr val="BBBBBB"/>
+                    <a:lnT w="12700" cap="flat" cmpd="sng" algn="ctr">
+                      <a:solidFill>
+                        <a:srgbClr val="1A1A1A"/>
                       </a:solidFill>
                       <a:prstDash val="solid"/>
                       <a:round/>
                       <a:headEnd type="none" w="med" len="med"/>
                       <a:tailEnd type="none" w="med" len="med"/>
                     </a:lnT>
-                    <a:lnB w="9525" cap="flat" cmpd="sng" algn="ctr">
-                      <a:solidFill>
-                        <a:srgbClr val="BBBBBB"/>
+                    <a:lnB w="12700" cap="flat" cmpd="sng" algn="ctr">
+                      <a:solidFill>
+                        <a:srgbClr val="1A1A1A"/>
                       </a:solidFill>
                       <a:prstDash val="solid"/>
                       <a:round/>
@@ -4500,45 +4499,52 @@
                       <a:r>
                         <a:rPr lang="en-US" sz="1200" b="1" dirty="0">
                           <a:solidFill>
-                            <a:srgbClr val="1A1A1A"/>
+                            <a:srgbClr val="DD6420"/>
                           </a:solidFill>
+                          <a:latin typeface="Noto Sans JP" pitchFamily="34" charset="0"/>
+                          <a:ea typeface="Noto Sans JP" pitchFamily="34" charset="-122"/>
+                          <a:cs typeface="Noto Sans JP" pitchFamily="34" charset="-120"/>
                         </a:rPr>
                         <a:t>聞き取る・決める</a:t>
                       </a:r>
-                      <a:endParaRPr lang="en-US" sz="1200" dirty="0"/>
+                      <a:endParaRPr lang="en-US" sz="1200" dirty="0">
+                        <a:latin typeface="Noto Sans JP" charset="0"/>
+                        <a:ea typeface="Noto Sans JP" charset="0"/>
+                        <a:cs typeface="Noto Sans JP" charset="0"/>
+                      </a:endParaRPr>
                     </a:p>
                   </a:txBody>
                   <a:tcPr marL="91440" marR="91440" marT="0" marB="0" anchor="ctr">
-                    <a:lnL w="9525" cap="flat" cmpd="sng" algn="ctr">
-                      <a:solidFill>
-                        <a:srgbClr val="BBBBBB"/>
+                    <a:lnL w="12700" cap="flat" cmpd="sng" algn="ctr">
+                      <a:solidFill>
+                        <a:srgbClr val="1A1A1A"/>
                       </a:solidFill>
                       <a:prstDash val="solid"/>
                       <a:round/>
                       <a:headEnd type="none" w="med" len="med"/>
                       <a:tailEnd type="none" w="med" len="med"/>
                     </a:lnL>
-                    <a:lnR w="9525" cap="flat" cmpd="sng" algn="ctr">
-                      <a:solidFill>
-                        <a:srgbClr val="BBBBBB"/>
+                    <a:lnR w="12700" cap="flat" cmpd="sng" algn="ctr">
+                      <a:solidFill>
+                        <a:srgbClr val="1A1A1A"/>
                       </a:solidFill>
                       <a:prstDash val="solid"/>
                       <a:round/>
                       <a:headEnd type="none" w="med" len="med"/>
                       <a:tailEnd type="none" w="med" len="med"/>
                     </a:lnR>
-                    <a:lnT w="9525" cap="flat" cmpd="sng" algn="ctr">
-                      <a:solidFill>
-                        <a:srgbClr val="BBBBBB"/>
+                    <a:lnT w="12700" cap="flat" cmpd="sng" algn="ctr">
+                      <a:solidFill>
+                        <a:srgbClr val="1A1A1A"/>
                       </a:solidFill>
                       <a:prstDash val="solid"/>
                       <a:round/>
                       <a:headEnd type="none" w="med" len="med"/>
                       <a:tailEnd type="none" w="med" len="med"/>
                     </a:lnT>
-                    <a:lnB w="9525" cap="flat" cmpd="sng" algn="ctr">
-                      <a:solidFill>
-                        <a:srgbClr val="BBBBBB"/>
+                    <a:lnB w="12700" cap="flat" cmpd="sng" algn="ctr">
+                      <a:solidFill>
+                        <a:srgbClr val="1A1A1A"/>
                       </a:solidFill>
                       <a:prstDash val="solid"/>
                       <a:round/>
@@ -4559,47 +4565,54 @@
                         <a:buNone/>
                       </a:pPr>
                       <a:r>
-                        <a:rPr lang="en-US" sz="1200" dirty="0">
+                        <a:rPr lang="en-US" sz="1200" b="1" dirty="0">
                           <a:solidFill>
                             <a:srgbClr val="1A1A1A"/>
                           </a:solidFill>
+                          <a:latin typeface="Noto Sans JP Medium" pitchFamily="34" charset="0"/>
+                          <a:ea typeface="Noto Sans JP Medium" pitchFamily="34" charset="-122"/>
+                          <a:cs typeface="Noto Sans JP Medium" pitchFamily="34" charset="-120"/>
                         </a:rPr>
                         <a:t>困りごとを聞き、作るものと成功の目安を決めた</a:t>
                       </a:r>
-                      <a:endParaRPr lang="en-US" sz="1200" dirty="0"/>
+                      <a:endParaRPr lang="en-US" sz="1200" dirty="0">
+                        <a:latin typeface="Noto Sans JP Medium" charset="0"/>
+                        <a:ea typeface="Noto Sans JP Medium" charset="0"/>
+                        <a:cs typeface="Noto Sans JP Medium" charset="0"/>
+                      </a:endParaRPr>
                     </a:p>
                   </a:txBody>
                   <a:tcPr marL="91440" marR="91440" marT="0" marB="0" anchor="ctr">
-                    <a:lnL w="9525" cap="flat" cmpd="sng" algn="ctr">
-                      <a:solidFill>
-                        <a:srgbClr val="BBBBBB"/>
+                    <a:lnL w="12700" cap="flat" cmpd="sng" algn="ctr">
+                      <a:solidFill>
+                        <a:srgbClr val="1A1A1A"/>
                       </a:solidFill>
                       <a:prstDash val="solid"/>
                       <a:round/>
                       <a:headEnd type="none" w="med" len="med"/>
                       <a:tailEnd type="none" w="med" len="med"/>
                     </a:lnL>
-                    <a:lnR w="9525" cap="flat" cmpd="sng" algn="ctr">
-                      <a:solidFill>
-                        <a:srgbClr val="BBBBBB"/>
+                    <a:lnR w="12700" cap="flat" cmpd="sng" algn="ctr">
+                      <a:solidFill>
+                        <a:srgbClr val="1A1A1A"/>
                       </a:solidFill>
                       <a:prstDash val="solid"/>
                       <a:round/>
                       <a:headEnd type="none" w="med" len="med"/>
                       <a:tailEnd type="none" w="med" len="med"/>
                     </a:lnR>
-                    <a:lnT w="9525" cap="flat" cmpd="sng" algn="ctr">
-                      <a:solidFill>
-                        <a:srgbClr val="BBBBBB"/>
+                    <a:lnT w="12700" cap="flat" cmpd="sng" algn="ctr">
+                      <a:solidFill>
+                        <a:srgbClr val="1A1A1A"/>
                       </a:solidFill>
                       <a:prstDash val="solid"/>
                       <a:round/>
                       <a:headEnd type="none" w="med" len="med"/>
                       <a:tailEnd type="none" w="med" len="med"/>
                     </a:lnT>
-                    <a:lnB w="9525" cap="flat" cmpd="sng" algn="ctr">
-                      <a:solidFill>
-                        <a:srgbClr val="BBBBBB"/>
+                    <a:lnB w="12700" cap="flat" cmpd="sng" algn="ctr">
+                      <a:solidFill>
+                        <a:srgbClr val="1A1A1A"/>
                       </a:solidFill>
                       <a:prstDash val="solid"/>
                       <a:round/>
@@ -4624,169 +4637,52 @@
                       <a:r>
                         <a:rPr lang="en-US" sz="1200" b="1" dirty="0">
                           <a:solidFill>
-                            <a:srgbClr val="1A1A1A"/>
+                            <a:srgbClr val="DD6420"/>
                           </a:solidFill>
+                          <a:latin typeface="Noto Sans JP" pitchFamily="34" charset="0"/>
+                          <a:ea typeface="Noto Sans JP" pitchFamily="34" charset="-122"/>
+                          <a:cs typeface="Noto Sans JP" pitchFamily="34" charset="-120"/>
                         </a:rPr>
                         <a:t>Larkで組む・回す</a:t>
                       </a:r>
-                      <a:endParaRPr lang="en-US" sz="1200" dirty="0"/>
+                      <a:endParaRPr lang="en-US" sz="1200" dirty="0">
+                        <a:latin typeface="Noto Sans JP" charset="0"/>
+                        <a:ea typeface="Noto Sans JP" charset="0"/>
+                        <a:cs typeface="Noto Sans JP" charset="0"/>
+                      </a:endParaRPr>
                     </a:p>
                   </a:txBody>
                   <a:tcPr marL="91440" marR="91440" marT="0" marB="0" anchor="ctr">
-                    <a:lnL w="9525" cap="flat" cmpd="sng" algn="ctr">
-                      <a:solidFill>
-                        <a:srgbClr val="BBBBBB"/>
+                    <a:lnL w="12700" cap="flat" cmpd="sng" algn="ctr">
+                      <a:solidFill>
+                        <a:srgbClr val="1A1A1A"/>
                       </a:solidFill>
                       <a:prstDash val="solid"/>
                       <a:round/>
                       <a:headEnd type="none" w="med" len="med"/>
                       <a:tailEnd type="none" w="med" len="med"/>
                     </a:lnL>
-                    <a:lnR w="9525" cap="flat" cmpd="sng" algn="ctr">
-                      <a:solidFill>
-                        <a:srgbClr val="BBBBBB"/>
+                    <a:lnR w="12700" cap="flat" cmpd="sng" algn="ctr">
+                      <a:solidFill>
+                        <a:srgbClr val="1A1A1A"/>
                       </a:solidFill>
                       <a:prstDash val="solid"/>
                       <a:round/>
                       <a:headEnd type="none" w="med" len="med"/>
                       <a:tailEnd type="none" w="med" len="med"/>
                     </a:lnR>
-                    <a:lnT w="9525" cap="flat" cmpd="sng" algn="ctr">
-                      <a:solidFill>
-                        <a:srgbClr val="BBBBBB"/>
+                    <a:lnT w="12700" cap="flat" cmpd="sng" algn="ctr">
+                      <a:solidFill>
+                        <a:srgbClr val="1A1A1A"/>
                       </a:solidFill>
                       <a:prstDash val="solid"/>
                       <a:round/>
                       <a:headEnd type="none" w="med" len="med"/>
                       <a:tailEnd type="none" w="med" len="med"/>
                     </a:lnT>
-                    <a:lnB w="9525" cap="flat" cmpd="sng" algn="ctr">
-                      <a:solidFill>
-                        <a:srgbClr val="BBBBBB"/>
-                      </a:solidFill>
-                      <a:prstDash val="solid"/>
-                      <a:round/>
-                      <a:headEnd type="none" w="med" len="med"/>
-                      <a:tailEnd type="none" w="med" len="med"/>
-                    </a:lnB>
-                    <a:solidFill>
-                      <a:srgbClr val="F4F4F4"/>
-                    </a:solidFill>
-                  </a:tcPr>
-                </a:tc>
-                <a:tc>
-                  <a:txBody>
-                    <a:bodyPr/>
-                    <a:lstStyle/>
-                    <a:p>
-                      <a:pPr indent="0" marL="0">
-                        <a:buNone/>
-                      </a:pPr>
-                      <a:r>
-                        <a:rPr lang="en-US" sz="1200" dirty="0">
-                          <a:solidFill>
-                            <a:srgbClr val="1A1A1A"/>
-                          </a:solidFill>
-                        </a:rPr>
-                        <a:t>テーブル・フォーム・ビュー・自動化が本番で動いている</a:t>
-                      </a:r>
-                      <a:endParaRPr lang="en-US" sz="1200" dirty="0"/>
-                    </a:p>
-                  </a:txBody>
-                  <a:tcPr marL="91440" marR="91440" marT="0" marB="0" anchor="ctr">
-                    <a:lnL w="9525" cap="flat" cmpd="sng" algn="ctr">
-                      <a:solidFill>
-                        <a:srgbClr val="BBBBBB"/>
-                      </a:solidFill>
-                      <a:prstDash val="solid"/>
-                      <a:round/>
-                      <a:headEnd type="none" w="med" len="med"/>
-                      <a:tailEnd type="none" w="med" len="med"/>
-                    </a:lnL>
-                    <a:lnR w="9525" cap="flat" cmpd="sng" algn="ctr">
-                      <a:solidFill>
-                        <a:srgbClr val="BBBBBB"/>
-                      </a:solidFill>
-                      <a:prstDash val="solid"/>
-                      <a:round/>
-                      <a:headEnd type="none" w="med" len="med"/>
-                      <a:tailEnd type="none" w="med" len="med"/>
-                    </a:lnR>
-                    <a:lnT w="9525" cap="flat" cmpd="sng" algn="ctr">
-                      <a:solidFill>
-                        <a:srgbClr val="BBBBBB"/>
-                      </a:solidFill>
-                      <a:prstDash val="solid"/>
-                      <a:round/>
-                      <a:headEnd type="none" w="med" len="med"/>
-                      <a:tailEnd type="none" w="med" len="med"/>
-                    </a:lnT>
-                    <a:lnB w="9525" cap="flat" cmpd="sng" algn="ctr">
-                      <a:solidFill>
-                        <a:srgbClr val="BBBBBB"/>
-                      </a:solidFill>
-                      <a:prstDash val="solid"/>
-                      <a:round/>
-                      <a:headEnd type="none" w="med" len="med"/>
-                      <a:tailEnd type="none" w="med" len="med"/>
-                    </a:lnB>
-                    <a:solidFill>
-                      <a:srgbClr val="F4F4F4"/>
-                    </a:solidFill>
-                  </a:tcPr>
-                </a:tc>
-              </a:tr>
-              <a:tr h="365760">
-                <a:tc>
-                  <a:txBody>
-                    <a:bodyPr/>
-                    <a:lstStyle/>
-                    <a:p>
-                      <a:pPr indent="0" marL="0">
-                        <a:buNone/>
-                      </a:pPr>
-                      <a:r>
-                        <a:rPr lang="en-US" sz="1200" b="1" dirty="0">
-                          <a:solidFill>
-                            <a:srgbClr val="1A1A1A"/>
-                          </a:solidFill>
-                        </a:rPr>
-                        <a:t>AIで作る・つなぐ</a:t>
-                      </a:r>
-                      <a:endParaRPr lang="en-US" sz="1200" dirty="0"/>
-                    </a:p>
-                  </a:txBody>
-                  <a:tcPr marL="91440" marR="91440" marT="0" marB="0" anchor="ctr">
-                    <a:lnL w="9525" cap="flat" cmpd="sng" algn="ctr">
-                      <a:solidFill>
-                        <a:srgbClr val="BBBBBB"/>
-                      </a:solidFill>
-                      <a:prstDash val="solid"/>
-                      <a:round/>
-                      <a:headEnd type="none" w="med" len="med"/>
-                      <a:tailEnd type="none" w="med" len="med"/>
-                    </a:lnL>
-                    <a:lnR w="9525" cap="flat" cmpd="sng" algn="ctr">
-                      <a:solidFill>
-                        <a:srgbClr val="BBBBBB"/>
-                      </a:solidFill>
-                      <a:prstDash val="solid"/>
-                      <a:round/>
-                      <a:headEnd type="none" w="med" len="med"/>
-                      <a:tailEnd type="none" w="med" len="med"/>
-                    </a:lnR>
-                    <a:lnT w="9525" cap="flat" cmpd="sng" algn="ctr">
-                      <a:solidFill>
-                        <a:srgbClr val="BBBBBB"/>
-                      </a:solidFill>
-                      <a:prstDash val="solid"/>
-                      <a:round/>
-                      <a:headEnd type="none" w="med" len="med"/>
-                      <a:tailEnd type="none" w="med" len="med"/>
-                    </a:lnT>
-                    <a:lnB w="9525" cap="flat" cmpd="sng" algn="ctr">
-                      <a:solidFill>
-                        <a:srgbClr val="BBBBBB"/>
+                    <a:lnB w="12700" cap="flat" cmpd="sng" algn="ctr">
+                      <a:solidFill>
+                        <a:srgbClr val="1A1A1A"/>
                       </a:solidFill>
                       <a:prstDash val="solid"/>
                       <a:round/>
@@ -4807,47 +4703,54 @@
                         <a:buNone/>
                       </a:pPr>
                       <a:r>
-                        <a:rPr lang="en-US" sz="1200" dirty="0">
+                        <a:rPr lang="en-US" sz="1200" b="1" dirty="0">
                           <a:solidFill>
                             <a:srgbClr val="1A1A1A"/>
                           </a:solidFill>
+                          <a:latin typeface="Noto Sans JP Medium" pitchFamily="34" charset="0"/>
+                          <a:ea typeface="Noto Sans JP Medium" pitchFamily="34" charset="-122"/>
+                          <a:cs typeface="Noto Sans JP Medium" pitchFamily="34" charset="-120"/>
                         </a:rPr>
-                        <a:t>アプリを公開し、BASE・LINEとつながっている</a:t>
+                        <a:t>テーブル・フォーム・ビュー・自動化が本番で動いている</a:t>
                       </a:r>
-                      <a:endParaRPr lang="en-US" sz="1200" dirty="0"/>
+                      <a:endParaRPr lang="en-US" sz="1200" dirty="0">
+                        <a:latin typeface="Noto Sans JP Medium" charset="0"/>
+                        <a:ea typeface="Noto Sans JP Medium" charset="0"/>
+                        <a:cs typeface="Noto Sans JP Medium" charset="0"/>
+                      </a:endParaRPr>
                     </a:p>
                   </a:txBody>
                   <a:tcPr marL="91440" marR="91440" marT="0" marB="0" anchor="ctr">
-                    <a:lnL w="9525" cap="flat" cmpd="sng" algn="ctr">
-                      <a:solidFill>
-                        <a:srgbClr val="BBBBBB"/>
+                    <a:lnL w="12700" cap="flat" cmpd="sng" algn="ctr">
+                      <a:solidFill>
+                        <a:srgbClr val="1A1A1A"/>
                       </a:solidFill>
                       <a:prstDash val="solid"/>
                       <a:round/>
                       <a:headEnd type="none" w="med" len="med"/>
                       <a:tailEnd type="none" w="med" len="med"/>
                     </a:lnL>
-                    <a:lnR w="9525" cap="flat" cmpd="sng" algn="ctr">
-                      <a:solidFill>
-                        <a:srgbClr val="BBBBBB"/>
+                    <a:lnR w="12700" cap="flat" cmpd="sng" algn="ctr">
+                      <a:solidFill>
+                        <a:srgbClr val="1A1A1A"/>
                       </a:solidFill>
                       <a:prstDash val="solid"/>
                       <a:round/>
                       <a:headEnd type="none" w="med" len="med"/>
                       <a:tailEnd type="none" w="med" len="med"/>
                     </a:lnR>
-                    <a:lnT w="9525" cap="flat" cmpd="sng" algn="ctr">
-                      <a:solidFill>
-                        <a:srgbClr val="BBBBBB"/>
+                    <a:lnT w="12700" cap="flat" cmpd="sng" algn="ctr">
+                      <a:solidFill>
+                        <a:srgbClr val="1A1A1A"/>
                       </a:solidFill>
                       <a:prstDash val="solid"/>
                       <a:round/>
                       <a:headEnd type="none" w="med" len="med"/>
                       <a:tailEnd type="none" w="med" len="med"/>
                     </a:lnT>
-                    <a:lnB w="9525" cap="flat" cmpd="sng" algn="ctr">
-                      <a:solidFill>
-                        <a:srgbClr val="BBBBBB"/>
+                    <a:lnB w="12700" cap="flat" cmpd="sng" algn="ctr">
+                      <a:solidFill>
+                        <a:srgbClr val="1A1A1A"/>
                       </a:solidFill>
                       <a:prstDash val="solid"/>
                       <a:round/>
@@ -4872,45 +4775,52 @@
                       <a:r>
                         <a:rPr lang="en-US" sz="1200" b="1" dirty="0">
                           <a:solidFill>
-                            <a:srgbClr val="1A1A1A"/>
+                            <a:srgbClr val="DD6420"/>
                           </a:solidFill>
+                          <a:latin typeface="Noto Sans JP" pitchFamily="34" charset="0"/>
+                          <a:ea typeface="Noto Sans JP" pitchFamily="34" charset="-122"/>
+                          <a:cs typeface="Noto Sans JP" pitchFamily="34" charset="-120"/>
                         </a:rPr>
-                        <a:t>守る・育てる</a:t>
+                        <a:t>AIで作る・つなぐ</a:t>
                       </a:r>
-                      <a:endParaRPr lang="en-US" sz="1200" dirty="0"/>
+                      <a:endParaRPr lang="en-US" sz="1200" dirty="0">
+                        <a:latin typeface="Noto Sans JP" charset="0"/>
+                        <a:ea typeface="Noto Sans JP" charset="0"/>
+                        <a:cs typeface="Noto Sans JP" charset="0"/>
+                      </a:endParaRPr>
                     </a:p>
                   </a:txBody>
                   <a:tcPr marL="91440" marR="91440" marT="0" marB="0" anchor="ctr">
-                    <a:lnL w="9525" cap="flat" cmpd="sng" algn="ctr">
-                      <a:solidFill>
-                        <a:srgbClr val="BBBBBB"/>
+                    <a:lnL w="12700" cap="flat" cmpd="sng" algn="ctr">
+                      <a:solidFill>
+                        <a:srgbClr val="1A1A1A"/>
                       </a:solidFill>
                       <a:prstDash val="solid"/>
                       <a:round/>
                       <a:headEnd type="none" w="med" len="med"/>
                       <a:tailEnd type="none" w="med" len="med"/>
                     </a:lnL>
-                    <a:lnR w="9525" cap="flat" cmpd="sng" algn="ctr">
-                      <a:solidFill>
-                        <a:srgbClr val="BBBBBB"/>
+                    <a:lnR w="12700" cap="flat" cmpd="sng" algn="ctr">
+                      <a:solidFill>
+                        <a:srgbClr val="1A1A1A"/>
                       </a:solidFill>
                       <a:prstDash val="solid"/>
                       <a:round/>
                       <a:headEnd type="none" w="med" len="med"/>
                       <a:tailEnd type="none" w="med" len="med"/>
                     </a:lnR>
-                    <a:lnT w="9525" cap="flat" cmpd="sng" algn="ctr">
-                      <a:solidFill>
-                        <a:srgbClr val="BBBBBB"/>
+                    <a:lnT w="12700" cap="flat" cmpd="sng" algn="ctr">
+                      <a:solidFill>
+                        <a:srgbClr val="1A1A1A"/>
                       </a:solidFill>
                       <a:prstDash val="solid"/>
                       <a:round/>
                       <a:headEnd type="none" w="med" len="med"/>
                       <a:tailEnd type="none" w="med" len="med"/>
                     </a:lnT>
-                    <a:lnB w="9525" cap="flat" cmpd="sng" algn="ctr">
-                      <a:solidFill>
-                        <a:srgbClr val="BBBBBB"/>
+                    <a:lnB w="12700" cap="flat" cmpd="sng" algn="ctr">
+                      <a:solidFill>
+                        <a:srgbClr val="1A1A1A"/>
                       </a:solidFill>
                       <a:prstDash val="solid"/>
                       <a:round/>
@@ -4918,7 +4828,7 @@
                       <a:tailEnd type="none" w="med" len="med"/>
                     </a:lnB>
                     <a:solidFill>
-                      <a:srgbClr val="F4F4F4"/>
+                      <a:srgbClr val="FFFFFF"/>
                     </a:solidFill>
                   </a:tcPr>
                 </a:tc>
@@ -4931,47 +4841,54 @@
                         <a:buNone/>
                       </a:pPr>
                       <a:r>
-                        <a:rPr lang="en-US" sz="1200" dirty="0">
+                        <a:rPr lang="en-US" sz="1200" b="1" dirty="0">
                           <a:solidFill>
                             <a:srgbClr val="1A1A1A"/>
                           </a:solidFill>
+                          <a:latin typeface="Noto Sans JP Medium" pitchFamily="34" charset="0"/>
+                          <a:ea typeface="Noto Sans JP Medium" pitchFamily="34" charset="-122"/>
+                          <a:cs typeface="Noto Sans JP Medium" pitchFamily="34" charset="-120"/>
                         </a:rPr>
-                        <a:t>秘密情報を守り、改善を1回まわした</a:t>
+                        <a:t>アプリを公開し、BASE・LINEとつながっている</a:t>
                       </a:r>
-                      <a:endParaRPr lang="en-US" sz="1200" dirty="0"/>
+                      <a:endParaRPr lang="en-US" sz="1200" dirty="0">
+                        <a:latin typeface="Noto Sans JP Medium" charset="0"/>
+                        <a:ea typeface="Noto Sans JP Medium" charset="0"/>
+                        <a:cs typeface="Noto Sans JP Medium" charset="0"/>
+                      </a:endParaRPr>
                     </a:p>
                   </a:txBody>
                   <a:tcPr marL="91440" marR="91440" marT="0" marB="0" anchor="ctr">
-                    <a:lnL w="9525" cap="flat" cmpd="sng" algn="ctr">
-                      <a:solidFill>
-                        <a:srgbClr val="BBBBBB"/>
+                    <a:lnL w="12700" cap="flat" cmpd="sng" algn="ctr">
+                      <a:solidFill>
+                        <a:srgbClr val="1A1A1A"/>
                       </a:solidFill>
                       <a:prstDash val="solid"/>
                       <a:round/>
                       <a:headEnd type="none" w="med" len="med"/>
                       <a:tailEnd type="none" w="med" len="med"/>
                     </a:lnL>
-                    <a:lnR w="9525" cap="flat" cmpd="sng" algn="ctr">
-                      <a:solidFill>
-                        <a:srgbClr val="BBBBBB"/>
+                    <a:lnR w="12700" cap="flat" cmpd="sng" algn="ctr">
+                      <a:solidFill>
+                        <a:srgbClr val="1A1A1A"/>
                       </a:solidFill>
                       <a:prstDash val="solid"/>
                       <a:round/>
                       <a:headEnd type="none" w="med" len="med"/>
                       <a:tailEnd type="none" w="med" len="med"/>
                     </a:lnR>
-                    <a:lnT w="9525" cap="flat" cmpd="sng" algn="ctr">
-                      <a:solidFill>
-                        <a:srgbClr val="BBBBBB"/>
+                    <a:lnT w="12700" cap="flat" cmpd="sng" algn="ctr">
+                      <a:solidFill>
+                        <a:srgbClr val="1A1A1A"/>
                       </a:solidFill>
                       <a:prstDash val="solid"/>
                       <a:round/>
                       <a:headEnd type="none" w="med" len="med"/>
                       <a:tailEnd type="none" w="med" len="med"/>
                     </a:lnT>
-                    <a:lnB w="9525" cap="flat" cmpd="sng" algn="ctr">
-                      <a:solidFill>
-                        <a:srgbClr val="BBBBBB"/>
+                    <a:lnB w="12700" cap="flat" cmpd="sng" algn="ctr">
+                      <a:solidFill>
+                        <a:srgbClr val="1A1A1A"/>
                       </a:solidFill>
                       <a:prstDash val="solid"/>
                       <a:round/>
@@ -4979,7 +4896,7 @@
                       <a:tailEnd type="none" w="med" len="med"/>
                     </a:lnB>
                     <a:solidFill>
-                      <a:srgbClr val="F4F4F4"/>
+                      <a:srgbClr val="FFFFFF"/>
                     </a:solidFill>
                   </a:tcPr>
                 </a:tc>
@@ -4996,45 +4913,52 @@
                       <a:r>
                         <a:rPr lang="en-US" sz="1200" b="1" dirty="0">
                           <a:solidFill>
-                            <a:srgbClr val="1A1A1A"/>
+                            <a:srgbClr val="DD6420"/>
                           </a:solidFill>
+                          <a:latin typeface="Noto Sans JP" pitchFamily="34" charset="0"/>
+                          <a:ea typeface="Noto Sans JP" pitchFamily="34" charset="-122"/>
+                          <a:cs typeface="Noto Sans JP" pitchFamily="34" charset="-120"/>
                         </a:rPr>
-                        <a:t>伝える</a:t>
+                        <a:t>守る・育てる</a:t>
                       </a:r>
-                      <a:endParaRPr lang="en-US" sz="1200" dirty="0"/>
+                      <a:endParaRPr lang="en-US" sz="1200" dirty="0">
+                        <a:latin typeface="Noto Sans JP" charset="0"/>
+                        <a:ea typeface="Noto Sans JP" charset="0"/>
+                        <a:cs typeface="Noto Sans JP" charset="0"/>
+                      </a:endParaRPr>
                     </a:p>
                   </a:txBody>
                   <a:tcPr marL="91440" marR="91440" marT="0" marB="0" anchor="ctr">
-                    <a:lnL w="9525" cap="flat" cmpd="sng" algn="ctr">
-                      <a:solidFill>
-                        <a:srgbClr val="BBBBBB"/>
+                    <a:lnL w="12700" cap="flat" cmpd="sng" algn="ctr">
+                      <a:solidFill>
+                        <a:srgbClr val="1A1A1A"/>
                       </a:solidFill>
                       <a:prstDash val="solid"/>
                       <a:round/>
                       <a:headEnd type="none" w="med" len="med"/>
                       <a:tailEnd type="none" w="med" len="med"/>
                     </a:lnL>
-                    <a:lnR w="9525" cap="flat" cmpd="sng" algn="ctr">
-                      <a:solidFill>
-                        <a:srgbClr val="BBBBBB"/>
+                    <a:lnR w="12700" cap="flat" cmpd="sng" algn="ctr">
+                      <a:solidFill>
+                        <a:srgbClr val="1A1A1A"/>
                       </a:solidFill>
                       <a:prstDash val="solid"/>
                       <a:round/>
                       <a:headEnd type="none" w="med" len="med"/>
                       <a:tailEnd type="none" w="med" len="med"/>
                     </a:lnR>
-                    <a:lnT w="9525" cap="flat" cmpd="sng" algn="ctr">
-                      <a:solidFill>
-                        <a:srgbClr val="BBBBBB"/>
+                    <a:lnT w="12700" cap="flat" cmpd="sng" algn="ctr">
+                      <a:solidFill>
+                        <a:srgbClr val="1A1A1A"/>
                       </a:solidFill>
                       <a:prstDash val="solid"/>
                       <a:round/>
                       <a:headEnd type="none" w="med" len="med"/>
                       <a:tailEnd type="none" w="med" len="med"/>
                     </a:lnT>
-                    <a:lnB w="9525" cap="flat" cmpd="sng" algn="ctr">
-                      <a:solidFill>
-                        <a:srgbClr val="BBBBBB"/>
+                    <a:lnB w="12700" cap="flat" cmpd="sng" algn="ctr">
+                      <a:solidFill>
+                        <a:srgbClr val="1A1A1A"/>
                       </a:solidFill>
                       <a:prstDash val="solid"/>
                       <a:round/>
@@ -5055,47 +4979,192 @@
                         <a:buNone/>
                       </a:pPr>
                       <a:r>
-                        <a:rPr lang="en-US" sz="1200" dirty="0">
+                        <a:rPr lang="en-US" sz="1200" b="1" dirty="0">
                           <a:solidFill>
                             <a:srgbClr val="1A1A1A"/>
                           </a:solidFill>
+                          <a:latin typeface="Noto Sans JP Medium" pitchFamily="34" charset="0"/>
+                          <a:ea typeface="Noto Sans JP Medium" pitchFamily="34" charset="-122"/>
+                          <a:cs typeface="Noto Sans JP Medium" pitchFamily="34" charset="-120"/>
+                        </a:rPr>
+                        <a:t>秘密情報を守り、改善を1回まわした</a:t>
+                      </a:r>
+                      <a:endParaRPr lang="en-US" sz="1200" dirty="0">
+                        <a:latin typeface="Noto Sans JP Medium" charset="0"/>
+                        <a:ea typeface="Noto Sans JP Medium" charset="0"/>
+                        <a:cs typeface="Noto Sans JP Medium" charset="0"/>
+                      </a:endParaRPr>
+                    </a:p>
+                  </a:txBody>
+                  <a:tcPr marL="91440" marR="91440" marT="0" marB="0" anchor="ctr">
+                    <a:lnL w="12700" cap="flat" cmpd="sng" algn="ctr">
+                      <a:solidFill>
+                        <a:srgbClr val="1A1A1A"/>
+                      </a:solidFill>
+                      <a:prstDash val="solid"/>
+                      <a:round/>
+                      <a:headEnd type="none" w="med" len="med"/>
+                      <a:tailEnd type="none" w="med" len="med"/>
+                    </a:lnL>
+                    <a:lnR w="12700" cap="flat" cmpd="sng" algn="ctr">
+                      <a:solidFill>
+                        <a:srgbClr val="1A1A1A"/>
+                      </a:solidFill>
+                      <a:prstDash val="solid"/>
+                      <a:round/>
+                      <a:headEnd type="none" w="med" len="med"/>
+                      <a:tailEnd type="none" w="med" len="med"/>
+                    </a:lnR>
+                    <a:lnT w="12700" cap="flat" cmpd="sng" algn="ctr">
+                      <a:solidFill>
+                        <a:srgbClr val="1A1A1A"/>
+                      </a:solidFill>
+                      <a:prstDash val="solid"/>
+                      <a:round/>
+                      <a:headEnd type="none" w="med" len="med"/>
+                      <a:tailEnd type="none" w="med" len="med"/>
+                    </a:lnT>
+                    <a:lnB w="12700" cap="flat" cmpd="sng" algn="ctr">
+                      <a:solidFill>
+                        <a:srgbClr val="1A1A1A"/>
+                      </a:solidFill>
+                      <a:prstDash val="solid"/>
+                      <a:round/>
+                      <a:headEnd type="none" w="med" len="med"/>
+                      <a:tailEnd type="none" w="med" len="med"/>
+                    </a:lnB>
+                    <a:solidFill>
+                      <a:srgbClr val="FFFFFF"/>
+                    </a:solidFill>
+                  </a:tcPr>
+                </a:tc>
+              </a:tr>
+              <a:tr h="365760">
+                <a:tc>
+                  <a:txBody>
+                    <a:bodyPr/>
+                    <a:lstStyle/>
+                    <a:p>
+                      <a:pPr indent="0" marL="0">
+                        <a:buNone/>
+                      </a:pPr>
+                      <a:r>
+                        <a:rPr lang="en-US" sz="1200" b="1" dirty="0">
+                          <a:solidFill>
+                            <a:srgbClr val="DD6420"/>
+                          </a:solidFill>
+                          <a:latin typeface="Noto Sans JP" pitchFamily="34" charset="0"/>
+                          <a:ea typeface="Noto Sans JP" pitchFamily="34" charset="-122"/>
+                          <a:cs typeface="Noto Sans JP" pitchFamily="34" charset="-120"/>
+                        </a:rPr>
+                        <a:t>伝える</a:t>
+                      </a:r>
+                      <a:endParaRPr lang="en-US" sz="1200" dirty="0">
+                        <a:latin typeface="Noto Sans JP" charset="0"/>
+                        <a:ea typeface="Noto Sans JP" charset="0"/>
+                        <a:cs typeface="Noto Sans JP" charset="0"/>
+                      </a:endParaRPr>
+                    </a:p>
+                  </a:txBody>
+                  <a:tcPr marL="91440" marR="91440" marT="0" marB="0" anchor="ctr">
+                    <a:lnL w="12700" cap="flat" cmpd="sng" algn="ctr">
+                      <a:solidFill>
+                        <a:srgbClr val="1A1A1A"/>
+                      </a:solidFill>
+                      <a:prstDash val="solid"/>
+                      <a:round/>
+                      <a:headEnd type="none" w="med" len="med"/>
+                      <a:tailEnd type="none" w="med" len="med"/>
+                    </a:lnL>
+                    <a:lnR w="12700" cap="flat" cmpd="sng" algn="ctr">
+                      <a:solidFill>
+                        <a:srgbClr val="1A1A1A"/>
+                      </a:solidFill>
+                      <a:prstDash val="solid"/>
+                      <a:round/>
+                      <a:headEnd type="none" w="med" len="med"/>
+                      <a:tailEnd type="none" w="med" len="med"/>
+                    </a:lnR>
+                    <a:lnT w="12700" cap="flat" cmpd="sng" algn="ctr">
+                      <a:solidFill>
+                        <a:srgbClr val="1A1A1A"/>
+                      </a:solidFill>
+                      <a:prstDash val="solid"/>
+                      <a:round/>
+                      <a:headEnd type="none" w="med" len="med"/>
+                      <a:tailEnd type="none" w="med" len="med"/>
+                    </a:lnT>
+                    <a:lnB w="12700" cap="flat" cmpd="sng" algn="ctr">
+                      <a:solidFill>
+                        <a:srgbClr val="1A1A1A"/>
+                      </a:solidFill>
+                      <a:prstDash val="solid"/>
+                      <a:round/>
+                      <a:headEnd type="none" w="med" len="med"/>
+                      <a:tailEnd type="none" w="med" len="med"/>
+                    </a:lnB>
+                    <a:solidFill>
+                      <a:srgbClr val="FFFFFF"/>
+                    </a:solidFill>
+                  </a:tcPr>
+                </a:tc>
+                <a:tc>
+                  <a:txBody>
+                    <a:bodyPr/>
+                    <a:lstStyle/>
+                    <a:p>
+                      <a:pPr indent="0" marL="0">
+                        <a:buNone/>
+                      </a:pPr>
+                      <a:r>
+                        <a:rPr lang="en-US" sz="1200" b="1" dirty="0">
+                          <a:solidFill>
+                            <a:srgbClr val="1A1A1A"/>
+                          </a:solidFill>
+                          <a:latin typeface="Noto Sans JP Medium" pitchFamily="34" charset="0"/>
+                          <a:ea typeface="Noto Sans JP Medium" pitchFamily="34" charset="-122"/>
+                          <a:cs typeface="Noto Sans JP Medium" pitchFamily="34" charset="-120"/>
                         </a:rPr>
                         <a:t>社内の人に使い方を説明した</a:t>
                       </a:r>
-                      <a:endParaRPr lang="en-US" sz="1200" dirty="0"/>
+                      <a:endParaRPr lang="en-US" sz="1200" dirty="0">
+                        <a:latin typeface="Noto Sans JP Medium" charset="0"/>
+                        <a:ea typeface="Noto Sans JP Medium" charset="0"/>
+                        <a:cs typeface="Noto Sans JP Medium" charset="0"/>
+                      </a:endParaRPr>
                     </a:p>
                   </a:txBody>
                   <a:tcPr marL="91440" marR="91440" marT="0" marB="0" anchor="ctr">
-                    <a:lnL w="9525" cap="flat" cmpd="sng" algn="ctr">
-                      <a:solidFill>
-                        <a:srgbClr val="BBBBBB"/>
+                    <a:lnL w="12700" cap="flat" cmpd="sng" algn="ctr">
+                      <a:solidFill>
+                        <a:srgbClr val="1A1A1A"/>
                       </a:solidFill>
                       <a:prstDash val="solid"/>
                       <a:round/>
                       <a:headEnd type="none" w="med" len="med"/>
                       <a:tailEnd type="none" w="med" len="med"/>
                     </a:lnL>
-                    <a:lnR w="9525" cap="flat" cmpd="sng" algn="ctr">
-                      <a:solidFill>
-                        <a:srgbClr val="BBBBBB"/>
+                    <a:lnR w="12700" cap="flat" cmpd="sng" algn="ctr">
+                      <a:solidFill>
+                        <a:srgbClr val="1A1A1A"/>
                       </a:solidFill>
                       <a:prstDash val="solid"/>
                       <a:round/>
                       <a:headEnd type="none" w="med" len="med"/>
                       <a:tailEnd type="none" w="med" len="med"/>
                     </a:lnR>
-                    <a:lnT w="9525" cap="flat" cmpd="sng" algn="ctr">
-                      <a:solidFill>
-                        <a:srgbClr val="BBBBBB"/>
+                    <a:lnT w="12700" cap="flat" cmpd="sng" algn="ctr">
+                      <a:solidFill>
+                        <a:srgbClr val="1A1A1A"/>
                       </a:solidFill>
                       <a:prstDash val="solid"/>
                       <a:round/>
                       <a:headEnd type="none" w="med" len="med"/>
                       <a:tailEnd type="none" w="med" len="med"/>
                     </a:lnT>
-                    <a:lnB w="9525" cap="flat" cmpd="sng" algn="ctr">
-                      <a:solidFill>
-                        <a:srgbClr val="BBBBBB"/>
+                    <a:lnB w="12700" cap="flat" cmpd="sng" algn="ctr">
+                      <a:solidFill>
+                        <a:srgbClr val="1A1A1A"/>
                       </a:solidFill>
                       <a:prstDash val="solid"/>
                       <a:round/>
@@ -5114,88 +5183,55 @@
       </p:graphicFrame>
       <p:sp>
         <p:nvSpPr>
-          <p:cNvPr id="7" name="foot-box"/>
-          <p:cNvSpPr/>
-          <p:nvPr/>
-        </p:nvSpPr>
-        <p:spPr>
-          <a:xfrm>
-            <a:off x="548640" y="4114800"/>
-            <a:ext cx="8046720" cy="502920"/>
-          </a:xfrm>
-          <a:prstGeom prst="roundRect">
-            <a:avLst>
-              <a:gd name="adj" fmla="val 18182"/>
-            </a:avLst>
+          <p:cNvPr id="7" name="Text 3"/>
+          <p:cNvSpPr txBox="1"/>
+          <p:nvPr/>
+        </p:nvSpPr>
+        <p:spPr>
+          <a:xfrm rot="-60000">
+            <a:off x="502920" y="4114800"/>
+            <a:ext cx="8138160" cy="502920"/>
+          </a:xfrm>
+          <a:prstGeom prst="rect">
+            <a:avLst/>
           </a:prstGeom>
           <a:solidFill>
-            <a:schemeClr val="bg2"/>
+            <a:srgbClr val="DD6420"/>
           </a:solidFill>
-          <a:ln w="12700">
+          <a:ln w="19050">
             <a:solidFill>
-              <a:schemeClr val="bg2"/>
+              <a:srgbClr val="1A1A1A"/>
             </a:solidFill>
-            <a:prstDash val="solid"/>
           </a:ln>
-        </p:spPr>
-      </p:sp>
-      <p:pic>
-        <p:nvPicPr>
-          <p:cNvPr id="8" name="foot-icon" descr="preencoded.png">    </p:cNvPr>
-          <p:cNvPicPr>
-            <a:picLocks noChangeAspect="1"/>
-          </p:cNvPicPr>
-          <p:nvPr/>
-        </p:nvPicPr>
-        <p:blipFill>
-          <a:blip r:embed="rId1"/>
-          <a:stretch>
-            <a:fillRect/>
-          </a:stretch>
-        </p:blipFill>
-        <p:spPr>
-          <a:xfrm>
-            <a:off x="685800" y="4242816"/>
-            <a:ext cx="246888" cy="246888"/>
-          </a:xfrm>
-          <a:prstGeom prst="rect">
-            <a:avLst/>
-          </a:prstGeom>
-        </p:spPr>
-      </p:pic>
-      <p:sp>
-        <p:nvSpPr>
-          <p:cNvPr id="9" name="foot-text"/>
-          <p:cNvSpPr txBox="1"/>
-          <p:nvPr/>
-        </p:nvSpPr>
-        <p:spPr>
-          <a:xfrm>
-            <a:off x="1051560" y="4114800"/>
-            <a:ext cx="7406640" cy="502920"/>
-          </a:xfrm>
-          <a:prstGeom prst="rect">
-            <a:avLst/>
-          </a:prstGeom>
-          <a:noFill/>
-          <a:ln/>
+          <a:effectLst>
+            <a:outerShdw sx="100000" sy="100000" kx="0" ky="0" algn="bl" rotWithShape="0" blurRad="101600" dist="38100" dir="2700000">
+              <a:srgbClr val="1A1A1A">
+                <a:alpha val="100000"/>
+              </a:srgbClr>
+            </a:outerShdw>
+          </a:effectLst>
         </p:spPr>
         <p:txBody>
-          <a:bodyPr wrap="square" lIns="0" tIns="0" rIns="0" bIns="0" rtlCol="0" anchor="ctr"/>
+          <a:bodyPr wrap="square" lIns="0" tIns="1905" rIns="1905" bIns="0" rtlCol="0" anchor="ctr">
+            <a:normAutofit/>
+          </a:bodyPr>
           <a:lstStyle/>
           <a:p>
-            <a:pPr indent="0" marL="0">
+            <a:pPr algn="ctr" indent="0" marL="0">
               <a:buNone/>
             </a:pPr>
             <a:r>
-              <a:rPr lang="en-US" sz="1150" dirty="0">
+              <a:rPr lang="ja-JP" altLang="en-US" sz="1300" b="1" dirty="0">
                 <a:solidFill>
-                  <a:schemeClr val="tx1"/>
+                  <a:srgbClr val="FFFFFF"/>
                 </a:solidFill>
+                <a:latin typeface="Noto Sans JP" pitchFamily="34" charset="0"/>
+                <a:ea typeface="Noto Sans JP" pitchFamily="34" charset="-122"/>
+                <a:cs typeface="Noto Sans JP" pitchFamily="34" charset="-120"/>
               </a:rPr>
               <a:t>判定：◎ 1人でできた／○ 見ながらできた／△ 助けが必要。修了の目安は全項目△以上かつ◎が4つ以上</a:t>
             </a:r>
-            <a:endParaRPr lang="en-US" sz="1150" dirty="0"/>
+            <a:endParaRPr lang="ja-JP" sz="1300" dirty="0"/>
           </a:p>
         </p:txBody>
       </p:sp>
@@ -5211,8 +5247,8 @@
         </p:nvSpPr>
         <p:spPr>
           <a:xfrm>
-            <a:off x="8229600" y="4773168"/>
-            <a:ext cx="365760" cy="228600"/>
+            <a:off x="8366760" y="4754880"/>
+            <a:ext cx="365760" cy="274320"/>
           </a:xfrm>
           <a:prstGeom prst="rect">
             <a:avLst/>
@@ -5224,20 +5260,23 @@
           </a:extLst>
         </p:spPr>
         <p:txBody>
-          <a:bodyPr/>
+          <a:bodyPr anchor="ctr"/>
           <a:lstStyle>
             <a:lvl1pPr>
-              <a:defRPr sz="900">
+              <a:defRPr sz="850">
                 <a:solidFill>
-                  <a:srgbClr val="5A6872"/>
+                  <a:srgbClr val="FFFFFF"/>
                 </a:solidFill>
+                <a:latin typeface="Noto Sans JP"/>
+                <a:ea typeface="Noto Sans JP"/>
+                <a:cs typeface="Noto Sans JP"/>
               </a:defRPr>
             </a:lvl1pPr>
           </a:lstStyle>
           <a:p>
             <a:pPr algn="r"/>
             <a:fld id="{F7021451-1387-4CA6-816F-3879F97B5CBC}" type="slidenum">
-              <a:rPr b="0" lang="en-US"/>
+              <a:rPr b="1" lang="en-US"/>
               <a:t>4</a:t>
             </a:fld>
             <a:endParaRPr lang="en-US"/>
@@ -5272,103 +5311,120 @@
       <p:sp>
         <p:nvSpPr>
           <p:cNvPr id="2" name="Text 0"/>
-          <p:cNvSpPr/>
-          <p:nvPr>
-            <p:ph idx="100" type="title" hasCustomPrompt="1"/>
-          </p:nvPr>
-        </p:nvSpPr>
-        <p:spPr>
-          <a:xfrm>
-            <a:off x="548640" y="658368"/>
-            <a:ext cx="8046720" cy="566928"/>
-          </a:xfrm>
-          <a:prstGeom prst="rect">
-            <a:avLst/>
-          </a:prstGeom>
-          <a:noFill/>
-          <a:ln/>
+          <p:cNvSpPr txBox="1"/>
+          <p:nvPr/>
+        </p:nvSpPr>
+        <p:spPr>
+          <a:xfrm rot="-180000">
+            <a:off x="411480" y="201168"/>
+            <a:ext cx="1623974" cy="352044"/>
+          </a:xfrm>
+          <a:prstGeom prst="rect">
+            <a:avLst/>
+          </a:prstGeom>
+          <a:solidFill>
+            <a:srgbClr val="1A1A1A"/>
+          </a:solidFill>
+          <a:ln>
+            <a:solidFill>
+              <a:srgbClr val="1A1A1A"/>
+            </a:solidFill>
+          </a:ln>
         </p:spPr>
         <p:txBody>
           <a:bodyPr wrap="square" lIns="0" tIns="0" rIns="0" bIns="0" rtlCol="0" anchor="ctr"/>
           <a:lstStyle/>
           <a:p>
-            <a:pPr algn="l" indent="0" marL="0">
+            <a:pPr algn="ctr" indent="0" marL="0">
               <a:buNone/>
             </a:pPr>
             <a:r>
-              <a:rPr lang="en-US" sz="2400" b="1" dirty="0">
+              <a:rPr lang="ja-JP" altLang="en-US" sz="1100" dirty="0">
                 <a:solidFill>
-                  <a:schemeClr val="tx1"/>
+                  <a:srgbClr val="FFFFFF"/>
                 </a:solidFill>
+                <a:latin typeface="Dela Gothic One" pitchFamily="34" charset="0"/>
+                <a:ea typeface="けいふぉんと" pitchFamily="34" charset="-122"/>
+                <a:cs typeface="Dela Gothic One" pitchFamily="34" charset="-120"/>
+              </a:rPr>
+              <a:t>改善計画 15分</a:t>
+            </a:r>
+            <a:endParaRPr lang="ja-JP" sz="1100" dirty="0"/>
+          </a:p>
+        </p:txBody>
+      </p:sp>
+      <p:sp>
+        <p:nvSpPr>
+          <p:cNvPr id="3" name="Text 1"/>
+          <p:cNvSpPr txBox="1"/>
+          <p:nvPr/>
+        </p:nvSpPr>
+        <p:spPr>
+          <a:xfrm>
+            <a:off x="411480" y="502920"/>
+            <a:ext cx="8321040" cy="685800"/>
+          </a:xfrm>
+          <a:prstGeom prst="rect">
+            <a:avLst/>
+          </a:prstGeom>
+          <a:noFill/>
+          <a:ln/>
+        </p:spPr>
+        <p:txBody>
+          <a:bodyPr wrap="square" lIns="0" tIns="0" rIns="0" bIns="0" rtlCol="0" anchor="ctr">
+            <a:normAutofit/>
+          </a:bodyPr>
+          <a:lstStyle/>
+          <a:p>
+            <a:pPr indent="0" marL="0">
+              <a:buNone/>
+            </a:pPr>
+            <a:r>
+              <a:rPr lang="ja-JP" altLang="en-US" sz="2600" dirty="0">
+                <a:solidFill>
+                  <a:srgbClr val="1A1A1A"/>
+                </a:solidFill>
+                <a:latin typeface="Dela Gothic One" pitchFamily="34" charset="0"/>
+                <a:ea typeface="けいふぉんと" pitchFamily="34" charset="-122"/>
+                <a:cs typeface="Dela Gothic One" pitchFamily="34" charset="-120"/>
               </a:rPr>
               <a:t>これから6ヶ月の改善計画</a:t>
             </a:r>
-            <a:endParaRPr lang="en-US" sz="2400" dirty="0"/>
+            <a:endParaRPr lang="ja-JP" sz="2600" dirty="0"/>
           </a:p>
         </p:txBody>
       </p:sp>
       <p:sp>
         <p:nvSpPr>
-          <p:cNvPr id="3" name="chip"/>
+          <p:cNvPr id="4" name="Shape 2"/>
           <p:cNvSpPr/>
           <p:nvPr/>
         </p:nvSpPr>
         <p:spPr>
           <a:xfrm>
-            <a:off x="548640" y="292608"/>
-            <a:ext cx="1481328" cy="292608"/>
-          </a:xfrm>
-          <a:prstGeom prst="roundRect">
-            <a:avLst>
-              <a:gd name="adj" fmla="val 50000"/>
-            </a:avLst>
+            <a:off x="502920" y="1417320"/>
+            <a:ext cx="8138160" cy="2194560"/>
+          </a:xfrm>
+          <a:prstGeom prst="rect">
+            <a:avLst/>
           </a:prstGeom>
           <a:solidFill>
-            <a:schemeClr val="tx1"/>
+            <a:srgbClr val="FFFFFF"/>
           </a:solidFill>
-          <a:ln w="12700">
+          <a:ln w="25400">
             <a:solidFill>
-              <a:schemeClr val="tx1"/>
+              <a:srgbClr val="1A1A1A"/>
             </a:solidFill>
             <a:prstDash val="solid"/>
           </a:ln>
-        </p:spPr>
-      </p:sp>
-      <p:sp>
-        <p:nvSpPr>
-          <p:cNvPr id="4" name="chip-text"/>
-          <p:cNvSpPr txBox="1"/>
-          <p:nvPr/>
-        </p:nvSpPr>
-        <p:spPr>
-          <a:xfrm>
-            <a:off x="548640" y="292608"/>
-            <a:ext cx="1481328" cy="292608"/>
-          </a:xfrm>
-          <a:prstGeom prst="rect">
-            <a:avLst/>
-          </a:prstGeom>
-          <a:noFill/>
-          <a:ln/>
-        </p:spPr>
-        <p:txBody>
-          <a:bodyPr wrap="square" lIns="0" tIns="0" rIns="0" bIns="0" rtlCol="0" anchor="ctr"/>
-          <a:lstStyle/>
-          <a:p>
-            <a:pPr algn="ctr" indent="0" marL="0">
-              <a:buNone/>
-            </a:pPr>
-            <a:r>
-              <a:rPr lang="en-US" sz="1100" b="1" dirty="0">
-                <a:solidFill>
-                  <a:schemeClr val="accent1"/>
-                </a:solidFill>
-              </a:rPr>
-              <a:t>改善計画 15分</a:t>
-            </a:r>
-            <a:endParaRPr lang="en-US" sz="1100" dirty="0"/>
-          </a:p>
-        </p:txBody>
+          <a:effectLst>
+            <a:outerShdw sx="100000" sy="100000" kx="0" ky="0" algn="bl" rotWithShape="0" blurRad="101600" dist="50800" dir="2700000">
+              <a:srgbClr val="1A1A1A">
+                <a:alpha val="100000"/>
+              </a:srgbClr>
+            </a:outerShdw>
+          </a:effectLst>
+        </p:spPr>
       </p:sp>
       <p:graphicFrame>
         <p:nvGraphicFramePr>
@@ -5385,18 +5441,18 @@
           </p:nvPr>
         </p:nvGraphicFramePr>
         <p:xfrm>
-          <a:off x="548640" y="1463040"/>
-          <a:ext cx="8046720" cy="914400"/>
+          <a:off x="502920" y="1417320"/>
+          <a:ext cx="8138160" cy="914400"/>
         </p:xfrm>
         <a:graphic>
           <a:graphicData uri="http://schemas.openxmlformats.org/drawingml/2006/table">
             <a:tbl>
               <a:tblPr/>
               <a:tblGrid>
-                <a:gridCol w="1251712"/>
-                <a:gridCol w="2861056"/>
-                <a:gridCol w="1966976"/>
-                <a:gridCol w="1966976"/>
+                <a:gridCol w="1265936"/>
+                <a:gridCol w="2893568"/>
+                <a:gridCol w="1989328"/>
+                <a:gridCol w="1989328"/>
               </a:tblGrid>
               <a:tr h="438912">
                 <a:tc>
@@ -5408,47 +5464,54 @@
                         <a:buNone/>
                       </a:pPr>
                       <a:r>
-                        <a:rPr lang="en-US" sz="1200" b="1" dirty="0">
+                        <a:rPr lang="en-US" sz="1250" b="1" dirty="0">
                           <a:solidFill>
-                            <a:srgbClr val="FFD600"/>
+                            <a:srgbClr val="FFFFFF"/>
                           </a:solidFill>
+                          <a:latin typeface="Noto Sans JP" pitchFamily="34" charset="0"/>
+                          <a:ea typeface="Noto Sans JP" pitchFamily="34" charset="-122"/>
+                          <a:cs typeface="Noto Sans JP" pitchFamily="34" charset="-120"/>
                         </a:rPr>
                         <a:t>月</a:t>
                       </a:r>
-                      <a:endParaRPr lang="en-US" sz="1200" dirty="0"/>
+                      <a:endParaRPr lang="en-US" sz="1250" dirty="0">
+                        <a:latin typeface="Noto Sans JP" charset="0"/>
+                        <a:ea typeface="Noto Sans JP" charset="0"/>
+                        <a:cs typeface="Noto Sans JP" charset="0"/>
+                      </a:endParaRPr>
                     </a:p>
                   </a:txBody>
                   <a:tcPr marL="91440" marR="91440" marT="0" marB="0" anchor="ctr">
-                    <a:lnL w="9525" cap="flat" cmpd="sng" algn="ctr">
-                      <a:solidFill>
-                        <a:srgbClr val="BBBBBB"/>
+                    <a:lnL w="12700" cap="flat" cmpd="sng" algn="ctr">
+                      <a:solidFill>
+                        <a:srgbClr val="1A1A1A"/>
                       </a:solidFill>
                       <a:prstDash val="solid"/>
                       <a:round/>
                       <a:headEnd type="none" w="med" len="med"/>
                       <a:tailEnd type="none" w="med" len="med"/>
                     </a:lnL>
-                    <a:lnR w="9525" cap="flat" cmpd="sng" algn="ctr">
-                      <a:solidFill>
-                        <a:srgbClr val="BBBBBB"/>
+                    <a:lnR w="12700" cap="flat" cmpd="sng" algn="ctr">
+                      <a:solidFill>
+                        <a:srgbClr val="1A1A1A"/>
                       </a:solidFill>
                       <a:prstDash val="solid"/>
                       <a:round/>
                       <a:headEnd type="none" w="med" len="med"/>
                       <a:tailEnd type="none" w="med" len="med"/>
                     </a:lnR>
-                    <a:lnT w="9525" cap="flat" cmpd="sng" algn="ctr">
-                      <a:solidFill>
-                        <a:srgbClr val="BBBBBB"/>
+                    <a:lnT w="12700" cap="flat" cmpd="sng" algn="ctr">
+                      <a:solidFill>
+                        <a:srgbClr val="1A1A1A"/>
                       </a:solidFill>
                       <a:prstDash val="solid"/>
                       <a:round/>
                       <a:headEnd type="none" w="med" len="med"/>
                       <a:tailEnd type="none" w="med" len="med"/>
                     </a:lnT>
-                    <a:lnB w="9525" cap="flat" cmpd="sng" algn="ctr">
-                      <a:solidFill>
-                        <a:srgbClr val="BBBBBB"/>
+                    <a:lnB w="12700" cap="flat" cmpd="sng" algn="ctr">
+                      <a:solidFill>
+                        <a:srgbClr val="1A1A1A"/>
                       </a:solidFill>
                       <a:prstDash val="solid"/>
                       <a:round/>
@@ -5469,47 +5532,54 @@
                         <a:buNone/>
                       </a:pPr>
                       <a:r>
-                        <a:rPr lang="en-US" sz="1200" b="1" dirty="0">
+                        <a:rPr lang="en-US" sz="1250" b="1" dirty="0">
                           <a:solidFill>
-                            <a:srgbClr val="FFD600"/>
+                            <a:srgbClr val="FFFFFF"/>
                           </a:solidFill>
+                          <a:latin typeface="Noto Sans JP" pitchFamily="34" charset="0"/>
+                          <a:ea typeface="Noto Sans JP" pitchFamily="34" charset="-122"/>
+                          <a:cs typeface="Noto Sans JP" pitchFamily="34" charset="-120"/>
                         </a:rPr>
                         <a:t>やること</a:t>
                       </a:r>
-                      <a:endParaRPr lang="en-US" sz="1200" dirty="0"/>
+                      <a:endParaRPr lang="en-US" sz="1250" dirty="0">
+                        <a:latin typeface="Noto Sans JP" charset="0"/>
+                        <a:ea typeface="Noto Sans JP" charset="0"/>
+                        <a:cs typeface="Noto Sans JP" charset="0"/>
+                      </a:endParaRPr>
                     </a:p>
                   </a:txBody>
                   <a:tcPr marL="91440" marR="91440" marT="0" marB="0" anchor="ctr">
-                    <a:lnL w="9525" cap="flat" cmpd="sng" algn="ctr">
-                      <a:solidFill>
-                        <a:srgbClr val="BBBBBB"/>
+                    <a:lnL w="12700" cap="flat" cmpd="sng" algn="ctr">
+                      <a:solidFill>
+                        <a:srgbClr val="1A1A1A"/>
                       </a:solidFill>
                       <a:prstDash val="solid"/>
                       <a:round/>
                       <a:headEnd type="none" w="med" len="med"/>
                       <a:tailEnd type="none" w="med" len="med"/>
                     </a:lnL>
-                    <a:lnR w="9525" cap="flat" cmpd="sng" algn="ctr">
-                      <a:solidFill>
-                        <a:srgbClr val="BBBBBB"/>
+                    <a:lnR w="12700" cap="flat" cmpd="sng" algn="ctr">
+                      <a:solidFill>
+                        <a:srgbClr val="1A1A1A"/>
                       </a:solidFill>
                       <a:prstDash val="solid"/>
                       <a:round/>
                       <a:headEnd type="none" w="med" len="med"/>
                       <a:tailEnd type="none" w="med" len="med"/>
                     </a:lnR>
-                    <a:lnT w="9525" cap="flat" cmpd="sng" algn="ctr">
-                      <a:solidFill>
-                        <a:srgbClr val="BBBBBB"/>
+                    <a:lnT w="12700" cap="flat" cmpd="sng" algn="ctr">
+                      <a:solidFill>
+                        <a:srgbClr val="1A1A1A"/>
                       </a:solidFill>
                       <a:prstDash val="solid"/>
                       <a:round/>
                       <a:headEnd type="none" w="med" len="med"/>
                       <a:tailEnd type="none" w="med" len="med"/>
                     </a:lnT>
-                    <a:lnB w="9525" cap="flat" cmpd="sng" algn="ctr">
-                      <a:solidFill>
-                        <a:srgbClr val="BBBBBB"/>
+                    <a:lnB w="12700" cap="flat" cmpd="sng" algn="ctr">
+                      <a:solidFill>
+                        <a:srgbClr val="1A1A1A"/>
                       </a:solidFill>
                       <a:prstDash val="solid"/>
                       <a:round/>
@@ -5530,47 +5600,54 @@
                         <a:buNone/>
                       </a:pPr>
                       <a:r>
-                        <a:rPr lang="en-US" sz="1200" b="1" dirty="0">
+                        <a:rPr lang="en-US" sz="1250" b="1" dirty="0">
                           <a:solidFill>
-                            <a:srgbClr val="FFD600"/>
+                            <a:srgbClr val="FFFFFF"/>
                           </a:solidFill>
+                          <a:latin typeface="Noto Sans JP" pitchFamily="34" charset="0"/>
+                          <a:ea typeface="Noto Sans JP" pitchFamily="34" charset="-122"/>
+                          <a:cs typeface="Noto Sans JP" pitchFamily="34" charset="-120"/>
                         </a:rPr>
                         <a:t>使う道具</a:t>
                       </a:r>
-                      <a:endParaRPr lang="en-US" sz="1200" dirty="0"/>
+                      <a:endParaRPr lang="en-US" sz="1250" dirty="0">
+                        <a:latin typeface="Noto Sans JP" charset="0"/>
+                        <a:ea typeface="Noto Sans JP" charset="0"/>
+                        <a:cs typeface="Noto Sans JP" charset="0"/>
+                      </a:endParaRPr>
                     </a:p>
                   </a:txBody>
                   <a:tcPr marL="91440" marR="91440" marT="0" marB="0" anchor="ctr">
-                    <a:lnL w="9525" cap="flat" cmpd="sng" algn="ctr">
-                      <a:solidFill>
-                        <a:srgbClr val="BBBBBB"/>
+                    <a:lnL w="12700" cap="flat" cmpd="sng" algn="ctr">
+                      <a:solidFill>
+                        <a:srgbClr val="1A1A1A"/>
                       </a:solidFill>
                       <a:prstDash val="solid"/>
                       <a:round/>
                       <a:headEnd type="none" w="med" len="med"/>
                       <a:tailEnd type="none" w="med" len="med"/>
                     </a:lnL>
-                    <a:lnR w="9525" cap="flat" cmpd="sng" algn="ctr">
-                      <a:solidFill>
-                        <a:srgbClr val="BBBBBB"/>
+                    <a:lnR w="12700" cap="flat" cmpd="sng" algn="ctr">
+                      <a:solidFill>
+                        <a:srgbClr val="1A1A1A"/>
                       </a:solidFill>
                       <a:prstDash val="solid"/>
                       <a:round/>
                       <a:headEnd type="none" w="med" len="med"/>
                       <a:tailEnd type="none" w="med" len="med"/>
                     </a:lnR>
-                    <a:lnT w="9525" cap="flat" cmpd="sng" algn="ctr">
-                      <a:solidFill>
-                        <a:srgbClr val="BBBBBB"/>
+                    <a:lnT w="12700" cap="flat" cmpd="sng" algn="ctr">
+                      <a:solidFill>
+                        <a:srgbClr val="1A1A1A"/>
                       </a:solidFill>
                       <a:prstDash val="solid"/>
                       <a:round/>
                       <a:headEnd type="none" w="med" len="med"/>
                       <a:tailEnd type="none" w="med" len="med"/>
                     </a:lnT>
-                    <a:lnB w="9525" cap="flat" cmpd="sng" algn="ctr">
-                      <a:solidFill>
-                        <a:srgbClr val="BBBBBB"/>
+                    <a:lnB w="12700" cap="flat" cmpd="sng" algn="ctr">
+                      <a:solidFill>
+                        <a:srgbClr val="1A1A1A"/>
                       </a:solidFill>
                       <a:prstDash val="solid"/>
                       <a:round/>
@@ -5591,47 +5668,54 @@
                         <a:buNone/>
                       </a:pPr>
                       <a:r>
-                        <a:rPr lang="en-US" sz="1200" b="1" dirty="0">
+                        <a:rPr lang="en-US" sz="1250" b="1" dirty="0">
                           <a:solidFill>
-                            <a:srgbClr val="FFD600"/>
+                            <a:srgbClr val="FFFFFF"/>
                           </a:solidFill>
+                          <a:latin typeface="Noto Sans JP" pitchFamily="34" charset="0"/>
+                          <a:ea typeface="Noto Sans JP" pitchFamily="34" charset="-122"/>
+                          <a:cs typeface="Noto Sans JP" pitchFamily="34" charset="-120"/>
                         </a:rPr>
                         <a:t>完了の目安</a:t>
                       </a:r>
-                      <a:endParaRPr lang="en-US" sz="1200" dirty="0"/>
+                      <a:endParaRPr lang="en-US" sz="1250" dirty="0">
+                        <a:latin typeface="Noto Sans JP" charset="0"/>
+                        <a:ea typeface="Noto Sans JP" charset="0"/>
+                        <a:cs typeface="Noto Sans JP" charset="0"/>
+                      </a:endParaRPr>
                     </a:p>
                   </a:txBody>
                   <a:tcPr marL="91440" marR="91440" marT="0" marB="0" anchor="ctr">
-                    <a:lnL w="9525" cap="flat" cmpd="sng" algn="ctr">
-                      <a:solidFill>
-                        <a:srgbClr val="BBBBBB"/>
+                    <a:lnL w="12700" cap="flat" cmpd="sng" algn="ctr">
+                      <a:solidFill>
+                        <a:srgbClr val="1A1A1A"/>
                       </a:solidFill>
                       <a:prstDash val="solid"/>
                       <a:round/>
                       <a:headEnd type="none" w="med" len="med"/>
                       <a:tailEnd type="none" w="med" len="med"/>
                     </a:lnL>
-                    <a:lnR w="9525" cap="flat" cmpd="sng" algn="ctr">
-                      <a:solidFill>
-                        <a:srgbClr val="BBBBBB"/>
+                    <a:lnR w="12700" cap="flat" cmpd="sng" algn="ctr">
+                      <a:solidFill>
+                        <a:srgbClr val="1A1A1A"/>
                       </a:solidFill>
                       <a:prstDash val="solid"/>
                       <a:round/>
                       <a:headEnd type="none" w="med" len="med"/>
                       <a:tailEnd type="none" w="med" len="med"/>
                     </a:lnR>
-                    <a:lnT w="9525" cap="flat" cmpd="sng" algn="ctr">
-                      <a:solidFill>
-                        <a:srgbClr val="BBBBBB"/>
+                    <a:lnT w="12700" cap="flat" cmpd="sng" algn="ctr">
+                      <a:solidFill>
+                        <a:srgbClr val="1A1A1A"/>
                       </a:solidFill>
                       <a:prstDash val="solid"/>
                       <a:round/>
                       <a:headEnd type="none" w="med" len="med"/>
                       <a:tailEnd type="none" w="med" len="med"/>
                     </a:lnT>
-                    <a:lnB w="9525" cap="flat" cmpd="sng" algn="ctr">
-                      <a:solidFill>
-                        <a:srgbClr val="BBBBBB"/>
+                    <a:lnB w="12700" cap="flat" cmpd="sng" algn="ctr">
+                      <a:solidFill>
+                        <a:srgbClr val="1A1A1A"/>
                       </a:solidFill>
                       <a:prstDash val="solid"/>
                       <a:round/>
@@ -5656,45 +5740,52 @@
                       <a:r>
                         <a:rPr lang="en-US" sz="1200" b="1" dirty="0">
                           <a:solidFill>
-                            <a:srgbClr val="1A1A1A"/>
+                            <a:srgbClr val="DD6420"/>
                           </a:solidFill>
+                          <a:latin typeface="Noto Sans JP" pitchFamily="34" charset="0"/>
+                          <a:ea typeface="Noto Sans JP" pitchFamily="34" charset="-122"/>
+                          <a:cs typeface="Noto Sans JP" pitchFamily="34" charset="-120"/>
                         </a:rPr>
                         <a:t>1</a:t>
                       </a:r>
-                      <a:endParaRPr lang="en-US" sz="1200" dirty="0"/>
+                      <a:endParaRPr lang="en-US" sz="1200" dirty="0">
+                        <a:latin typeface="Noto Sans JP" charset="0"/>
+                        <a:ea typeface="Noto Sans JP" charset="0"/>
+                        <a:cs typeface="Noto Sans JP" charset="0"/>
+                      </a:endParaRPr>
                     </a:p>
                   </a:txBody>
                   <a:tcPr marL="91440" marR="91440" marT="0" marB="0" anchor="ctr">
-                    <a:lnL w="9525" cap="flat" cmpd="sng" algn="ctr">
-                      <a:solidFill>
-                        <a:srgbClr val="BBBBBB"/>
+                    <a:lnL w="12700" cap="flat" cmpd="sng" algn="ctr">
+                      <a:solidFill>
+                        <a:srgbClr val="1A1A1A"/>
                       </a:solidFill>
                       <a:prstDash val="solid"/>
                       <a:round/>
                       <a:headEnd type="none" w="med" len="med"/>
                       <a:tailEnd type="none" w="med" len="med"/>
                     </a:lnL>
-                    <a:lnR w="9525" cap="flat" cmpd="sng" algn="ctr">
-                      <a:solidFill>
-                        <a:srgbClr val="BBBBBB"/>
+                    <a:lnR w="12700" cap="flat" cmpd="sng" algn="ctr">
+                      <a:solidFill>
+                        <a:srgbClr val="1A1A1A"/>
                       </a:solidFill>
                       <a:prstDash val="solid"/>
                       <a:round/>
                       <a:headEnd type="none" w="med" len="med"/>
                       <a:tailEnd type="none" w="med" len="med"/>
                     </a:lnR>
-                    <a:lnT w="9525" cap="flat" cmpd="sng" algn="ctr">
-                      <a:solidFill>
-                        <a:srgbClr val="BBBBBB"/>
+                    <a:lnT w="12700" cap="flat" cmpd="sng" algn="ctr">
+                      <a:solidFill>
+                        <a:srgbClr val="1A1A1A"/>
                       </a:solidFill>
                       <a:prstDash val="solid"/>
                       <a:round/>
                       <a:headEnd type="none" w="med" len="med"/>
                       <a:tailEnd type="none" w="med" len="med"/>
                     </a:lnT>
-                    <a:lnB w="9525" cap="flat" cmpd="sng" algn="ctr">
-                      <a:solidFill>
-                        <a:srgbClr val="BBBBBB"/>
+                    <a:lnB w="12700" cap="flat" cmpd="sng" algn="ctr">
+                      <a:solidFill>
+                        <a:srgbClr val="1A1A1A"/>
                       </a:solidFill>
                       <a:prstDash val="solid"/>
                       <a:round/>
@@ -5714,40 +5805,44 @@
                       <a:pPr indent="0" marL="0">
                         <a:buNone/>
                       </a:pPr>
-                      <a:endParaRPr lang="en-US" sz="1200" dirty="0"/>
+                      <a:endParaRPr lang="en-US" sz="1200" dirty="0">
+                        <a:latin typeface="Noto Sans JP Medium" charset="0"/>
+                        <a:ea typeface="Noto Sans JP Medium" charset="0"/>
+                        <a:cs typeface="Noto Sans JP Medium" charset="0"/>
+                      </a:endParaRPr>
                     </a:p>
                   </a:txBody>
                   <a:tcPr marL="91440" marR="91440" marT="0" marB="0" anchor="ctr">
-                    <a:lnL w="9525" cap="flat" cmpd="sng" algn="ctr">
-                      <a:solidFill>
-                        <a:srgbClr val="BBBBBB"/>
+                    <a:lnL w="12700" cap="flat" cmpd="sng" algn="ctr">
+                      <a:solidFill>
+                        <a:srgbClr val="1A1A1A"/>
                       </a:solidFill>
                       <a:prstDash val="solid"/>
                       <a:round/>
                       <a:headEnd type="none" w="med" len="med"/>
                       <a:tailEnd type="none" w="med" len="med"/>
                     </a:lnL>
-                    <a:lnR w="9525" cap="flat" cmpd="sng" algn="ctr">
-                      <a:solidFill>
-                        <a:srgbClr val="BBBBBB"/>
+                    <a:lnR w="12700" cap="flat" cmpd="sng" algn="ctr">
+                      <a:solidFill>
+                        <a:srgbClr val="1A1A1A"/>
                       </a:solidFill>
                       <a:prstDash val="solid"/>
                       <a:round/>
                       <a:headEnd type="none" w="med" len="med"/>
                       <a:tailEnd type="none" w="med" len="med"/>
                     </a:lnR>
-                    <a:lnT w="9525" cap="flat" cmpd="sng" algn="ctr">
-                      <a:solidFill>
-                        <a:srgbClr val="BBBBBB"/>
+                    <a:lnT w="12700" cap="flat" cmpd="sng" algn="ctr">
+                      <a:solidFill>
+                        <a:srgbClr val="1A1A1A"/>
                       </a:solidFill>
                       <a:prstDash val="solid"/>
                       <a:round/>
                       <a:headEnd type="none" w="med" len="med"/>
                       <a:tailEnd type="none" w="med" len="med"/>
                     </a:lnT>
-                    <a:lnB w="9525" cap="flat" cmpd="sng" algn="ctr">
-                      <a:solidFill>
-                        <a:srgbClr val="BBBBBB"/>
+                    <a:lnB w="12700" cap="flat" cmpd="sng" algn="ctr">
+                      <a:solidFill>
+                        <a:srgbClr val="1A1A1A"/>
                       </a:solidFill>
                       <a:prstDash val="solid"/>
                       <a:round/>
@@ -5767,40 +5862,44 @@
                       <a:pPr indent="0" marL="0">
                         <a:buNone/>
                       </a:pPr>
-                      <a:endParaRPr lang="en-US" sz="1200" dirty="0"/>
+                      <a:endParaRPr lang="en-US" sz="1200" dirty="0">
+                        <a:latin typeface="Noto Sans JP Medium" charset="0"/>
+                        <a:ea typeface="Noto Sans JP Medium" charset="0"/>
+                        <a:cs typeface="Noto Sans JP Medium" charset="0"/>
+                      </a:endParaRPr>
                     </a:p>
                   </a:txBody>
                   <a:tcPr marL="91440" marR="91440" marT="0" marB="0" anchor="ctr">
-                    <a:lnL w="9525" cap="flat" cmpd="sng" algn="ctr">
-                      <a:solidFill>
-                        <a:srgbClr val="BBBBBB"/>
+                    <a:lnL w="12700" cap="flat" cmpd="sng" algn="ctr">
+                      <a:solidFill>
+                        <a:srgbClr val="1A1A1A"/>
                       </a:solidFill>
                       <a:prstDash val="solid"/>
                       <a:round/>
                       <a:headEnd type="none" w="med" len="med"/>
                       <a:tailEnd type="none" w="med" len="med"/>
                     </a:lnL>
-                    <a:lnR w="9525" cap="flat" cmpd="sng" algn="ctr">
-                      <a:solidFill>
-                        <a:srgbClr val="BBBBBB"/>
+                    <a:lnR w="12700" cap="flat" cmpd="sng" algn="ctr">
+                      <a:solidFill>
+                        <a:srgbClr val="1A1A1A"/>
                       </a:solidFill>
                       <a:prstDash val="solid"/>
                       <a:round/>
                       <a:headEnd type="none" w="med" len="med"/>
                       <a:tailEnd type="none" w="med" len="med"/>
                     </a:lnR>
-                    <a:lnT w="9525" cap="flat" cmpd="sng" algn="ctr">
-                      <a:solidFill>
-                        <a:srgbClr val="BBBBBB"/>
+                    <a:lnT w="12700" cap="flat" cmpd="sng" algn="ctr">
+                      <a:solidFill>
+                        <a:srgbClr val="1A1A1A"/>
                       </a:solidFill>
                       <a:prstDash val="solid"/>
                       <a:round/>
                       <a:headEnd type="none" w="med" len="med"/>
                       <a:tailEnd type="none" w="med" len="med"/>
                     </a:lnT>
-                    <a:lnB w="9525" cap="flat" cmpd="sng" algn="ctr">
-                      <a:solidFill>
-                        <a:srgbClr val="BBBBBB"/>
+                    <a:lnB w="12700" cap="flat" cmpd="sng" algn="ctr">
+                      <a:solidFill>
+                        <a:srgbClr val="1A1A1A"/>
                       </a:solidFill>
                       <a:prstDash val="solid"/>
                       <a:round/>
@@ -5820,40 +5919,44 @@
                       <a:pPr indent="0" marL="0">
                         <a:buNone/>
                       </a:pPr>
-                      <a:endParaRPr lang="en-US" sz="1200" dirty="0"/>
+                      <a:endParaRPr lang="en-US" sz="1200" dirty="0">
+                        <a:latin typeface="Noto Sans JP Medium" charset="0"/>
+                        <a:ea typeface="Noto Sans JP Medium" charset="0"/>
+                        <a:cs typeface="Noto Sans JP Medium" charset="0"/>
+                      </a:endParaRPr>
                     </a:p>
                   </a:txBody>
                   <a:tcPr marL="91440" marR="91440" marT="0" marB="0" anchor="ctr">
-                    <a:lnL w="9525" cap="flat" cmpd="sng" algn="ctr">
-                      <a:solidFill>
-                        <a:srgbClr val="BBBBBB"/>
+                    <a:lnL w="12700" cap="flat" cmpd="sng" algn="ctr">
+                      <a:solidFill>
+                        <a:srgbClr val="1A1A1A"/>
                       </a:solidFill>
                       <a:prstDash val="solid"/>
                       <a:round/>
                       <a:headEnd type="none" w="med" len="med"/>
                       <a:tailEnd type="none" w="med" len="med"/>
                     </a:lnL>
-                    <a:lnR w="9525" cap="flat" cmpd="sng" algn="ctr">
-                      <a:solidFill>
-                        <a:srgbClr val="BBBBBB"/>
+                    <a:lnR w="12700" cap="flat" cmpd="sng" algn="ctr">
+                      <a:solidFill>
+                        <a:srgbClr val="1A1A1A"/>
                       </a:solidFill>
                       <a:prstDash val="solid"/>
                       <a:round/>
                       <a:headEnd type="none" w="med" len="med"/>
                       <a:tailEnd type="none" w="med" len="med"/>
                     </a:lnR>
-                    <a:lnT w="9525" cap="flat" cmpd="sng" algn="ctr">
-                      <a:solidFill>
-                        <a:srgbClr val="BBBBBB"/>
+                    <a:lnT w="12700" cap="flat" cmpd="sng" algn="ctr">
+                      <a:solidFill>
+                        <a:srgbClr val="1A1A1A"/>
                       </a:solidFill>
                       <a:prstDash val="solid"/>
                       <a:round/>
                       <a:headEnd type="none" w="med" len="med"/>
                       <a:tailEnd type="none" w="med" len="med"/>
                     </a:lnT>
-                    <a:lnB w="9525" cap="flat" cmpd="sng" algn="ctr">
-                      <a:solidFill>
-                        <a:srgbClr val="BBBBBB"/>
+                    <a:lnB w="12700" cap="flat" cmpd="sng" algn="ctr">
+                      <a:solidFill>
+                        <a:srgbClr val="1A1A1A"/>
                       </a:solidFill>
                       <a:prstDash val="solid"/>
                       <a:round/>
@@ -5878,267 +5981,52 @@
                       <a:r>
                         <a:rPr lang="en-US" sz="1200" b="1" dirty="0">
                           <a:solidFill>
-                            <a:srgbClr val="1A1A1A"/>
+                            <a:srgbClr val="DD6420"/>
                           </a:solidFill>
+                          <a:latin typeface="Noto Sans JP" pitchFamily="34" charset="0"/>
+                          <a:ea typeface="Noto Sans JP" pitchFamily="34" charset="-122"/>
+                          <a:cs typeface="Noto Sans JP" pitchFamily="34" charset="-120"/>
                         </a:rPr>
                         <a:t>2</a:t>
                       </a:r>
-                      <a:endParaRPr lang="en-US" sz="1200" dirty="0"/>
+                      <a:endParaRPr lang="en-US" sz="1200" dirty="0">
+                        <a:latin typeface="Noto Sans JP" charset="0"/>
+                        <a:ea typeface="Noto Sans JP" charset="0"/>
+                        <a:cs typeface="Noto Sans JP" charset="0"/>
+                      </a:endParaRPr>
                     </a:p>
                   </a:txBody>
                   <a:tcPr marL="91440" marR="91440" marT="0" marB="0" anchor="ctr">
-                    <a:lnL w="9525" cap="flat" cmpd="sng" algn="ctr">
-                      <a:solidFill>
-                        <a:srgbClr val="BBBBBB"/>
+                    <a:lnL w="12700" cap="flat" cmpd="sng" algn="ctr">
+                      <a:solidFill>
+                        <a:srgbClr val="1A1A1A"/>
                       </a:solidFill>
                       <a:prstDash val="solid"/>
                       <a:round/>
                       <a:headEnd type="none" w="med" len="med"/>
                       <a:tailEnd type="none" w="med" len="med"/>
                     </a:lnL>
-                    <a:lnR w="9525" cap="flat" cmpd="sng" algn="ctr">
-                      <a:solidFill>
-                        <a:srgbClr val="BBBBBB"/>
+                    <a:lnR w="12700" cap="flat" cmpd="sng" algn="ctr">
+                      <a:solidFill>
+                        <a:srgbClr val="1A1A1A"/>
                       </a:solidFill>
                       <a:prstDash val="solid"/>
                       <a:round/>
                       <a:headEnd type="none" w="med" len="med"/>
                       <a:tailEnd type="none" w="med" len="med"/>
                     </a:lnR>
-                    <a:lnT w="9525" cap="flat" cmpd="sng" algn="ctr">
-                      <a:solidFill>
-                        <a:srgbClr val="BBBBBB"/>
+                    <a:lnT w="12700" cap="flat" cmpd="sng" algn="ctr">
+                      <a:solidFill>
+                        <a:srgbClr val="1A1A1A"/>
                       </a:solidFill>
                       <a:prstDash val="solid"/>
                       <a:round/>
                       <a:headEnd type="none" w="med" len="med"/>
                       <a:tailEnd type="none" w="med" len="med"/>
                     </a:lnT>
-                    <a:lnB w="9525" cap="flat" cmpd="sng" algn="ctr">
-                      <a:solidFill>
-                        <a:srgbClr val="BBBBBB"/>
-                      </a:solidFill>
-                      <a:prstDash val="solid"/>
-                      <a:round/>
-                      <a:headEnd type="none" w="med" len="med"/>
-                      <a:tailEnd type="none" w="med" len="med"/>
-                    </a:lnB>
-                    <a:solidFill>
-                      <a:srgbClr val="F4F4F4"/>
-                    </a:solidFill>
-                  </a:tcPr>
-                </a:tc>
-                <a:tc>
-                  <a:txBody>
-                    <a:bodyPr/>
-                    <a:lstStyle/>
-                    <a:p>
-                      <a:pPr indent="0" marL="0">
-                        <a:buNone/>
-                      </a:pPr>
-                      <a:endParaRPr lang="en-US" sz="1200" dirty="0"/>
-                    </a:p>
-                  </a:txBody>
-                  <a:tcPr marL="91440" marR="91440" marT="0" marB="0" anchor="ctr">
-                    <a:lnL w="9525" cap="flat" cmpd="sng" algn="ctr">
-                      <a:solidFill>
-                        <a:srgbClr val="BBBBBB"/>
-                      </a:solidFill>
-                      <a:prstDash val="solid"/>
-                      <a:round/>
-                      <a:headEnd type="none" w="med" len="med"/>
-                      <a:tailEnd type="none" w="med" len="med"/>
-                    </a:lnL>
-                    <a:lnR w="9525" cap="flat" cmpd="sng" algn="ctr">
-                      <a:solidFill>
-                        <a:srgbClr val="BBBBBB"/>
-                      </a:solidFill>
-                      <a:prstDash val="solid"/>
-                      <a:round/>
-                      <a:headEnd type="none" w="med" len="med"/>
-                      <a:tailEnd type="none" w="med" len="med"/>
-                    </a:lnR>
-                    <a:lnT w="9525" cap="flat" cmpd="sng" algn="ctr">
-                      <a:solidFill>
-                        <a:srgbClr val="BBBBBB"/>
-                      </a:solidFill>
-                      <a:prstDash val="solid"/>
-                      <a:round/>
-                      <a:headEnd type="none" w="med" len="med"/>
-                      <a:tailEnd type="none" w="med" len="med"/>
-                    </a:lnT>
-                    <a:lnB w="9525" cap="flat" cmpd="sng" algn="ctr">
-                      <a:solidFill>
-                        <a:srgbClr val="BBBBBB"/>
-                      </a:solidFill>
-                      <a:prstDash val="solid"/>
-                      <a:round/>
-                      <a:headEnd type="none" w="med" len="med"/>
-                      <a:tailEnd type="none" w="med" len="med"/>
-                    </a:lnB>
-                    <a:solidFill>
-                      <a:srgbClr val="F4F4F4"/>
-                    </a:solidFill>
-                  </a:tcPr>
-                </a:tc>
-                <a:tc>
-                  <a:txBody>
-                    <a:bodyPr/>
-                    <a:lstStyle/>
-                    <a:p>
-                      <a:pPr indent="0" marL="0">
-                        <a:buNone/>
-                      </a:pPr>
-                      <a:endParaRPr lang="en-US" sz="1200" dirty="0"/>
-                    </a:p>
-                  </a:txBody>
-                  <a:tcPr marL="91440" marR="91440" marT="0" marB="0" anchor="ctr">
-                    <a:lnL w="9525" cap="flat" cmpd="sng" algn="ctr">
-                      <a:solidFill>
-                        <a:srgbClr val="BBBBBB"/>
-                      </a:solidFill>
-                      <a:prstDash val="solid"/>
-                      <a:round/>
-                      <a:headEnd type="none" w="med" len="med"/>
-                      <a:tailEnd type="none" w="med" len="med"/>
-                    </a:lnL>
-                    <a:lnR w="9525" cap="flat" cmpd="sng" algn="ctr">
-                      <a:solidFill>
-                        <a:srgbClr val="BBBBBB"/>
-                      </a:solidFill>
-                      <a:prstDash val="solid"/>
-                      <a:round/>
-                      <a:headEnd type="none" w="med" len="med"/>
-                      <a:tailEnd type="none" w="med" len="med"/>
-                    </a:lnR>
-                    <a:lnT w="9525" cap="flat" cmpd="sng" algn="ctr">
-                      <a:solidFill>
-                        <a:srgbClr val="BBBBBB"/>
-                      </a:solidFill>
-                      <a:prstDash val="solid"/>
-                      <a:round/>
-                      <a:headEnd type="none" w="med" len="med"/>
-                      <a:tailEnd type="none" w="med" len="med"/>
-                    </a:lnT>
-                    <a:lnB w="9525" cap="flat" cmpd="sng" algn="ctr">
-                      <a:solidFill>
-                        <a:srgbClr val="BBBBBB"/>
-                      </a:solidFill>
-                      <a:prstDash val="solid"/>
-                      <a:round/>
-                      <a:headEnd type="none" w="med" len="med"/>
-                      <a:tailEnd type="none" w="med" len="med"/>
-                    </a:lnB>
-                    <a:solidFill>
-                      <a:srgbClr val="F4F4F4"/>
-                    </a:solidFill>
-                  </a:tcPr>
-                </a:tc>
-                <a:tc>
-                  <a:txBody>
-                    <a:bodyPr/>
-                    <a:lstStyle/>
-                    <a:p>
-                      <a:pPr indent="0" marL="0">
-                        <a:buNone/>
-                      </a:pPr>
-                      <a:endParaRPr lang="en-US" sz="1200" dirty="0"/>
-                    </a:p>
-                  </a:txBody>
-                  <a:tcPr marL="91440" marR="91440" marT="0" marB="0" anchor="ctr">
-                    <a:lnL w="9525" cap="flat" cmpd="sng" algn="ctr">
-                      <a:solidFill>
-                        <a:srgbClr val="BBBBBB"/>
-                      </a:solidFill>
-                      <a:prstDash val="solid"/>
-                      <a:round/>
-                      <a:headEnd type="none" w="med" len="med"/>
-                      <a:tailEnd type="none" w="med" len="med"/>
-                    </a:lnL>
-                    <a:lnR w="9525" cap="flat" cmpd="sng" algn="ctr">
-                      <a:solidFill>
-                        <a:srgbClr val="BBBBBB"/>
-                      </a:solidFill>
-                      <a:prstDash val="solid"/>
-                      <a:round/>
-                      <a:headEnd type="none" w="med" len="med"/>
-                      <a:tailEnd type="none" w="med" len="med"/>
-                    </a:lnR>
-                    <a:lnT w="9525" cap="flat" cmpd="sng" algn="ctr">
-                      <a:solidFill>
-                        <a:srgbClr val="BBBBBB"/>
-                      </a:solidFill>
-                      <a:prstDash val="solid"/>
-                      <a:round/>
-                      <a:headEnd type="none" w="med" len="med"/>
-                      <a:tailEnd type="none" w="med" len="med"/>
-                    </a:lnT>
-                    <a:lnB w="9525" cap="flat" cmpd="sng" algn="ctr">
-                      <a:solidFill>
-                        <a:srgbClr val="BBBBBB"/>
-                      </a:solidFill>
-                      <a:prstDash val="solid"/>
-                      <a:round/>
-                      <a:headEnd type="none" w="med" len="med"/>
-                      <a:tailEnd type="none" w="med" len="med"/>
-                    </a:lnB>
-                    <a:solidFill>
-                      <a:srgbClr val="F4F4F4"/>
-                    </a:solidFill>
-                  </a:tcPr>
-                </a:tc>
-              </a:tr>
-              <a:tr h="438912">
-                <a:tc>
-                  <a:txBody>
-                    <a:bodyPr/>
-                    <a:lstStyle/>
-                    <a:p>
-                      <a:pPr indent="0" marL="0">
-                        <a:buNone/>
-                      </a:pPr>
-                      <a:r>
-                        <a:rPr lang="en-US" sz="1200" b="1" dirty="0">
-                          <a:solidFill>
-                            <a:srgbClr val="1A1A1A"/>
-                          </a:solidFill>
-                        </a:rPr>
-                        <a:t>3</a:t>
-                      </a:r>
-                      <a:endParaRPr lang="en-US" sz="1200" dirty="0"/>
-                    </a:p>
-                  </a:txBody>
-                  <a:tcPr marL="91440" marR="91440" marT="0" marB="0" anchor="ctr">
-                    <a:lnL w="9525" cap="flat" cmpd="sng" algn="ctr">
-                      <a:solidFill>
-                        <a:srgbClr val="BBBBBB"/>
-                      </a:solidFill>
-                      <a:prstDash val="solid"/>
-                      <a:round/>
-                      <a:headEnd type="none" w="med" len="med"/>
-                      <a:tailEnd type="none" w="med" len="med"/>
-                    </a:lnL>
-                    <a:lnR w="9525" cap="flat" cmpd="sng" algn="ctr">
-                      <a:solidFill>
-                        <a:srgbClr val="BBBBBB"/>
-                      </a:solidFill>
-                      <a:prstDash val="solid"/>
-                      <a:round/>
-                      <a:headEnd type="none" w="med" len="med"/>
-                      <a:tailEnd type="none" w="med" len="med"/>
-                    </a:lnR>
-                    <a:lnT w="9525" cap="flat" cmpd="sng" algn="ctr">
-                      <a:solidFill>
-                        <a:srgbClr val="BBBBBB"/>
-                      </a:solidFill>
-                      <a:prstDash val="solid"/>
-                      <a:round/>
-                      <a:headEnd type="none" w="med" len="med"/>
-                      <a:tailEnd type="none" w="med" len="med"/>
-                    </a:lnT>
-                    <a:lnB w="9525" cap="flat" cmpd="sng" algn="ctr">
-                      <a:solidFill>
-                        <a:srgbClr val="BBBBBB"/>
+                    <a:lnB w="12700" cap="flat" cmpd="sng" algn="ctr">
+                      <a:solidFill>
+                        <a:srgbClr val="1A1A1A"/>
                       </a:solidFill>
                       <a:prstDash val="solid"/>
                       <a:round/>
@@ -6158,40 +6046,44 @@
                       <a:pPr indent="0" marL="0">
                         <a:buNone/>
                       </a:pPr>
-                      <a:endParaRPr lang="en-US" sz="1200" dirty="0"/>
+                      <a:endParaRPr lang="en-US" sz="1200" dirty="0">
+                        <a:latin typeface="Noto Sans JP Medium" charset="0"/>
+                        <a:ea typeface="Noto Sans JP Medium" charset="0"/>
+                        <a:cs typeface="Noto Sans JP Medium" charset="0"/>
+                      </a:endParaRPr>
                     </a:p>
                   </a:txBody>
                   <a:tcPr marL="91440" marR="91440" marT="0" marB="0" anchor="ctr">
-                    <a:lnL w="9525" cap="flat" cmpd="sng" algn="ctr">
-                      <a:solidFill>
-                        <a:srgbClr val="BBBBBB"/>
+                    <a:lnL w="12700" cap="flat" cmpd="sng" algn="ctr">
+                      <a:solidFill>
+                        <a:srgbClr val="1A1A1A"/>
                       </a:solidFill>
                       <a:prstDash val="solid"/>
                       <a:round/>
                       <a:headEnd type="none" w="med" len="med"/>
                       <a:tailEnd type="none" w="med" len="med"/>
                     </a:lnL>
-                    <a:lnR w="9525" cap="flat" cmpd="sng" algn="ctr">
-                      <a:solidFill>
-                        <a:srgbClr val="BBBBBB"/>
+                    <a:lnR w="12700" cap="flat" cmpd="sng" algn="ctr">
+                      <a:solidFill>
+                        <a:srgbClr val="1A1A1A"/>
                       </a:solidFill>
                       <a:prstDash val="solid"/>
                       <a:round/>
                       <a:headEnd type="none" w="med" len="med"/>
                       <a:tailEnd type="none" w="med" len="med"/>
                     </a:lnR>
-                    <a:lnT w="9525" cap="flat" cmpd="sng" algn="ctr">
-                      <a:solidFill>
-                        <a:srgbClr val="BBBBBB"/>
+                    <a:lnT w="12700" cap="flat" cmpd="sng" algn="ctr">
+                      <a:solidFill>
+                        <a:srgbClr val="1A1A1A"/>
                       </a:solidFill>
                       <a:prstDash val="solid"/>
                       <a:round/>
                       <a:headEnd type="none" w="med" len="med"/>
                       <a:tailEnd type="none" w="med" len="med"/>
                     </a:lnT>
-                    <a:lnB w="9525" cap="flat" cmpd="sng" algn="ctr">
-                      <a:solidFill>
-                        <a:srgbClr val="BBBBBB"/>
+                    <a:lnB w="12700" cap="flat" cmpd="sng" algn="ctr">
+                      <a:solidFill>
+                        <a:srgbClr val="1A1A1A"/>
                       </a:solidFill>
                       <a:prstDash val="solid"/>
                       <a:round/>
@@ -6211,40 +6103,44 @@
                       <a:pPr indent="0" marL="0">
                         <a:buNone/>
                       </a:pPr>
-                      <a:endParaRPr lang="en-US" sz="1200" dirty="0"/>
+                      <a:endParaRPr lang="en-US" sz="1200" dirty="0">
+                        <a:latin typeface="Noto Sans JP Medium" charset="0"/>
+                        <a:ea typeface="Noto Sans JP Medium" charset="0"/>
+                        <a:cs typeface="Noto Sans JP Medium" charset="0"/>
+                      </a:endParaRPr>
                     </a:p>
                   </a:txBody>
                   <a:tcPr marL="91440" marR="91440" marT="0" marB="0" anchor="ctr">
-                    <a:lnL w="9525" cap="flat" cmpd="sng" algn="ctr">
-                      <a:solidFill>
-                        <a:srgbClr val="BBBBBB"/>
+                    <a:lnL w="12700" cap="flat" cmpd="sng" algn="ctr">
+                      <a:solidFill>
+                        <a:srgbClr val="1A1A1A"/>
                       </a:solidFill>
                       <a:prstDash val="solid"/>
                       <a:round/>
                       <a:headEnd type="none" w="med" len="med"/>
                       <a:tailEnd type="none" w="med" len="med"/>
                     </a:lnL>
-                    <a:lnR w="9525" cap="flat" cmpd="sng" algn="ctr">
-                      <a:solidFill>
-                        <a:srgbClr val="BBBBBB"/>
+                    <a:lnR w="12700" cap="flat" cmpd="sng" algn="ctr">
+                      <a:solidFill>
+                        <a:srgbClr val="1A1A1A"/>
                       </a:solidFill>
                       <a:prstDash val="solid"/>
                       <a:round/>
                       <a:headEnd type="none" w="med" len="med"/>
                       <a:tailEnd type="none" w="med" len="med"/>
                     </a:lnR>
-                    <a:lnT w="9525" cap="flat" cmpd="sng" algn="ctr">
-                      <a:solidFill>
-                        <a:srgbClr val="BBBBBB"/>
+                    <a:lnT w="12700" cap="flat" cmpd="sng" algn="ctr">
+                      <a:solidFill>
+                        <a:srgbClr val="1A1A1A"/>
                       </a:solidFill>
                       <a:prstDash val="solid"/>
                       <a:round/>
                       <a:headEnd type="none" w="med" len="med"/>
                       <a:tailEnd type="none" w="med" len="med"/>
                     </a:lnT>
-                    <a:lnB w="9525" cap="flat" cmpd="sng" algn="ctr">
-                      <a:solidFill>
-                        <a:srgbClr val="BBBBBB"/>
+                    <a:lnB w="12700" cap="flat" cmpd="sng" algn="ctr">
+                      <a:solidFill>
+                        <a:srgbClr val="1A1A1A"/>
                       </a:solidFill>
                       <a:prstDash val="solid"/>
                       <a:round/>
@@ -6264,40 +6160,44 @@
                       <a:pPr indent="0" marL="0">
                         <a:buNone/>
                       </a:pPr>
-                      <a:endParaRPr lang="en-US" sz="1200" dirty="0"/>
+                      <a:endParaRPr lang="en-US" sz="1200" dirty="0">
+                        <a:latin typeface="Noto Sans JP Medium" charset="0"/>
+                        <a:ea typeface="Noto Sans JP Medium" charset="0"/>
+                        <a:cs typeface="Noto Sans JP Medium" charset="0"/>
+                      </a:endParaRPr>
                     </a:p>
                   </a:txBody>
                   <a:tcPr marL="91440" marR="91440" marT="0" marB="0" anchor="ctr">
-                    <a:lnL w="9525" cap="flat" cmpd="sng" algn="ctr">
-                      <a:solidFill>
-                        <a:srgbClr val="BBBBBB"/>
+                    <a:lnL w="12700" cap="flat" cmpd="sng" algn="ctr">
+                      <a:solidFill>
+                        <a:srgbClr val="1A1A1A"/>
                       </a:solidFill>
                       <a:prstDash val="solid"/>
                       <a:round/>
                       <a:headEnd type="none" w="med" len="med"/>
                       <a:tailEnd type="none" w="med" len="med"/>
                     </a:lnL>
-                    <a:lnR w="9525" cap="flat" cmpd="sng" algn="ctr">
-                      <a:solidFill>
-                        <a:srgbClr val="BBBBBB"/>
+                    <a:lnR w="12700" cap="flat" cmpd="sng" algn="ctr">
+                      <a:solidFill>
+                        <a:srgbClr val="1A1A1A"/>
                       </a:solidFill>
                       <a:prstDash val="solid"/>
                       <a:round/>
                       <a:headEnd type="none" w="med" len="med"/>
                       <a:tailEnd type="none" w="med" len="med"/>
                     </a:lnR>
-                    <a:lnT w="9525" cap="flat" cmpd="sng" algn="ctr">
-                      <a:solidFill>
-                        <a:srgbClr val="BBBBBB"/>
+                    <a:lnT w="12700" cap="flat" cmpd="sng" algn="ctr">
+                      <a:solidFill>
+                        <a:srgbClr val="1A1A1A"/>
                       </a:solidFill>
                       <a:prstDash val="solid"/>
                       <a:round/>
                       <a:headEnd type="none" w="med" len="med"/>
                       <a:tailEnd type="none" w="med" len="med"/>
                     </a:lnT>
-                    <a:lnB w="9525" cap="flat" cmpd="sng" algn="ctr">
-                      <a:solidFill>
-                        <a:srgbClr val="BBBBBB"/>
+                    <a:lnB w="12700" cap="flat" cmpd="sng" algn="ctr">
+                      <a:solidFill>
+                        <a:srgbClr val="1A1A1A"/>
                       </a:solidFill>
                       <a:prstDash val="solid"/>
                       <a:round/>
@@ -6322,45 +6222,52 @@
                       <a:r>
                         <a:rPr lang="en-US" sz="1200" b="1" dirty="0">
                           <a:solidFill>
-                            <a:srgbClr val="1A1A1A"/>
+                            <a:srgbClr val="DD6420"/>
                           </a:solidFill>
+                          <a:latin typeface="Noto Sans JP" pitchFamily="34" charset="0"/>
+                          <a:ea typeface="Noto Sans JP" pitchFamily="34" charset="-122"/>
+                          <a:cs typeface="Noto Sans JP" pitchFamily="34" charset="-120"/>
                         </a:rPr>
-                        <a:t>4〜6</a:t>
+                        <a:t>3</a:t>
                       </a:r>
-                      <a:endParaRPr lang="en-US" sz="1200" dirty="0"/>
+                      <a:endParaRPr lang="en-US" sz="1200" dirty="0">
+                        <a:latin typeface="Noto Sans JP" charset="0"/>
+                        <a:ea typeface="Noto Sans JP" charset="0"/>
+                        <a:cs typeface="Noto Sans JP" charset="0"/>
+                      </a:endParaRPr>
                     </a:p>
                   </a:txBody>
                   <a:tcPr marL="91440" marR="91440" marT="0" marB="0" anchor="ctr">
-                    <a:lnL w="9525" cap="flat" cmpd="sng" algn="ctr">
-                      <a:solidFill>
-                        <a:srgbClr val="BBBBBB"/>
+                    <a:lnL w="12700" cap="flat" cmpd="sng" algn="ctr">
+                      <a:solidFill>
+                        <a:srgbClr val="1A1A1A"/>
                       </a:solidFill>
                       <a:prstDash val="solid"/>
                       <a:round/>
                       <a:headEnd type="none" w="med" len="med"/>
                       <a:tailEnd type="none" w="med" len="med"/>
                     </a:lnL>
-                    <a:lnR w="9525" cap="flat" cmpd="sng" algn="ctr">
-                      <a:solidFill>
-                        <a:srgbClr val="BBBBBB"/>
+                    <a:lnR w="12700" cap="flat" cmpd="sng" algn="ctr">
+                      <a:solidFill>
+                        <a:srgbClr val="1A1A1A"/>
                       </a:solidFill>
                       <a:prstDash val="solid"/>
                       <a:round/>
                       <a:headEnd type="none" w="med" len="med"/>
                       <a:tailEnd type="none" w="med" len="med"/>
                     </a:lnR>
-                    <a:lnT w="9525" cap="flat" cmpd="sng" algn="ctr">
-                      <a:solidFill>
-                        <a:srgbClr val="BBBBBB"/>
+                    <a:lnT w="12700" cap="flat" cmpd="sng" algn="ctr">
+                      <a:solidFill>
+                        <a:srgbClr val="1A1A1A"/>
                       </a:solidFill>
                       <a:prstDash val="solid"/>
                       <a:round/>
                       <a:headEnd type="none" w="med" len="med"/>
                       <a:tailEnd type="none" w="med" len="med"/>
                     </a:lnT>
-                    <a:lnB w="9525" cap="flat" cmpd="sng" algn="ctr">
-                      <a:solidFill>
-                        <a:srgbClr val="BBBBBB"/>
+                    <a:lnB w="12700" cap="flat" cmpd="sng" algn="ctr">
+                      <a:solidFill>
+                        <a:srgbClr val="1A1A1A"/>
                       </a:solidFill>
                       <a:prstDash val="solid"/>
                       <a:round/>
@@ -6368,7 +6275,7 @@
                       <a:tailEnd type="none" w="med" len="med"/>
                     </a:lnB>
                     <a:solidFill>
-                      <a:srgbClr val="F4F4F4"/>
+                      <a:srgbClr val="FFFFFF"/>
                     </a:solidFill>
                   </a:tcPr>
                 </a:tc>
@@ -6380,40 +6287,44 @@
                       <a:pPr indent="0" marL="0">
                         <a:buNone/>
                       </a:pPr>
-                      <a:endParaRPr lang="en-US" sz="1200" dirty="0"/>
+                      <a:endParaRPr lang="en-US" sz="1200" dirty="0">
+                        <a:latin typeface="Noto Sans JP Medium" charset="0"/>
+                        <a:ea typeface="Noto Sans JP Medium" charset="0"/>
+                        <a:cs typeface="Noto Sans JP Medium" charset="0"/>
+                      </a:endParaRPr>
                     </a:p>
                   </a:txBody>
                   <a:tcPr marL="91440" marR="91440" marT="0" marB="0" anchor="ctr">
-                    <a:lnL w="9525" cap="flat" cmpd="sng" algn="ctr">
-                      <a:solidFill>
-                        <a:srgbClr val="BBBBBB"/>
+                    <a:lnL w="12700" cap="flat" cmpd="sng" algn="ctr">
+                      <a:solidFill>
+                        <a:srgbClr val="1A1A1A"/>
                       </a:solidFill>
                       <a:prstDash val="solid"/>
                       <a:round/>
                       <a:headEnd type="none" w="med" len="med"/>
                       <a:tailEnd type="none" w="med" len="med"/>
                     </a:lnL>
-                    <a:lnR w="9525" cap="flat" cmpd="sng" algn="ctr">
-                      <a:solidFill>
-                        <a:srgbClr val="BBBBBB"/>
+                    <a:lnR w="12700" cap="flat" cmpd="sng" algn="ctr">
+                      <a:solidFill>
+                        <a:srgbClr val="1A1A1A"/>
                       </a:solidFill>
                       <a:prstDash val="solid"/>
                       <a:round/>
                       <a:headEnd type="none" w="med" len="med"/>
                       <a:tailEnd type="none" w="med" len="med"/>
                     </a:lnR>
-                    <a:lnT w="9525" cap="flat" cmpd="sng" algn="ctr">
-                      <a:solidFill>
-                        <a:srgbClr val="BBBBBB"/>
+                    <a:lnT w="12700" cap="flat" cmpd="sng" algn="ctr">
+                      <a:solidFill>
+                        <a:srgbClr val="1A1A1A"/>
                       </a:solidFill>
                       <a:prstDash val="solid"/>
                       <a:round/>
                       <a:headEnd type="none" w="med" len="med"/>
                       <a:tailEnd type="none" w="med" len="med"/>
                     </a:lnT>
-                    <a:lnB w="9525" cap="flat" cmpd="sng" algn="ctr">
-                      <a:solidFill>
-                        <a:srgbClr val="BBBBBB"/>
+                    <a:lnB w="12700" cap="flat" cmpd="sng" algn="ctr">
+                      <a:solidFill>
+                        <a:srgbClr val="1A1A1A"/>
                       </a:solidFill>
                       <a:prstDash val="solid"/>
                       <a:round/>
@@ -6421,7 +6332,7 @@
                       <a:tailEnd type="none" w="med" len="med"/>
                     </a:lnB>
                     <a:solidFill>
-                      <a:srgbClr val="F4F4F4"/>
+                      <a:srgbClr val="FFFFFF"/>
                     </a:solidFill>
                   </a:tcPr>
                 </a:tc>
@@ -6433,40 +6344,44 @@
                       <a:pPr indent="0" marL="0">
                         <a:buNone/>
                       </a:pPr>
-                      <a:endParaRPr lang="en-US" sz="1200" dirty="0"/>
+                      <a:endParaRPr lang="en-US" sz="1200" dirty="0">
+                        <a:latin typeface="Noto Sans JP Medium" charset="0"/>
+                        <a:ea typeface="Noto Sans JP Medium" charset="0"/>
+                        <a:cs typeface="Noto Sans JP Medium" charset="0"/>
+                      </a:endParaRPr>
                     </a:p>
                   </a:txBody>
                   <a:tcPr marL="91440" marR="91440" marT="0" marB="0" anchor="ctr">
-                    <a:lnL w="9525" cap="flat" cmpd="sng" algn="ctr">
-                      <a:solidFill>
-                        <a:srgbClr val="BBBBBB"/>
+                    <a:lnL w="12700" cap="flat" cmpd="sng" algn="ctr">
+                      <a:solidFill>
+                        <a:srgbClr val="1A1A1A"/>
                       </a:solidFill>
                       <a:prstDash val="solid"/>
                       <a:round/>
                       <a:headEnd type="none" w="med" len="med"/>
                       <a:tailEnd type="none" w="med" len="med"/>
                     </a:lnL>
-                    <a:lnR w="9525" cap="flat" cmpd="sng" algn="ctr">
-                      <a:solidFill>
-                        <a:srgbClr val="BBBBBB"/>
+                    <a:lnR w="12700" cap="flat" cmpd="sng" algn="ctr">
+                      <a:solidFill>
+                        <a:srgbClr val="1A1A1A"/>
                       </a:solidFill>
                       <a:prstDash val="solid"/>
                       <a:round/>
                       <a:headEnd type="none" w="med" len="med"/>
                       <a:tailEnd type="none" w="med" len="med"/>
                     </a:lnR>
-                    <a:lnT w="9525" cap="flat" cmpd="sng" algn="ctr">
-                      <a:solidFill>
-                        <a:srgbClr val="BBBBBB"/>
+                    <a:lnT w="12700" cap="flat" cmpd="sng" algn="ctr">
+                      <a:solidFill>
+                        <a:srgbClr val="1A1A1A"/>
                       </a:solidFill>
                       <a:prstDash val="solid"/>
                       <a:round/>
                       <a:headEnd type="none" w="med" len="med"/>
                       <a:tailEnd type="none" w="med" len="med"/>
                     </a:lnT>
-                    <a:lnB w="9525" cap="flat" cmpd="sng" algn="ctr">
-                      <a:solidFill>
-                        <a:srgbClr val="BBBBBB"/>
+                    <a:lnB w="12700" cap="flat" cmpd="sng" algn="ctr">
+                      <a:solidFill>
+                        <a:srgbClr val="1A1A1A"/>
                       </a:solidFill>
                       <a:prstDash val="solid"/>
                       <a:round/>
@@ -6474,7 +6389,7 @@
                       <a:tailEnd type="none" w="med" len="med"/>
                     </a:lnB>
                     <a:solidFill>
-                      <a:srgbClr val="F4F4F4"/>
+                      <a:srgbClr val="FFFFFF"/>
                     </a:solidFill>
                   </a:tcPr>
                 </a:tc>
@@ -6486,40 +6401,44 @@
                       <a:pPr indent="0" marL="0">
                         <a:buNone/>
                       </a:pPr>
-                      <a:endParaRPr lang="en-US" sz="1200" dirty="0"/>
+                      <a:endParaRPr lang="en-US" sz="1200" dirty="0">
+                        <a:latin typeface="Noto Sans JP Medium" charset="0"/>
+                        <a:ea typeface="Noto Sans JP Medium" charset="0"/>
+                        <a:cs typeface="Noto Sans JP Medium" charset="0"/>
+                      </a:endParaRPr>
                     </a:p>
                   </a:txBody>
                   <a:tcPr marL="91440" marR="91440" marT="0" marB="0" anchor="ctr">
-                    <a:lnL w="9525" cap="flat" cmpd="sng" algn="ctr">
-                      <a:solidFill>
-                        <a:srgbClr val="BBBBBB"/>
+                    <a:lnL w="12700" cap="flat" cmpd="sng" algn="ctr">
+                      <a:solidFill>
+                        <a:srgbClr val="1A1A1A"/>
                       </a:solidFill>
                       <a:prstDash val="solid"/>
                       <a:round/>
                       <a:headEnd type="none" w="med" len="med"/>
                       <a:tailEnd type="none" w="med" len="med"/>
                     </a:lnL>
-                    <a:lnR w="9525" cap="flat" cmpd="sng" algn="ctr">
-                      <a:solidFill>
-                        <a:srgbClr val="BBBBBB"/>
+                    <a:lnR w="12700" cap="flat" cmpd="sng" algn="ctr">
+                      <a:solidFill>
+                        <a:srgbClr val="1A1A1A"/>
                       </a:solidFill>
                       <a:prstDash val="solid"/>
                       <a:round/>
                       <a:headEnd type="none" w="med" len="med"/>
                       <a:tailEnd type="none" w="med" len="med"/>
                     </a:lnR>
-                    <a:lnT w="9525" cap="flat" cmpd="sng" algn="ctr">
-                      <a:solidFill>
-                        <a:srgbClr val="BBBBBB"/>
+                    <a:lnT w="12700" cap="flat" cmpd="sng" algn="ctr">
+                      <a:solidFill>
+                        <a:srgbClr val="1A1A1A"/>
                       </a:solidFill>
                       <a:prstDash val="solid"/>
                       <a:round/>
                       <a:headEnd type="none" w="med" len="med"/>
                       <a:tailEnd type="none" w="med" len="med"/>
                     </a:lnT>
-                    <a:lnB w="9525" cap="flat" cmpd="sng" algn="ctr">
-                      <a:solidFill>
-                        <a:srgbClr val="BBBBBB"/>
+                    <a:lnB w="12700" cap="flat" cmpd="sng" algn="ctr">
+                      <a:solidFill>
+                        <a:srgbClr val="1A1A1A"/>
                       </a:solidFill>
                       <a:prstDash val="solid"/>
                       <a:round/>
@@ -6527,7 +6446,248 @@
                       <a:tailEnd type="none" w="med" len="med"/>
                     </a:lnB>
                     <a:solidFill>
-                      <a:srgbClr val="F4F4F4"/>
+                      <a:srgbClr val="FFFFFF"/>
+                    </a:solidFill>
+                  </a:tcPr>
+                </a:tc>
+              </a:tr>
+              <a:tr h="438912">
+                <a:tc>
+                  <a:txBody>
+                    <a:bodyPr/>
+                    <a:lstStyle/>
+                    <a:p>
+                      <a:pPr indent="0" marL="0">
+                        <a:buNone/>
+                      </a:pPr>
+                      <a:r>
+                        <a:rPr lang="en-US" sz="1200" b="1" dirty="0">
+                          <a:solidFill>
+                            <a:srgbClr val="DD6420"/>
+                          </a:solidFill>
+                          <a:latin typeface="Noto Sans JP" pitchFamily="34" charset="0"/>
+                          <a:ea typeface="Noto Sans JP" pitchFamily="34" charset="-122"/>
+                          <a:cs typeface="Noto Sans JP" pitchFamily="34" charset="-120"/>
+                        </a:rPr>
+                        <a:t>4〜6</a:t>
+                      </a:r>
+                      <a:endParaRPr lang="en-US" sz="1200" dirty="0">
+                        <a:latin typeface="Noto Sans JP" charset="0"/>
+                        <a:ea typeface="Noto Sans JP" charset="0"/>
+                        <a:cs typeface="Noto Sans JP" charset="0"/>
+                      </a:endParaRPr>
+                    </a:p>
+                  </a:txBody>
+                  <a:tcPr marL="91440" marR="91440" marT="0" marB="0" anchor="ctr">
+                    <a:lnL w="12700" cap="flat" cmpd="sng" algn="ctr">
+                      <a:solidFill>
+                        <a:srgbClr val="1A1A1A"/>
+                      </a:solidFill>
+                      <a:prstDash val="solid"/>
+                      <a:round/>
+                      <a:headEnd type="none" w="med" len="med"/>
+                      <a:tailEnd type="none" w="med" len="med"/>
+                    </a:lnL>
+                    <a:lnR w="12700" cap="flat" cmpd="sng" algn="ctr">
+                      <a:solidFill>
+                        <a:srgbClr val="1A1A1A"/>
+                      </a:solidFill>
+                      <a:prstDash val="solid"/>
+                      <a:round/>
+                      <a:headEnd type="none" w="med" len="med"/>
+                      <a:tailEnd type="none" w="med" len="med"/>
+                    </a:lnR>
+                    <a:lnT w="12700" cap="flat" cmpd="sng" algn="ctr">
+                      <a:solidFill>
+                        <a:srgbClr val="1A1A1A"/>
+                      </a:solidFill>
+                      <a:prstDash val="solid"/>
+                      <a:round/>
+                      <a:headEnd type="none" w="med" len="med"/>
+                      <a:tailEnd type="none" w="med" len="med"/>
+                    </a:lnT>
+                    <a:lnB w="12700" cap="flat" cmpd="sng" algn="ctr">
+                      <a:solidFill>
+                        <a:srgbClr val="1A1A1A"/>
+                      </a:solidFill>
+                      <a:prstDash val="solid"/>
+                      <a:round/>
+                      <a:headEnd type="none" w="med" len="med"/>
+                      <a:tailEnd type="none" w="med" len="med"/>
+                    </a:lnB>
+                    <a:solidFill>
+                      <a:srgbClr val="FFFFFF"/>
+                    </a:solidFill>
+                  </a:tcPr>
+                </a:tc>
+                <a:tc>
+                  <a:txBody>
+                    <a:bodyPr/>
+                    <a:lstStyle/>
+                    <a:p>
+                      <a:pPr indent="0" marL="0">
+                        <a:buNone/>
+                      </a:pPr>
+                      <a:endParaRPr lang="en-US" sz="1200" dirty="0">
+                        <a:latin typeface="Noto Sans JP Medium" charset="0"/>
+                        <a:ea typeface="Noto Sans JP Medium" charset="0"/>
+                        <a:cs typeface="Noto Sans JP Medium" charset="0"/>
+                      </a:endParaRPr>
+                    </a:p>
+                  </a:txBody>
+                  <a:tcPr marL="91440" marR="91440" marT="0" marB="0" anchor="ctr">
+                    <a:lnL w="12700" cap="flat" cmpd="sng" algn="ctr">
+                      <a:solidFill>
+                        <a:srgbClr val="1A1A1A"/>
+                      </a:solidFill>
+                      <a:prstDash val="solid"/>
+                      <a:round/>
+                      <a:headEnd type="none" w="med" len="med"/>
+                      <a:tailEnd type="none" w="med" len="med"/>
+                    </a:lnL>
+                    <a:lnR w="12700" cap="flat" cmpd="sng" algn="ctr">
+                      <a:solidFill>
+                        <a:srgbClr val="1A1A1A"/>
+                      </a:solidFill>
+                      <a:prstDash val="solid"/>
+                      <a:round/>
+                      <a:headEnd type="none" w="med" len="med"/>
+                      <a:tailEnd type="none" w="med" len="med"/>
+                    </a:lnR>
+                    <a:lnT w="12700" cap="flat" cmpd="sng" algn="ctr">
+                      <a:solidFill>
+                        <a:srgbClr val="1A1A1A"/>
+                      </a:solidFill>
+                      <a:prstDash val="solid"/>
+                      <a:round/>
+                      <a:headEnd type="none" w="med" len="med"/>
+                      <a:tailEnd type="none" w="med" len="med"/>
+                    </a:lnT>
+                    <a:lnB w="12700" cap="flat" cmpd="sng" algn="ctr">
+                      <a:solidFill>
+                        <a:srgbClr val="1A1A1A"/>
+                      </a:solidFill>
+                      <a:prstDash val="solid"/>
+                      <a:round/>
+                      <a:headEnd type="none" w="med" len="med"/>
+                      <a:tailEnd type="none" w="med" len="med"/>
+                    </a:lnB>
+                    <a:solidFill>
+                      <a:srgbClr val="FFFFFF"/>
+                    </a:solidFill>
+                  </a:tcPr>
+                </a:tc>
+                <a:tc>
+                  <a:txBody>
+                    <a:bodyPr/>
+                    <a:lstStyle/>
+                    <a:p>
+                      <a:pPr indent="0" marL="0">
+                        <a:buNone/>
+                      </a:pPr>
+                      <a:endParaRPr lang="en-US" sz="1200" dirty="0">
+                        <a:latin typeface="Noto Sans JP Medium" charset="0"/>
+                        <a:ea typeface="Noto Sans JP Medium" charset="0"/>
+                        <a:cs typeface="Noto Sans JP Medium" charset="0"/>
+                      </a:endParaRPr>
+                    </a:p>
+                  </a:txBody>
+                  <a:tcPr marL="91440" marR="91440" marT="0" marB="0" anchor="ctr">
+                    <a:lnL w="12700" cap="flat" cmpd="sng" algn="ctr">
+                      <a:solidFill>
+                        <a:srgbClr val="1A1A1A"/>
+                      </a:solidFill>
+                      <a:prstDash val="solid"/>
+                      <a:round/>
+                      <a:headEnd type="none" w="med" len="med"/>
+                      <a:tailEnd type="none" w="med" len="med"/>
+                    </a:lnL>
+                    <a:lnR w="12700" cap="flat" cmpd="sng" algn="ctr">
+                      <a:solidFill>
+                        <a:srgbClr val="1A1A1A"/>
+                      </a:solidFill>
+                      <a:prstDash val="solid"/>
+                      <a:round/>
+                      <a:headEnd type="none" w="med" len="med"/>
+                      <a:tailEnd type="none" w="med" len="med"/>
+                    </a:lnR>
+                    <a:lnT w="12700" cap="flat" cmpd="sng" algn="ctr">
+                      <a:solidFill>
+                        <a:srgbClr val="1A1A1A"/>
+                      </a:solidFill>
+                      <a:prstDash val="solid"/>
+                      <a:round/>
+                      <a:headEnd type="none" w="med" len="med"/>
+                      <a:tailEnd type="none" w="med" len="med"/>
+                    </a:lnT>
+                    <a:lnB w="12700" cap="flat" cmpd="sng" algn="ctr">
+                      <a:solidFill>
+                        <a:srgbClr val="1A1A1A"/>
+                      </a:solidFill>
+                      <a:prstDash val="solid"/>
+                      <a:round/>
+                      <a:headEnd type="none" w="med" len="med"/>
+                      <a:tailEnd type="none" w="med" len="med"/>
+                    </a:lnB>
+                    <a:solidFill>
+                      <a:srgbClr val="FFFFFF"/>
+                    </a:solidFill>
+                  </a:tcPr>
+                </a:tc>
+                <a:tc>
+                  <a:txBody>
+                    <a:bodyPr/>
+                    <a:lstStyle/>
+                    <a:p>
+                      <a:pPr indent="0" marL="0">
+                        <a:buNone/>
+                      </a:pPr>
+                      <a:endParaRPr lang="en-US" sz="1200" dirty="0">
+                        <a:latin typeface="Noto Sans JP Medium" charset="0"/>
+                        <a:ea typeface="Noto Sans JP Medium" charset="0"/>
+                        <a:cs typeface="Noto Sans JP Medium" charset="0"/>
+                      </a:endParaRPr>
+                    </a:p>
+                  </a:txBody>
+                  <a:tcPr marL="91440" marR="91440" marT="0" marB="0" anchor="ctr">
+                    <a:lnL w="12700" cap="flat" cmpd="sng" algn="ctr">
+                      <a:solidFill>
+                        <a:srgbClr val="1A1A1A"/>
+                      </a:solidFill>
+                      <a:prstDash val="solid"/>
+                      <a:round/>
+                      <a:headEnd type="none" w="med" len="med"/>
+                      <a:tailEnd type="none" w="med" len="med"/>
+                    </a:lnL>
+                    <a:lnR w="12700" cap="flat" cmpd="sng" algn="ctr">
+                      <a:solidFill>
+                        <a:srgbClr val="1A1A1A"/>
+                      </a:solidFill>
+                      <a:prstDash val="solid"/>
+                      <a:round/>
+                      <a:headEnd type="none" w="med" len="med"/>
+                      <a:tailEnd type="none" w="med" len="med"/>
+                    </a:lnR>
+                    <a:lnT w="12700" cap="flat" cmpd="sng" algn="ctr">
+                      <a:solidFill>
+                        <a:srgbClr val="1A1A1A"/>
+                      </a:solidFill>
+                      <a:prstDash val="solid"/>
+                      <a:round/>
+                      <a:headEnd type="none" w="med" len="med"/>
+                      <a:tailEnd type="none" w="med" len="med"/>
+                    </a:lnT>
+                    <a:lnB w="12700" cap="flat" cmpd="sng" algn="ctr">
+                      <a:solidFill>
+                        <a:srgbClr val="1A1A1A"/>
+                      </a:solidFill>
+                      <a:prstDash val="solid"/>
+                      <a:round/>
+                      <a:headEnd type="none" w="med" len="med"/>
+                      <a:tailEnd type="none" w="med" len="med"/>
+                    </a:lnB>
+                    <a:solidFill>
+                      <a:srgbClr val="FFFFFF"/>
                     </a:solidFill>
                   </a:tcPr>
                 </a:tc>
@@ -6538,88 +6698,55 @@
       </p:graphicFrame>
       <p:sp>
         <p:nvSpPr>
-          <p:cNvPr id="6" name="foot-box"/>
-          <p:cNvSpPr/>
-          <p:nvPr/>
-        </p:nvSpPr>
-        <p:spPr>
-          <a:xfrm>
-            <a:off x="548640" y="4114800"/>
-            <a:ext cx="8046720" cy="502920"/>
-          </a:xfrm>
-          <a:prstGeom prst="roundRect">
-            <a:avLst>
-              <a:gd name="adj" fmla="val 18182"/>
-            </a:avLst>
+          <p:cNvPr id="6" name="Text 3"/>
+          <p:cNvSpPr txBox="1"/>
+          <p:nvPr/>
+        </p:nvSpPr>
+        <p:spPr>
+          <a:xfrm rot="-60000">
+            <a:off x="502920" y="4114800"/>
+            <a:ext cx="8138160" cy="502920"/>
+          </a:xfrm>
+          <a:prstGeom prst="rect">
+            <a:avLst/>
           </a:prstGeom>
           <a:solidFill>
-            <a:schemeClr val="bg2"/>
+            <a:srgbClr val="DD6420"/>
           </a:solidFill>
-          <a:ln w="12700">
+          <a:ln w="19050">
             <a:solidFill>
-              <a:schemeClr val="bg2"/>
+              <a:srgbClr val="1A1A1A"/>
             </a:solidFill>
-            <a:prstDash val="solid"/>
           </a:ln>
-        </p:spPr>
-      </p:sp>
-      <p:pic>
-        <p:nvPicPr>
-          <p:cNvPr id="7" name="foot-icon" descr="preencoded.png">    </p:cNvPr>
-          <p:cNvPicPr>
-            <a:picLocks noChangeAspect="1"/>
-          </p:cNvPicPr>
-          <p:nvPr/>
-        </p:nvPicPr>
-        <p:blipFill>
-          <a:blip r:embed="rId1"/>
-          <a:stretch>
-            <a:fillRect/>
-          </a:stretch>
-        </p:blipFill>
-        <p:spPr>
-          <a:xfrm>
-            <a:off x="685800" y="4242816"/>
-            <a:ext cx="246888" cy="246888"/>
-          </a:xfrm>
-          <a:prstGeom prst="rect">
-            <a:avLst/>
-          </a:prstGeom>
-        </p:spPr>
-      </p:pic>
-      <p:sp>
-        <p:nvSpPr>
-          <p:cNvPr id="8" name="foot-text"/>
-          <p:cNvSpPr txBox="1"/>
-          <p:nvPr/>
-        </p:nvSpPr>
-        <p:spPr>
-          <a:xfrm>
-            <a:off x="1051560" y="4114800"/>
-            <a:ext cx="7406640" cy="502920"/>
-          </a:xfrm>
-          <a:prstGeom prst="rect">
-            <a:avLst/>
-          </a:prstGeom>
-          <a:noFill/>
-          <a:ln/>
+          <a:effectLst>
+            <a:outerShdw sx="100000" sy="100000" kx="0" ky="0" algn="bl" rotWithShape="0" blurRad="101600" dist="38100" dir="2700000">
+              <a:srgbClr val="1A1A1A">
+                <a:alpha val="100000"/>
+              </a:srgbClr>
+            </a:outerShdw>
+          </a:effectLst>
         </p:spPr>
         <p:txBody>
-          <a:bodyPr wrap="square" lIns="0" tIns="0" rIns="0" bIns="0" rtlCol="0" anchor="ctr"/>
+          <a:bodyPr wrap="square" lIns="0" tIns="1905" rIns="1905" bIns="0" rtlCol="0" anchor="ctr">
+            <a:normAutofit/>
+          </a:bodyPr>
           <a:lstStyle/>
           <a:p>
-            <a:pPr indent="0" marL="0">
+            <a:pPr algn="ctr" indent="0" marL="0">
               <a:buNone/>
             </a:pPr>
             <a:r>
-              <a:rPr lang="en-US" sz="1150" dirty="0">
+              <a:rPr lang="ja-JP" altLang="en-US" sz="1300" b="1" dirty="0">
                 <a:solidFill>
-                  <a:schemeClr val="tx1"/>
+                  <a:srgbClr val="FFFFFF"/>
                 </a:solidFill>
+                <a:latin typeface="Noto Sans JP" pitchFamily="34" charset="0"/>
+                <a:ea typeface="Noto Sans JP" pitchFamily="34" charset="-122"/>
+                <a:cs typeface="Noto Sans JP" pitchFamily="34" charset="-120"/>
               </a:rPr>
               <a:t>1ヶ月後に定着チェックで、使われ続けているかを確かめます</a:t>
             </a:r>
-            <a:endParaRPr lang="en-US" sz="1150" dirty="0"/>
+            <a:endParaRPr lang="ja-JP" sz="1300" dirty="0"/>
           </a:p>
         </p:txBody>
       </p:sp>
@@ -6635,8 +6762,8 @@
         </p:nvSpPr>
         <p:spPr>
           <a:xfrm>
-            <a:off x="8229600" y="4773168"/>
-            <a:ext cx="365760" cy="228600"/>
+            <a:off x="8366760" y="4754880"/>
+            <a:ext cx="365760" cy="274320"/>
           </a:xfrm>
           <a:prstGeom prst="rect">
             <a:avLst/>
@@ -6648,20 +6775,23 @@
           </a:extLst>
         </p:spPr>
         <p:txBody>
-          <a:bodyPr/>
+          <a:bodyPr anchor="ctr"/>
           <a:lstStyle>
             <a:lvl1pPr>
-              <a:defRPr sz="900">
+              <a:defRPr sz="850">
                 <a:solidFill>
-                  <a:srgbClr val="5A6872"/>
+                  <a:srgbClr val="FFFFFF"/>
                 </a:solidFill>
+                <a:latin typeface="Noto Sans JP"/>
+                <a:ea typeface="Noto Sans JP"/>
+                <a:cs typeface="Noto Sans JP"/>
               </a:defRPr>
             </a:lvl1pPr>
           </a:lstStyle>
           <a:p>
             <a:pPr algn="r"/>
             <a:fld id="{F7021451-1387-4CA6-816F-3879F97B5CBC}" type="slidenum">
-              <a:rPr b="0" lang="en-US"/>
+              <a:rPr b="1" lang="en-US"/>
               <a:t>5</a:t>
             </a:fld>
             <a:endParaRPr lang="en-US"/>
@@ -6696,122 +6826,167 @@
       <p:sp>
         <p:nvSpPr>
           <p:cNvPr id="2" name="Text 0"/>
-          <p:cNvSpPr/>
-          <p:nvPr>
-            <p:ph idx="100" type="title" hasCustomPrompt="1"/>
-          </p:nvPr>
-        </p:nvSpPr>
-        <p:spPr>
-          <a:xfrm>
-            <a:off x="548640" y="658368"/>
-            <a:ext cx="8046720" cy="566928"/>
-          </a:xfrm>
-          <a:prstGeom prst="rect">
-            <a:avLst/>
-          </a:prstGeom>
-          <a:noFill/>
-          <a:ln/>
+          <p:cNvSpPr txBox="1"/>
+          <p:nvPr/>
+        </p:nvSpPr>
+        <p:spPr>
+          <a:xfrm rot="-180000">
+            <a:off x="411480" y="201168"/>
+            <a:ext cx="894740" cy="352044"/>
+          </a:xfrm>
+          <a:prstGeom prst="rect">
+            <a:avLst/>
+          </a:prstGeom>
+          <a:solidFill>
+            <a:srgbClr val="1A1A1A"/>
+          </a:solidFill>
+          <a:ln>
+            <a:solidFill>
+              <a:srgbClr val="1A1A1A"/>
+            </a:solidFill>
+          </a:ln>
         </p:spPr>
         <p:txBody>
           <a:bodyPr wrap="square" lIns="0" tIns="0" rIns="0" bIns="0" rtlCol="0" anchor="ctr"/>
           <a:lstStyle/>
           <a:p>
-            <a:pPr algn="l" indent="0" marL="0">
+            <a:pPr algn="ctr" indent="0" marL="0">
               <a:buNone/>
             </a:pPr>
             <a:r>
-              <a:rPr lang="en-US" sz="2400" b="1" dirty="0">
+              <a:rPr lang="ja-JP" altLang="en-US" sz="1100" dirty="0">
                 <a:solidFill>
-                  <a:schemeClr val="tx1"/>
+                  <a:srgbClr val="FFFFFF"/>
                 </a:solidFill>
+                <a:latin typeface="Dela Gothic One" pitchFamily="34" charset="0"/>
+                <a:ea typeface="けいふぉんと" pitchFamily="34" charset="-122"/>
+                <a:cs typeface="Dela Gothic One" pitchFamily="34" charset="-120"/>
               </a:rPr>
-              <a:t>これからも「作る人」でいるために</a:t>
-            </a:r>
-            <a:endParaRPr lang="en-US" sz="2400" dirty="0"/>
+              <a:t>修了後</a:t>
+            </a:r>
+            <a:endParaRPr lang="ja-JP" sz="1100" dirty="0"/>
           </a:p>
         </p:txBody>
       </p:sp>
       <p:sp>
         <p:nvSpPr>
-          <p:cNvPr id="3" name="chip"/>
+          <p:cNvPr id="3" name="Text 1"/>
+          <p:cNvSpPr txBox="1"/>
+          <p:nvPr/>
+        </p:nvSpPr>
+        <p:spPr>
+          <a:xfrm>
+            <a:off x="411480" y="502920"/>
+            <a:ext cx="8321040" cy="685800"/>
+          </a:xfrm>
+          <a:prstGeom prst="rect">
+            <a:avLst/>
+          </a:prstGeom>
+          <a:noFill/>
+          <a:ln/>
+        </p:spPr>
+        <p:txBody>
+          <a:bodyPr wrap="square" lIns="0" tIns="0" rIns="0" bIns="0" rtlCol="0" anchor="ctr">
+            <a:normAutofit/>
+          </a:bodyPr>
+          <a:lstStyle/>
+          <a:p>
+            <a:pPr indent="0" marL="0">
+              <a:buNone/>
+            </a:pPr>
+            <a:r>
+              <a:rPr lang="ja-JP" altLang="en-US" sz="2600" dirty="0">
+                <a:solidFill>
+                  <a:srgbClr val="1A1A1A"/>
+                </a:solidFill>
+                <a:latin typeface="Dela Gothic One" pitchFamily="34" charset="0"/>
+                <a:ea typeface="けいふぉんと" pitchFamily="34" charset="-122"/>
+                <a:cs typeface="Dela Gothic One" pitchFamily="34" charset="-120"/>
+              </a:rPr>
+              <a:t>これからも</a:t>
+            </a:r>
+            <a:pPr indent="0" marL="0">
+              <a:buNone/>
+            </a:pPr>
+            <a:r>
+              <a:rPr lang="ja-JP" altLang="en-US" sz="2600" dirty="0">
+                <a:solidFill>
+                  <a:srgbClr val="DD6420"/>
+                </a:solidFill>
+                <a:latin typeface="Dela Gothic One" pitchFamily="34" charset="0"/>
+                <a:ea typeface="けいふぉんと" pitchFamily="34" charset="-122"/>
+                <a:cs typeface="Dela Gothic One" pitchFamily="34" charset="-120"/>
+              </a:rPr>
+              <a:t>「作る人」</a:t>
+            </a:r>
+            <a:pPr indent="0" marL="0">
+              <a:buNone/>
+            </a:pPr>
+            <a:r>
+              <a:rPr lang="ja-JP" altLang="en-US" sz="2600" dirty="0">
+                <a:solidFill>
+                  <a:srgbClr val="1A1A1A"/>
+                </a:solidFill>
+                <a:latin typeface="Dela Gothic One" pitchFamily="34" charset="0"/>
+                <a:ea typeface="けいふぉんと" pitchFamily="34" charset="-122"/>
+                <a:cs typeface="Dela Gothic One" pitchFamily="34" charset="-120"/>
+              </a:rPr>
+              <a:t>でいるために</a:t>
+            </a:r>
+            <a:endParaRPr lang="ja-JP" sz="2600" dirty="0"/>
+          </a:p>
+        </p:txBody>
+      </p:sp>
+      <p:sp>
+        <p:nvSpPr>
+          <p:cNvPr id="4" name="card"/>
           <p:cNvSpPr/>
           <p:nvPr/>
         </p:nvSpPr>
         <p:spPr>
           <a:xfrm>
-            <a:off x="548640" y="292608"/>
-            <a:ext cx="795528" cy="292608"/>
+            <a:off x="502920" y="1417320"/>
+            <a:ext cx="2542032" cy="2331720"/>
           </a:xfrm>
           <a:prstGeom prst="roundRect">
             <a:avLst>
-              <a:gd name="adj" fmla="val 50000"/>
+              <a:gd name="adj" fmla="val 3922"/>
             </a:avLst>
           </a:prstGeom>
           <a:solidFill>
-            <a:schemeClr val="tx1"/>
+            <a:srgbClr val="FFFFFF"/>
           </a:solidFill>
-          <a:ln w="12700">
+          <a:ln w="25400">
             <a:solidFill>
-              <a:schemeClr val="tx1"/>
+              <a:srgbClr val="1A1A1A"/>
             </a:solidFill>
             <a:prstDash val="solid"/>
           </a:ln>
-        </p:spPr>
-      </p:sp>
-      <p:sp>
-        <p:nvSpPr>
-          <p:cNvPr id="4" name="chip-text"/>
-          <p:cNvSpPr txBox="1"/>
-          <p:nvPr/>
-        </p:nvSpPr>
-        <p:spPr>
-          <a:xfrm>
-            <a:off x="548640" y="292608"/>
-            <a:ext cx="795528" cy="292608"/>
-          </a:xfrm>
-          <a:prstGeom prst="rect">
-            <a:avLst/>
-          </a:prstGeom>
-          <a:noFill/>
-          <a:ln/>
-        </p:spPr>
-        <p:txBody>
-          <a:bodyPr wrap="square" lIns="0" tIns="0" rIns="0" bIns="0" rtlCol="0" anchor="ctr"/>
-          <a:lstStyle/>
-          <a:p>
-            <a:pPr algn="ctr" indent="0" marL="0">
-              <a:buNone/>
-            </a:pPr>
-            <a:r>
-              <a:rPr lang="en-US" sz="1100" b="1" dirty="0">
-                <a:solidFill>
-                  <a:schemeClr val="accent1"/>
-                </a:solidFill>
-              </a:rPr>
-              <a:t>修了後</a:t>
-            </a:r>
-            <a:endParaRPr lang="en-US" sz="1100" dirty="0"/>
-          </a:p>
-        </p:txBody>
-      </p:sp>
-      <p:sp>
-        <p:nvSpPr>
-          <p:cNvPr id="5" name="card"/>
+          <a:effectLst>
+            <a:outerShdw sx="100000" sy="100000" kx="0" ky="0" algn="bl" rotWithShape="0" blurRad="101600" dist="50800" dir="2700000">
+              <a:srgbClr val="1A1A1A">
+                <a:alpha val="100000"/>
+              </a:srgbClr>
+            </a:outerShdw>
+          </a:effectLst>
+        </p:spPr>
+      </p:sp>
+      <p:sp>
+        <p:nvSpPr>
+          <p:cNvPr id="5" name="icon-circle"/>
           <p:cNvSpPr/>
           <p:nvPr/>
         </p:nvSpPr>
         <p:spPr>
           <a:xfrm>
-            <a:off x="548640" y="1463040"/>
-            <a:ext cx="2529840" cy="2286000"/>
-          </a:xfrm>
-          <a:prstGeom prst="roundRect">
-            <a:avLst>
-              <a:gd name="adj" fmla="val 4800"/>
-            </a:avLst>
+            <a:off x="704088" y="1618488"/>
+            <a:ext cx="548640" cy="548640"/>
+          </a:xfrm>
+          <a:prstGeom prst="ellipse">
+            <a:avLst/>
           </a:prstGeom>
           <a:solidFill>
-            <a:schemeClr val="bg1"/>
+            <a:srgbClr val="DD6420"/>
           </a:solidFill>
           <a:ln w="19050">
             <a:solidFill>
@@ -6819,43 +6994,11 @@
             </a:solidFill>
             <a:prstDash val="solid"/>
           </a:ln>
-          <a:effectLst>
-            <a:outerShdw sx="100000" sy="100000" kx="0" ky="0" algn="bl" rotWithShape="0" blurRad="101600" dist="38100" dir="2700000">
-              <a:srgbClr val="000000">
-                <a:alpha val="18000"/>
-              </a:srgbClr>
-            </a:outerShdw>
-          </a:effectLst>
-        </p:spPr>
-      </p:sp>
-      <p:sp>
-        <p:nvSpPr>
-          <p:cNvPr id="6" name="icon-circle"/>
-          <p:cNvSpPr/>
-          <p:nvPr/>
-        </p:nvSpPr>
-        <p:spPr>
-          <a:xfrm>
-            <a:off x="731520" y="1645920"/>
-            <a:ext cx="502920" cy="502920"/>
-          </a:xfrm>
-          <a:prstGeom prst="ellipse">
-            <a:avLst/>
-          </a:prstGeom>
-          <a:solidFill>
-            <a:schemeClr val="accent1"/>
-          </a:solidFill>
-          <a:ln w="15875">
-            <a:solidFill>
-              <a:srgbClr val="1A1A1A"/>
-            </a:solidFill>
-            <a:prstDash val="solid"/>
-          </a:ln>
         </p:spPr>
       </p:sp>
       <p:pic>
         <p:nvPicPr>
-          <p:cNvPr id="7" name="icon" descr="preencoded.png">    </p:cNvPr>
+          <p:cNvPr id="6" name="icon" descr="preencoded.png">    </p:cNvPr>
           <p:cNvPicPr>
             <a:picLocks noChangeAspect="1"/>
           </p:cNvPicPr>
@@ -6869,8 +7012,8 @@
         </p:blipFill>
         <p:spPr>
           <a:xfrm>
-            <a:off x="862279" y="1776679"/>
-            <a:ext cx="241402" cy="241402"/>
+            <a:off x="841248" y="1755648"/>
+            <a:ext cx="274320" cy="274320"/>
           </a:xfrm>
           <a:prstGeom prst="rect">
             <a:avLst/>
@@ -6879,14 +7022,14 @@
       </p:pic>
       <p:sp>
         <p:nvSpPr>
-          <p:cNvPr id="8" name="card-head"/>
+          <p:cNvPr id="7" name="Text 4"/>
           <p:cNvSpPr txBox="1"/>
           <p:nvPr/>
         </p:nvSpPr>
         <p:spPr>
           <a:xfrm>
-            <a:off x="731520" y="2286000"/>
-            <a:ext cx="2164080" cy="365760"/>
+            <a:off x="1371600" y="1618488"/>
+            <a:ext cx="1490472" cy="548640"/>
           </a:xfrm>
           <a:prstGeom prst="rect">
             <a:avLst/>
@@ -6895,34 +7038,39 @@
           <a:ln/>
         </p:spPr>
         <p:txBody>
-          <a:bodyPr wrap="square" lIns="0" tIns="0" rIns="0" bIns="0" rtlCol="0" anchor="ctr"/>
+          <a:bodyPr wrap="square" lIns="0" tIns="0" rIns="0" bIns="0" rtlCol="0" anchor="ctr">
+            <a:normAutofit/>
+          </a:bodyPr>
           <a:lstStyle/>
           <a:p>
             <a:pPr indent="0" marL="0">
               <a:buNone/>
             </a:pPr>
             <a:r>
-              <a:rPr lang="en-US" sz="1500" b="1" dirty="0">
+              <a:rPr lang="ja-JP" altLang="en-US" sz="1700" dirty="0">
                 <a:solidFill>
-                  <a:schemeClr val="tx1"/>
+                  <a:srgbClr val="1A1A1A"/>
                 </a:solidFill>
+                <a:latin typeface="Dela Gothic One" pitchFamily="34" charset="0"/>
+                <a:ea typeface="けいふぉんと" pitchFamily="34" charset="-122"/>
+                <a:cs typeface="Dela Gothic One" pitchFamily="34" charset="-120"/>
               </a:rPr>
               <a:t>1ヶ月後</a:t>
             </a:r>
-            <a:endParaRPr lang="en-US" sz="1500" dirty="0"/>
+            <a:endParaRPr lang="ja-JP" sz="1700" dirty="0"/>
           </a:p>
         </p:txBody>
       </p:sp>
       <p:sp>
         <p:nvSpPr>
-          <p:cNvPr id="9" name="card-body"/>
+          <p:cNvPr id="8" name="card-body"/>
           <p:cNvSpPr txBox="1"/>
           <p:nvPr/>
         </p:nvSpPr>
         <p:spPr>
           <a:xfrm>
-            <a:off x="731520" y="2697480"/>
-            <a:ext cx="2164080" cy="914400"/>
+            <a:off x="704088" y="2313432"/>
+            <a:ext cx="2139696" cy="1298448"/>
           </a:xfrm>
           <a:prstGeom prst="rect">
             <a:avLst/>
@@ -6931,7 +7079,9 @@
           <a:ln/>
         </p:spPr>
         <p:txBody>
-          <a:bodyPr wrap="square" lIns="0" tIns="0" rIns="0" bIns="0" rtlCol="0" anchor="t"/>
+          <a:bodyPr wrap="square" lIns="0" tIns="0" rIns="0" bIns="0" rtlCol="0" anchor="t">
+            <a:normAutofit/>
+          </a:bodyPr>
           <a:lstStyle/>
           <a:p>
             <a:pPr indent="0" marL="0">
@@ -6941,35 +7091,70 @@
               <a:buNone/>
             </a:pPr>
             <a:r>
-              <a:rPr lang="en-US" sz="1300" dirty="0">
+              <a:rPr lang="ja-JP" altLang="en-US" sz="1350" b="1" dirty="0">
                 <a:solidFill>
-                  <a:schemeClr val="tx1"/>
+                  <a:srgbClr val="1A1A1A"/>
                 </a:solidFill>
+                <a:latin typeface="Noto Sans JP" pitchFamily="34" charset="0"/>
+                <a:ea typeface="Noto Sans JP" pitchFamily="34" charset="-122"/>
+                <a:cs typeface="Noto Sans JP" pitchFamily="34" charset="-120"/>
               </a:rPr>
               <a:t>定着チェック表で、使われ続けているかを確認</a:t>
             </a:r>
-            <a:endParaRPr lang="en-US" sz="1300" dirty="0"/>
+            <a:endParaRPr lang="ja-JP" sz="1350" dirty="0"/>
           </a:p>
         </p:txBody>
       </p:sp>
       <p:sp>
         <p:nvSpPr>
-          <p:cNvPr id="10" name="card"/>
+          <p:cNvPr id="9" name="card"/>
           <p:cNvSpPr/>
           <p:nvPr/>
         </p:nvSpPr>
         <p:spPr>
           <a:xfrm>
-            <a:off x="3307080" y="1463040"/>
-            <a:ext cx="2529840" cy="2286000"/>
+            <a:off x="3300984" y="1417320"/>
+            <a:ext cx="2542032" cy="2331720"/>
           </a:xfrm>
           <a:prstGeom prst="roundRect">
             <a:avLst>
-              <a:gd name="adj" fmla="val 4800"/>
+              <a:gd name="adj" fmla="val 3922"/>
             </a:avLst>
           </a:prstGeom>
           <a:solidFill>
-            <a:schemeClr val="bg1"/>
+            <a:srgbClr val="FFFFFF"/>
+          </a:solidFill>
+          <a:ln w="25400">
+            <a:solidFill>
+              <a:srgbClr val="1A1A1A"/>
+            </a:solidFill>
+            <a:prstDash val="solid"/>
+          </a:ln>
+          <a:effectLst>
+            <a:outerShdw sx="100000" sy="100000" kx="0" ky="0" algn="bl" rotWithShape="0" blurRad="101600" dist="50800" dir="2700000">
+              <a:srgbClr val="1A1A1A">
+                <a:alpha val="100000"/>
+              </a:srgbClr>
+            </a:outerShdw>
+          </a:effectLst>
+        </p:spPr>
+      </p:sp>
+      <p:sp>
+        <p:nvSpPr>
+          <p:cNvPr id="10" name="icon-circle"/>
+          <p:cNvSpPr/>
+          <p:nvPr/>
+        </p:nvSpPr>
+        <p:spPr>
+          <a:xfrm>
+            <a:off x="3502152" y="1618488"/>
+            <a:ext cx="548640" cy="548640"/>
+          </a:xfrm>
+          <a:prstGeom prst="ellipse">
+            <a:avLst/>
+          </a:prstGeom>
+          <a:solidFill>
+            <a:srgbClr val="DD6420"/>
           </a:solidFill>
           <a:ln w="19050">
             <a:solidFill>
@@ -6977,43 +7162,11 @@
             </a:solidFill>
             <a:prstDash val="solid"/>
           </a:ln>
-          <a:effectLst>
-            <a:outerShdw sx="100000" sy="100000" kx="0" ky="0" algn="bl" rotWithShape="0" blurRad="101600" dist="38100" dir="2700000">
-              <a:srgbClr val="000000">
-                <a:alpha val="18000"/>
-              </a:srgbClr>
-            </a:outerShdw>
-          </a:effectLst>
-        </p:spPr>
-      </p:sp>
-      <p:sp>
-        <p:nvSpPr>
-          <p:cNvPr id="11" name="icon-circle"/>
-          <p:cNvSpPr/>
-          <p:nvPr/>
-        </p:nvSpPr>
-        <p:spPr>
-          <a:xfrm>
-            <a:off x="3489960" y="1645920"/>
-            <a:ext cx="502920" cy="502920"/>
-          </a:xfrm>
-          <a:prstGeom prst="ellipse">
-            <a:avLst/>
-          </a:prstGeom>
-          <a:solidFill>
-            <a:schemeClr val="accent1"/>
-          </a:solidFill>
-          <a:ln w="15875">
-            <a:solidFill>
-              <a:srgbClr val="1A1A1A"/>
-            </a:solidFill>
-            <a:prstDash val="solid"/>
-          </a:ln>
         </p:spPr>
       </p:sp>
       <p:pic>
         <p:nvPicPr>
-          <p:cNvPr id="12" name="icon" descr="preencoded.png">    </p:cNvPr>
+          <p:cNvPr id="11" name="icon" descr="preencoded.png">    </p:cNvPr>
           <p:cNvPicPr>
             <a:picLocks noChangeAspect="1"/>
           </p:cNvPicPr>
@@ -7027,8 +7180,8 @@
         </p:blipFill>
         <p:spPr>
           <a:xfrm>
-            <a:off x="3620719" y="1776679"/>
-            <a:ext cx="241402" cy="241402"/>
+            <a:off x="3639312" y="1755648"/>
+            <a:ext cx="274320" cy="274320"/>
           </a:xfrm>
           <a:prstGeom prst="rect">
             <a:avLst/>
@@ -7037,14 +7190,14 @@
       </p:pic>
       <p:sp>
         <p:nvSpPr>
-          <p:cNvPr id="13" name="card-head"/>
+          <p:cNvPr id="12" name="Text 8"/>
           <p:cNvSpPr txBox="1"/>
           <p:nvPr/>
         </p:nvSpPr>
         <p:spPr>
           <a:xfrm>
-            <a:off x="3489960" y="2286000"/>
-            <a:ext cx="2164080" cy="365760"/>
+            <a:off x="4169664" y="1618488"/>
+            <a:ext cx="1490472" cy="548640"/>
           </a:xfrm>
           <a:prstGeom prst="rect">
             <a:avLst/>
@@ -7053,34 +7206,39 @@
           <a:ln/>
         </p:spPr>
         <p:txBody>
-          <a:bodyPr wrap="square" lIns="0" tIns="0" rIns="0" bIns="0" rtlCol="0" anchor="ctr"/>
+          <a:bodyPr wrap="square" lIns="0" tIns="0" rIns="0" bIns="0" rtlCol="0" anchor="ctr">
+            <a:normAutofit/>
+          </a:bodyPr>
           <a:lstStyle/>
           <a:p>
             <a:pPr indent="0" marL="0">
               <a:buNone/>
             </a:pPr>
             <a:r>
-              <a:rPr lang="en-US" sz="1500" b="1" dirty="0">
+              <a:rPr lang="ja-JP" altLang="en-US" sz="1500" dirty="0">
                 <a:solidFill>
-                  <a:schemeClr val="tx1"/>
+                  <a:srgbClr val="1A1A1A"/>
                 </a:solidFill>
+                <a:latin typeface="Dela Gothic One" pitchFamily="34" charset="0"/>
+                <a:ea typeface="けいふぉんと" pitchFamily="34" charset="-122"/>
+                <a:cs typeface="Dela Gothic One" pitchFamily="34" charset="-120"/>
               </a:rPr>
               <a:t>改善を続ける</a:t>
             </a:r>
-            <a:endParaRPr lang="en-US" sz="1500" dirty="0"/>
+            <a:endParaRPr lang="ja-JP" sz="1500" dirty="0"/>
           </a:p>
         </p:txBody>
       </p:sp>
       <p:sp>
         <p:nvSpPr>
-          <p:cNvPr id="14" name="card-body"/>
+          <p:cNvPr id="13" name="card-body"/>
           <p:cNvSpPr txBox="1"/>
           <p:nvPr/>
         </p:nvSpPr>
         <p:spPr>
           <a:xfrm>
-            <a:off x="3489960" y="2697480"/>
-            <a:ext cx="2164080" cy="914400"/>
+            <a:off x="3502152" y="2313432"/>
+            <a:ext cx="2139696" cy="1298448"/>
           </a:xfrm>
           <a:prstGeom prst="rect">
             <a:avLst/>
@@ -7089,7 +7247,9 @@
           <a:ln/>
         </p:spPr>
         <p:txBody>
-          <a:bodyPr wrap="square" lIns="0" tIns="0" rIns="0" bIns="0" rtlCol="0" anchor="t"/>
+          <a:bodyPr wrap="square" lIns="0" tIns="0" rIns="0" bIns="0" rtlCol="0" anchor="t">
+            <a:normAutofit/>
+          </a:bodyPr>
           <a:lstStyle/>
           <a:p>
             <a:pPr indent="0" marL="0">
@@ -7099,35 +7259,70 @@
               <a:buNone/>
             </a:pPr>
             <a:r>
-              <a:rPr lang="en-US" sz="1300" dirty="0">
+              <a:rPr lang="ja-JP" altLang="en-US" sz="1350" b="1" dirty="0">
                 <a:solidFill>
-                  <a:schemeClr val="tx1"/>
+                  <a:srgbClr val="1A1A1A"/>
                 </a:solidFill>
+                <a:latin typeface="Noto Sans JP" pitchFamily="34" charset="0"/>
+                <a:ea typeface="Noto Sans JP" pitchFamily="34" charset="-122"/>
+                <a:cs typeface="Noto Sans JP" pitchFamily="34" charset="-120"/>
               </a:rPr>
               <a:t>要望はBASEに集め、月1回直す</a:t>
             </a:r>
-            <a:endParaRPr lang="en-US" sz="1300" dirty="0"/>
+            <a:endParaRPr lang="ja-JP" sz="1350" dirty="0"/>
           </a:p>
         </p:txBody>
       </p:sp>
       <p:sp>
         <p:nvSpPr>
-          <p:cNvPr id="15" name="card"/>
+          <p:cNvPr id="14" name="card"/>
           <p:cNvSpPr/>
           <p:nvPr/>
         </p:nvSpPr>
         <p:spPr>
           <a:xfrm>
-            <a:off x="6065520" y="1463040"/>
-            <a:ext cx="2529840" cy="2286000"/>
+            <a:off x="6099048" y="1417320"/>
+            <a:ext cx="2542032" cy="2331720"/>
           </a:xfrm>
           <a:prstGeom prst="roundRect">
             <a:avLst>
-              <a:gd name="adj" fmla="val 4800"/>
+              <a:gd name="adj" fmla="val 3922"/>
             </a:avLst>
           </a:prstGeom>
           <a:solidFill>
-            <a:schemeClr val="bg1"/>
+            <a:srgbClr val="FFFFFF"/>
+          </a:solidFill>
+          <a:ln w="25400">
+            <a:solidFill>
+              <a:srgbClr val="1A1A1A"/>
+            </a:solidFill>
+            <a:prstDash val="solid"/>
+          </a:ln>
+          <a:effectLst>
+            <a:outerShdw sx="100000" sy="100000" kx="0" ky="0" algn="bl" rotWithShape="0" blurRad="101600" dist="50800" dir="2700000">
+              <a:srgbClr val="1A1A1A">
+                <a:alpha val="100000"/>
+              </a:srgbClr>
+            </a:outerShdw>
+          </a:effectLst>
+        </p:spPr>
+      </p:sp>
+      <p:sp>
+        <p:nvSpPr>
+          <p:cNvPr id="15" name="icon-circle"/>
+          <p:cNvSpPr/>
+          <p:nvPr/>
+        </p:nvSpPr>
+        <p:spPr>
+          <a:xfrm>
+            <a:off x="6300216" y="1618488"/>
+            <a:ext cx="548640" cy="548640"/>
+          </a:xfrm>
+          <a:prstGeom prst="ellipse">
+            <a:avLst/>
+          </a:prstGeom>
+          <a:solidFill>
+            <a:srgbClr val="DD6420"/>
           </a:solidFill>
           <a:ln w="19050">
             <a:solidFill>
@@ -7135,43 +7330,11 @@
             </a:solidFill>
             <a:prstDash val="solid"/>
           </a:ln>
-          <a:effectLst>
-            <a:outerShdw sx="100000" sy="100000" kx="0" ky="0" algn="bl" rotWithShape="0" blurRad="101600" dist="38100" dir="2700000">
-              <a:srgbClr val="000000">
-                <a:alpha val="18000"/>
-              </a:srgbClr>
-            </a:outerShdw>
-          </a:effectLst>
-        </p:spPr>
-      </p:sp>
-      <p:sp>
-        <p:nvSpPr>
-          <p:cNvPr id="16" name="icon-circle"/>
-          <p:cNvSpPr/>
-          <p:nvPr/>
-        </p:nvSpPr>
-        <p:spPr>
-          <a:xfrm>
-            <a:off x="6248400" y="1645920"/>
-            <a:ext cx="502920" cy="502920"/>
-          </a:xfrm>
-          <a:prstGeom prst="ellipse">
-            <a:avLst/>
-          </a:prstGeom>
-          <a:solidFill>
-            <a:schemeClr val="accent1"/>
-          </a:solidFill>
-          <a:ln w="15875">
-            <a:solidFill>
-              <a:srgbClr val="1A1A1A"/>
-            </a:solidFill>
-            <a:prstDash val="solid"/>
-          </a:ln>
         </p:spPr>
       </p:sp>
       <p:pic>
         <p:nvPicPr>
-          <p:cNvPr id="17" name="icon" descr="preencoded.png">    </p:cNvPr>
+          <p:cNvPr id="16" name="icon" descr="preencoded.png">    </p:cNvPr>
           <p:cNvPicPr>
             <a:picLocks noChangeAspect="1"/>
           </p:cNvPicPr>
@@ -7185,8 +7348,8 @@
         </p:blipFill>
         <p:spPr>
           <a:xfrm>
-            <a:off x="6379159" y="1776679"/>
-            <a:ext cx="241402" cy="241402"/>
+            <a:off x="6437376" y="1755648"/>
+            <a:ext cx="274320" cy="274320"/>
           </a:xfrm>
           <a:prstGeom prst="rect">
             <a:avLst/>
@@ -7195,14 +7358,14 @@
       </p:pic>
       <p:sp>
         <p:nvSpPr>
-          <p:cNvPr id="18" name="card-head"/>
+          <p:cNvPr id="17" name="Text 12"/>
           <p:cNvSpPr txBox="1"/>
           <p:nvPr/>
         </p:nvSpPr>
         <p:spPr>
           <a:xfrm>
-            <a:off x="6248400" y="2286000"/>
-            <a:ext cx="2164080" cy="365760"/>
+            <a:off x="6967728" y="1618488"/>
+            <a:ext cx="1490472" cy="548640"/>
           </a:xfrm>
           <a:prstGeom prst="rect">
             <a:avLst/>
@@ -7211,34 +7374,39 @@
           <a:ln/>
         </p:spPr>
         <p:txBody>
-          <a:bodyPr wrap="square" lIns="0" tIns="0" rIns="0" bIns="0" rtlCol="0" anchor="ctr"/>
+          <a:bodyPr wrap="square" lIns="0" tIns="0" rIns="0" bIns="0" rtlCol="0" anchor="ctr">
+            <a:normAutofit/>
+          </a:bodyPr>
           <a:lstStyle/>
           <a:p>
             <a:pPr indent="0" marL="0">
               <a:buNone/>
             </a:pPr>
             <a:r>
-              <a:rPr lang="en-US" sz="1500" b="1" dirty="0">
+              <a:rPr lang="ja-JP" altLang="en-US" sz="1700" dirty="0">
                 <a:solidFill>
-                  <a:schemeClr val="tx1"/>
+                  <a:srgbClr val="1A1A1A"/>
                 </a:solidFill>
+                <a:latin typeface="Dela Gothic One" pitchFamily="34" charset="0"/>
+                <a:ea typeface="けいふぉんと" pitchFamily="34" charset="-122"/>
+                <a:cs typeface="Dela Gothic One" pitchFamily="34" charset="-120"/>
               </a:rPr>
               <a:t>マカセル</a:t>
             </a:r>
-            <a:endParaRPr lang="en-US" sz="1500" dirty="0"/>
+            <a:endParaRPr lang="ja-JP" sz="1700" dirty="0"/>
           </a:p>
         </p:txBody>
       </p:sp>
       <p:sp>
         <p:nvSpPr>
-          <p:cNvPr id="19" name="card-body"/>
+          <p:cNvPr id="18" name="card-body"/>
           <p:cNvSpPr txBox="1"/>
           <p:nvPr/>
         </p:nvSpPr>
         <p:spPr>
           <a:xfrm>
-            <a:off x="6248400" y="2697480"/>
-            <a:ext cx="2164080" cy="914400"/>
+            <a:off x="6300216" y="2313432"/>
+            <a:ext cx="2139696" cy="1298448"/>
           </a:xfrm>
           <a:prstGeom prst="rect">
             <a:avLst/>
@@ -7247,7 +7415,9 @@
           <a:ln/>
         </p:spPr>
         <p:txBody>
-          <a:bodyPr wrap="square" lIns="0" tIns="0" rIns="0" bIns="0" rtlCol="0" anchor="t"/>
+          <a:bodyPr wrap="square" lIns="0" tIns="0" rIns="0" bIns="0" rtlCol="0" anchor="t">
+            <a:normAutofit/>
+          </a:bodyPr>
           <a:lstStyle/>
           <a:p>
             <a:pPr indent="0" marL="0">
@@ -7257,14 +7427,17 @@
               <a:buNone/>
             </a:pPr>
             <a:r>
-              <a:rPr lang="en-US" sz="1300" dirty="0">
+              <a:rPr lang="ja-JP" altLang="en-US" sz="1350" b="1" dirty="0">
                 <a:solidFill>
-                  <a:schemeClr val="tx1"/>
+                  <a:srgbClr val="1A1A1A"/>
                 </a:solidFill>
+                <a:latin typeface="Noto Sans JP" pitchFamily="34" charset="0"/>
+                <a:ea typeface="Noto Sans JP" pitchFamily="34" charset="-122"/>
+                <a:cs typeface="Noto Sans JP" pitchFamily="34" charset="-120"/>
               </a:rPr>
               <a:t>作ったしくみをマンツーマンで育てる伴走もご案内しています</a:t>
             </a:r>
-            <a:endParaRPr lang="en-US" sz="1300" dirty="0"/>
+            <a:endParaRPr lang="ja-JP" sz="1350" dirty="0"/>
           </a:p>
         </p:txBody>
       </p:sp>
@@ -7280,8 +7453,8 @@
         </p:nvSpPr>
         <p:spPr>
           <a:xfrm>
-            <a:off x="8229600" y="4773168"/>
-            <a:ext cx="365760" cy="228600"/>
+            <a:off x="8366760" y="4754880"/>
+            <a:ext cx="365760" cy="274320"/>
           </a:xfrm>
           <a:prstGeom prst="rect">
             <a:avLst/>
@@ -7293,20 +7466,23 @@
           </a:extLst>
         </p:spPr>
         <p:txBody>
-          <a:bodyPr/>
+          <a:bodyPr anchor="ctr"/>
           <a:lstStyle>
             <a:lvl1pPr>
-              <a:defRPr sz="900">
+              <a:defRPr sz="850">
                 <a:solidFill>
-                  <a:srgbClr val="5A6872"/>
+                  <a:srgbClr val="FFFFFF"/>
                 </a:solidFill>
+                <a:latin typeface="Noto Sans JP"/>
+                <a:ea typeface="Noto Sans JP"/>
+                <a:cs typeface="Noto Sans JP"/>
               </a:defRPr>
             </a:lvl1pPr>
           </a:lstStyle>
           <a:p>
             <a:pPr algn="r"/>
             <a:fld id="{F7021451-1387-4CA6-816F-3879F97B5CBC}" type="slidenum">
-              <a:rPr b="0" lang="en-US"/>
+              <a:rPr b="1" lang="en-US"/>
               <a:t>6</a:t>
             </a:fld>
             <a:endParaRPr lang="en-US"/>
@@ -7341,122 +7517,139 @@
       <p:sp>
         <p:nvSpPr>
           <p:cNvPr id="2" name="Text 0"/>
-          <p:cNvSpPr/>
-          <p:nvPr>
-            <p:ph idx="100" type="title" hasCustomPrompt="1"/>
-          </p:nvPr>
-        </p:nvSpPr>
-        <p:spPr>
-          <a:xfrm>
-            <a:off x="548640" y="658368"/>
-            <a:ext cx="8046720" cy="566928"/>
-          </a:xfrm>
-          <a:prstGeom prst="rect">
-            <a:avLst/>
-          </a:prstGeom>
-          <a:noFill/>
-          <a:ln/>
+          <p:cNvSpPr txBox="1"/>
+          <p:nvPr/>
+        </p:nvSpPr>
+        <p:spPr>
+          <a:xfrm rot="-180000">
+            <a:off x="411480" y="201168"/>
+            <a:ext cx="894740" cy="352044"/>
+          </a:xfrm>
+          <a:prstGeom prst="rect">
+            <a:avLst/>
+          </a:prstGeom>
+          <a:solidFill>
+            <a:srgbClr val="1A1A1A"/>
+          </a:solidFill>
+          <a:ln>
+            <a:solidFill>
+              <a:srgbClr val="1A1A1A"/>
+            </a:solidFill>
+          </a:ln>
         </p:spPr>
         <p:txBody>
           <a:bodyPr wrap="square" lIns="0" tIns="0" rIns="0" bIns="0" rtlCol="0" anchor="ctr"/>
           <a:lstStyle/>
           <a:p>
-            <a:pPr algn="l" indent="0" marL="0">
+            <a:pPr algn="ctr" indent="0" marL="0">
               <a:buNone/>
             </a:pPr>
             <a:r>
-              <a:rPr lang="en-US" sz="2400" b="1" dirty="0">
+              <a:rPr lang="ja-JP" altLang="en-US" sz="1100" dirty="0">
                 <a:solidFill>
-                  <a:schemeClr val="tx1"/>
+                  <a:srgbClr val="FFFFFF"/>
                 </a:solidFill>
+                <a:latin typeface="Dela Gothic One" pitchFamily="34" charset="0"/>
+                <a:ea typeface="けいふぉんと" pitchFamily="34" charset="-122"/>
+                <a:cs typeface="Dela Gothic One" pitchFamily="34" charset="-120"/>
+              </a:rPr>
+              <a:t>まとめ</a:t>
+            </a:r>
+            <a:endParaRPr lang="ja-JP" sz="1100" dirty="0"/>
+          </a:p>
+        </p:txBody>
+      </p:sp>
+      <p:sp>
+        <p:nvSpPr>
+          <p:cNvPr id="3" name="Text 1"/>
+          <p:cNvSpPr txBox="1"/>
+          <p:nvPr/>
+        </p:nvSpPr>
+        <p:spPr>
+          <a:xfrm>
+            <a:off x="411480" y="502920"/>
+            <a:ext cx="8321040" cy="685800"/>
+          </a:xfrm>
+          <a:prstGeom prst="rect">
+            <a:avLst/>
+          </a:prstGeom>
+          <a:noFill/>
+          <a:ln/>
+        </p:spPr>
+        <p:txBody>
+          <a:bodyPr wrap="square" lIns="0" tIns="0" rIns="0" bIns="0" rtlCol="0" anchor="ctr">
+            <a:normAutofit/>
+          </a:bodyPr>
+          <a:lstStyle/>
+          <a:p>
+            <a:pPr indent="0" marL="0">
+              <a:buNone/>
+            </a:pPr>
+            <a:r>
+              <a:rPr lang="ja-JP" altLang="en-US" sz="2600" dirty="0">
+                <a:solidFill>
+                  <a:srgbClr val="1A1A1A"/>
+                </a:solidFill>
+                <a:latin typeface="Dela Gothic One" pitchFamily="34" charset="0"/>
+                <a:ea typeface="けいふぉんと" pitchFamily="34" charset="-122"/>
+                <a:cs typeface="Dela Gothic One" pitchFamily="34" charset="-120"/>
               </a:rPr>
               <a:t>宿題と、今日のチェック</a:t>
             </a:r>
-            <a:endParaRPr lang="en-US" sz="2400" dirty="0"/>
+            <a:endParaRPr lang="ja-JP" sz="2600" dirty="0"/>
           </a:p>
         </p:txBody>
       </p:sp>
       <p:sp>
         <p:nvSpPr>
-          <p:cNvPr id="3" name="chip"/>
+          <p:cNvPr id="4" name="card"/>
           <p:cNvSpPr/>
           <p:nvPr/>
         </p:nvSpPr>
         <p:spPr>
           <a:xfrm>
-            <a:off x="548640" y="292608"/>
-            <a:ext cx="795528" cy="292608"/>
+            <a:off x="502920" y="1417320"/>
+            <a:ext cx="3931920" cy="3108960"/>
           </a:xfrm>
           <a:prstGeom prst="roundRect">
             <a:avLst>
-              <a:gd name="adj" fmla="val 50000"/>
+              <a:gd name="adj" fmla="val 2941"/>
             </a:avLst>
           </a:prstGeom>
           <a:solidFill>
-            <a:schemeClr val="tx1"/>
+            <a:srgbClr val="FFFFFF"/>
           </a:solidFill>
-          <a:ln w="12700">
+          <a:ln w="25400">
             <a:solidFill>
-              <a:schemeClr val="tx1"/>
+              <a:srgbClr val="1A1A1A"/>
             </a:solidFill>
             <a:prstDash val="solid"/>
           </a:ln>
-        </p:spPr>
-      </p:sp>
-      <p:sp>
-        <p:nvSpPr>
-          <p:cNvPr id="4" name="chip-text"/>
-          <p:cNvSpPr txBox="1"/>
-          <p:nvPr/>
-        </p:nvSpPr>
-        <p:spPr>
-          <a:xfrm>
-            <a:off x="548640" y="292608"/>
-            <a:ext cx="795528" cy="292608"/>
-          </a:xfrm>
-          <a:prstGeom prst="rect">
-            <a:avLst/>
-          </a:prstGeom>
-          <a:noFill/>
-          <a:ln/>
-        </p:spPr>
-        <p:txBody>
-          <a:bodyPr wrap="square" lIns="0" tIns="0" rIns="0" bIns="0" rtlCol="0" anchor="ctr"/>
-          <a:lstStyle/>
-          <a:p>
-            <a:pPr algn="ctr" indent="0" marL="0">
-              <a:buNone/>
-            </a:pPr>
-            <a:r>
-              <a:rPr lang="en-US" sz="1100" b="1" dirty="0">
-                <a:solidFill>
-                  <a:schemeClr val="accent1"/>
-                </a:solidFill>
-              </a:rPr>
-              <a:t>まとめ</a:t>
-            </a:r>
-            <a:endParaRPr lang="en-US" sz="1100" dirty="0"/>
-          </a:p>
-        </p:txBody>
-      </p:sp>
-      <p:sp>
-        <p:nvSpPr>
-          <p:cNvPr id="5" name="card"/>
+          <a:effectLst>
+            <a:outerShdw sx="100000" sy="100000" kx="0" ky="0" algn="bl" rotWithShape="0" blurRad="101600" dist="50800" dir="2700000">
+              <a:srgbClr val="1A1A1A">
+                <a:alpha val="100000"/>
+              </a:srgbClr>
+            </a:outerShdw>
+          </a:effectLst>
+        </p:spPr>
+      </p:sp>
+      <p:sp>
+        <p:nvSpPr>
+          <p:cNvPr id="5" name="icon-circle"/>
           <p:cNvSpPr/>
           <p:nvPr/>
         </p:nvSpPr>
         <p:spPr>
           <a:xfrm>
-            <a:off x="548640" y="1463040"/>
-            <a:ext cx="3886200" cy="3017520"/>
-          </a:xfrm>
-          <a:prstGeom prst="roundRect">
-            <a:avLst>
-              <a:gd name="adj" fmla="val 3636"/>
-            </a:avLst>
+            <a:off x="704088" y="1600200"/>
+            <a:ext cx="457200" cy="457200"/>
+          </a:xfrm>
+          <a:prstGeom prst="ellipse">
+            <a:avLst/>
           </a:prstGeom>
           <a:solidFill>
-            <a:schemeClr val="bg2"/>
+            <a:srgbClr val="DD6420"/>
           </a:solidFill>
           <a:ln w="19050">
             <a:solidFill>
@@ -7464,43 +7657,11 @@
             </a:solidFill>
             <a:prstDash val="solid"/>
           </a:ln>
-          <a:effectLst>
-            <a:outerShdw sx="100000" sy="100000" kx="0" ky="0" algn="bl" rotWithShape="0" blurRad="101600" dist="38100" dir="2700000">
-              <a:srgbClr val="000000">
-                <a:alpha val="18000"/>
-              </a:srgbClr>
-            </a:outerShdw>
-          </a:effectLst>
-        </p:spPr>
-      </p:sp>
-      <p:sp>
-        <p:nvSpPr>
-          <p:cNvPr id="6" name="icon-circle"/>
-          <p:cNvSpPr/>
-          <p:nvPr/>
-        </p:nvSpPr>
-        <p:spPr>
-          <a:xfrm>
-            <a:off x="777240" y="1645920"/>
-            <a:ext cx="457200" cy="457200"/>
-          </a:xfrm>
-          <a:prstGeom prst="ellipse">
-            <a:avLst/>
-          </a:prstGeom>
-          <a:solidFill>
-            <a:schemeClr val="accent1"/>
-          </a:solidFill>
-          <a:ln w="15875">
-            <a:solidFill>
-              <a:srgbClr val="1A1A1A"/>
-            </a:solidFill>
-            <a:prstDash val="solid"/>
-          </a:ln>
         </p:spPr>
       </p:sp>
       <p:pic>
         <p:nvPicPr>
-          <p:cNvPr id="7" name="icon" descr="preencoded.png">    </p:cNvPr>
+          <p:cNvPr id="6" name="icon" descr="preencoded.png">    </p:cNvPr>
           <p:cNvPicPr>
             <a:picLocks noChangeAspect="1"/>
           </p:cNvPicPr>
@@ -7514,8 +7675,8 @@
         </p:blipFill>
         <p:spPr>
           <a:xfrm>
-            <a:off x="896112" y="1764792"/>
-            <a:ext cx="219456" cy="219456"/>
+            <a:off x="818388" y="1714500"/>
+            <a:ext cx="228600" cy="228600"/>
           </a:xfrm>
           <a:prstGeom prst="rect">
             <a:avLst/>
@@ -7524,13 +7685,13 @@
       </p:pic>
       <p:sp>
         <p:nvSpPr>
-          <p:cNvPr id="8" name="Text 5"/>
+          <p:cNvPr id="7" name="Text 4"/>
           <p:cNvSpPr txBox="1"/>
           <p:nvPr/>
         </p:nvSpPr>
         <p:spPr>
           <a:xfrm>
-            <a:off x="1371600" y="1645920"/>
+            <a:off x="1280160" y="1600200"/>
             <a:ext cx="2743200" cy="457200"/>
           </a:xfrm>
           <a:prstGeom prst="rect">
@@ -7547,27 +7708,30 @@
               <a:buNone/>
             </a:pPr>
             <a:r>
-              <a:rPr lang="en-US" sz="1700" b="1" dirty="0">
+              <a:rPr lang="ja-JP" altLang="en-US" sz="1800" dirty="0">
                 <a:solidFill>
-                  <a:schemeClr val="tx1"/>
+                  <a:srgbClr val="1A1A1A"/>
                 </a:solidFill>
+                <a:latin typeface="Dela Gothic One" pitchFamily="34" charset="0"/>
+                <a:ea typeface="けいふぉんと" pitchFamily="34" charset="-122"/>
+                <a:cs typeface="Dela Gothic One" pitchFamily="34" charset="-120"/>
               </a:rPr>
               <a:t>宿題</a:t>
             </a:r>
-            <a:endParaRPr lang="en-US" sz="1700" dirty="0"/>
+            <a:endParaRPr lang="ja-JP" sz="1800" dirty="0"/>
           </a:p>
         </p:txBody>
       </p:sp>
       <p:sp>
         <p:nvSpPr>
-          <p:cNvPr id="9" name="Text 6"/>
+          <p:cNvPr id="8" name="Text 5"/>
           <p:cNvSpPr txBox="1"/>
           <p:nvPr/>
         </p:nvSpPr>
         <p:spPr>
           <a:xfrm>
-            <a:off x="777240" y="2286000"/>
-            <a:ext cx="3474720" cy="2057400"/>
+            <a:off x="731520" y="2240280"/>
+            <a:ext cx="3474720" cy="2148840"/>
           </a:xfrm>
           <a:prstGeom prst="rect">
             <a:avLst/>
@@ -7576,7 +7740,9 @@
           <a:ln/>
         </p:spPr>
         <p:txBody>
-          <a:bodyPr wrap="square" lIns="0" tIns="0" rIns="0" bIns="0" rtlCol="0" anchor="t"/>
+          <a:bodyPr wrap="square" lIns="0" tIns="0" rIns="0" bIns="0" rtlCol="0" anchor="t">
+            <a:normAutofit/>
+          </a:bodyPr>
           <a:lstStyle/>
           <a:p>
             <a:pPr marL="342900" indent="-342900">
@@ -7584,38 +7750,73 @@
                 <a:spcPts val="800"/>
               </a:spcAft>
               <a:buSzPct val="100000"/>
-              <a:buChar char="•"/>
+              <a:buChar char="●"/>
             </a:pPr>
             <a:r>
-              <a:rPr lang="en-US" sz="1350" dirty="0">
+              <a:rPr lang="ja-JP" altLang="en-US" sz="1350" b="1" dirty="0">
                 <a:solidFill>
-                  <a:schemeClr val="tx1"/>
+                  <a:srgbClr val="1A1A1A"/>
                 </a:solidFill>
+                <a:latin typeface="Noto Sans JP" pitchFamily="34" charset="0"/>
+                <a:ea typeface="Noto Sans JP" pitchFamily="34" charset="-122"/>
+                <a:cs typeface="Noto Sans JP" pitchFamily="34" charset="-120"/>
               </a:rPr>
               <a:t>1ヶ月後に定着チェック表をつける</a:t>
             </a:r>
-            <a:endParaRPr lang="en-US" sz="1350" dirty="0"/>
+            <a:endParaRPr lang="ja-JP" sz="1350" dirty="0"/>
           </a:p>
         </p:txBody>
       </p:sp>
       <p:sp>
         <p:nvSpPr>
-          <p:cNvPr id="10" name="card"/>
+          <p:cNvPr id="9" name="card"/>
           <p:cNvSpPr/>
           <p:nvPr/>
         </p:nvSpPr>
         <p:spPr>
           <a:xfrm>
-            <a:off x="4709160" y="1463040"/>
-            <a:ext cx="3886200" cy="3017520"/>
+            <a:off x="4709160" y="1417320"/>
+            <a:ext cx="3931920" cy="3108960"/>
           </a:xfrm>
           <a:prstGeom prst="roundRect">
             <a:avLst>
-              <a:gd name="adj" fmla="val 3636"/>
+              <a:gd name="adj" fmla="val 2941"/>
             </a:avLst>
           </a:prstGeom>
           <a:solidFill>
-            <a:schemeClr val="bg1"/>
+            <a:srgbClr val="FFFFFF"/>
+          </a:solidFill>
+          <a:ln w="25400">
+            <a:solidFill>
+              <a:srgbClr val="1A1A1A"/>
+            </a:solidFill>
+            <a:prstDash val="solid"/>
+          </a:ln>
+          <a:effectLst>
+            <a:outerShdw sx="100000" sy="100000" kx="0" ky="0" algn="bl" rotWithShape="0" blurRad="101600" dist="50800" dir="2700000">
+              <a:srgbClr val="1A1A1A">
+                <a:alpha val="100000"/>
+              </a:srgbClr>
+            </a:outerShdw>
+          </a:effectLst>
+        </p:spPr>
+      </p:sp>
+      <p:sp>
+        <p:nvSpPr>
+          <p:cNvPr id="10" name="icon-circle"/>
+          <p:cNvSpPr/>
+          <p:nvPr/>
+        </p:nvSpPr>
+        <p:spPr>
+          <a:xfrm>
+            <a:off x="4910328" y="1600200"/>
+            <a:ext cx="457200" cy="457200"/>
+          </a:xfrm>
+          <a:prstGeom prst="ellipse">
+            <a:avLst/>
+          </a:prstGeom>
+          <a:solidFill>
+            <a:srgbClr val="DD6420"/>
           </a:solidFill>
           <a:ln w="19050">
             <a:solidFill>
@@ -7623,43 +7824,11 @@
             </a:solidFill>
             <a:prstDash val="solid"/>
           </a:ln>
-          <a:effectLst>
-            <a:outerShdw sx="100000" sy="100000" kx="0" ky="0" algn="bl" rotWithShape="0" blurRad="101600" dist="38100" dir="2700000">
-              <a:srgbClr val="000000">
-                <a:alpha val="18000"/>
-              </a:srgbClr>
-            </a:outerShdw>
-          </a:effectLst>
-        </p:spPr>
-      </p:sp>
-      <p:sp>
-        <p:nvSpPr>
-          <p:cNvPr id="11" name="icon-circle"/>
-          <p:cNvSpPr/>
-          <p:nvPr/>
-        </p:nvSpPr>
-        <p:spPr>
-          <a:xfrm>
-            <a:off x="4937760" y="1645920"/>
-            <a:ext cx="457200" cy="457200"/>
-          </a:xfrm>
-          <a:prstGeom prst="ellipse">
-            <a:avLst/>
-          </a:prstGeom>
-          <a:solidFill>
-            <a:schemeClr val="accent1"/>
-          </a:solidFill>
-          <a:ln w="15875">
-            <a:solidFill>
-              <a:srgbClr val="1A1A1A"/>
-            </a:solidFill>
-            <a:prstDash val="solid"/>
-          </a:ln>
         </p:spPr>
       </p:sp>
       <p:pic>
         <p:nvPicPr>
-          <p:cNvPr id="12" name="icon" descr="preencoded.png">    </p:cNvPr>
+          <p:cNvPr id="11" name="icon" descr="preencoded.png">    </p:cNvPr>
           <p:cNvPicPr>
             <a:picLocks noChangeAspect="1"/>
           </p:cNvPicPr>
@@ -7673,8 +7842,8 @@
         </p:blipFill>
         <p:spPr>
           <a:xfrm>
-            <a:off x="5056632" y="1764792"/>
-            <a:ext cx="219456" cy="219456"/>
+            <a:off x="5024628" y="1714500"/>
+            <a:ext cx="228600" cy="228600"/>
           </a:xfrm>
           <a:prstGeom prst="rect">
             <a:avLst/>
@@ -7683,13 +7852,13 @@
       </p:pic>
       <p:sp>
         <p:nvSpPr>
-          <p:cNvPr id="13" name="Text 9"/>
+          <p:cNvPr id="12" name="Text 8"/>
           <p:cNvSpPr txBox="1"/>
           <p:nvPr/>
         </p:nvSpPr>
         <p:spPr>
           <a:xfrm>
-            <a:off x="5532120" y="1645920"/>
+            <a:off x="5486400" y="1600200"/>
             <a:ext cx="2743200" cy="457200"/>
           </a:xfrm>
           <a:prstGeom prst="rect">
@@ -7706,27 +7875,30 @@
               <a:buNone/>
             </a:pPr>
             <a:r>
-              <a:rPr lang="en-US" sz="1700" b="1" dirty="0">
+              <a:rPr lang="ja-JP" altLang="en-US" sz="1800" dirty="0">
                 <a:solidFill>
-                  <a:schemeClr val="tx1"/>
+                  <a:srgbClr val="1A1A1A"/>
                 </a:solidFill>
+                <a:latin typeface="Dela Gothic One" pitchFamily="34" charset="0"/>
+                <a:ea typeface="けいふぉんと" pitchFamily="34" charset="-122"/>
+                <a:cs typeface="Dela Gothic One" pitchFamily="34" charset="-120"/>
               </a:rPr>
               <a:t>できたらチェック</a:t>
             </a:r>
-            <a:endParaRPr lang="en-US" sz="1700" dirty="0"/>
+            <a:endParaRPr lang="ja-JP" sz="1800" dirty="0"/>
           </a:p>
         </p:txBody>
       </p:sp>
       <p:sp>
         <p:nvSpPr>
-          <p:cNvPr id="14" name="Text 10"/>
+          <p:cNvPr id="13" name="Text 9"/>
           <p:cNvSpPr txBox="1"/>
           <p:nvPr/>
         </p:nvSpPr>
         <p:spPr>
           <a:xfrm>
-            <a:off x="4937760" y="2286000"/>
-            <a:ext cx="3474720" cy="2057400"/>
+            <a:off x="4937760" y="2240280"/>
+            <a:ext cx="3474720" cy="2148840"/>
           </a:xfrm>
           <a:prstGeom prst="rect">
             <a:avLst/>
@@ -7735,7 +7907,9 @@
           <a:ln/>
         </p:spPr>
         <p:txBody>
-          <a:bodyPr wrap="square" lIns="0" tIns="0" rIns="0" bIns="0" rtlCol="0" anchor="t"/>
+          <a:bodyPr wrap="square" lIns="0" tIns="0" rIns="0" bIns="0" rtlCol="0" anchor="t">
+            <a:normAutofit/>
+          </a:bodyPr>
           <a:lstStyle/>
           <a:p>
             <a:pPr indent="0" marL="0">
@@ -7745,14 +7919,17 @@
               <a:buNone/>
             </a:pPr>
             <a:r>
-              <a:rPr lang="en-US" sz="1350" dirty="0">
+              <a:rPr lang="ja-JP" altLang="en-US" sz="1350" b="1" dirty="0">
                 <a:solidFill>
-                  <a:schemeClr val="tx1"/>
+                  <a:srgbClr val="1A1A1A"/>
                 </a:solidFill>
+                <a:latin typeface="Noto Sans JP" pitchFamily="34" charset="0"/>
+                <a:ea typeface="Noto Sans JP" pitchFamily="34" charset="-122"/>
+                <a:cs typeface="Noto Sans JP" pitchFamily="34" charset="-120"/>
               </a:rPr>
               <a:t>☐ 公開されたしくみがある</a:t>
             </a:r>
-            <a:endParaRPr lang="en-US" sz="1350" dirty="0"/>
+            <a:endParaRPr lang="ja-JP" sz="1350" dirty="0"/>
           </a:p>
           <a:p>
             <a:pPr indent="0" marL="0">
@@ -7762,14 +7939,17 @@
               <a:buNone/>
             </a:pPr>
             <a:r>
-              <a:rPr lang="en-US" sz="1350" dirty="0">
+              <a:rPr lang="ja-JP" altLang="en-US" sz="1350" b="1" dirty="0">
                 <a:solidFill>
-                  <a:schemeClr val="tx1"/>
+                  <a:srgbClr val="1A1A1A"/>
                 </a:solidFill>
+                <a:latin typeface="Noto Sans JP" pitchFamily="34" charset="0"/>
+                <a:ea typeface="Noto Sans JP" pitchFamily="34" charset="-122"/>
+                <a:cs typeface="Noto Sans JP" pitchFamily="34" charset="-120"/>
               </a:rPr>
               <a:t>☐ 改善計画がWikiに置いてある</a:t>
             </a:r>
-            <a:endParaRPr lang="en-US" sz="1350" dirty="0"/>
+            <a:endParaRPr lang="ja-JP" sz="1350" dirty="0"/>
           </a:p>
         </p:txBody>
       </p:sp>
@@ -7785,8 +7965,8 @@
         </p:nvSpPr>
         <p:spPr>
           <a:xfrm>
-            <a:off x="8229600" y="4773168"/>
-            <a:ext cx="365760" cy="228600"/>
+            <a:off x="8366760" y="4754880"/>
+            <a:ext cx="365760" cy="274320"/>
           </a:xfrm>
           <a:prstGeom prst="rect">
             <a:avLst/>
@@ -7798,20 +7978,23 @@
           </a:extLst>
         </p:spPr>
         <p:txBody>
-          <a:bodyPr/>
+          <a:bodyPr anchor="ctr"/>
           <a:lstStyle>
             <a:lvl1pPr>
-              <a:defRPr sz="900">
+              <a:defRPr sz="850">
                 <a:solidFill>
-                  <a:srgbClr val="5A6872"/>
+                  <a:srgbClr val="FFFFFF"/>
                 </a:solidFill>
+                <a:latin typeface="Noto Sans JP"/>
+                <a:ea typeface="Noto Sans JP"/>
+                <a:cs typeface="Noto Sans JP"/>
               </a:defRPr>
             </a:lvl1pPr>
           </a:lstStyle>
           <a:p>
             <a:pPr algn="r"/>
             <a:fld id="{F7021451-1387-4CA6-816F-3879F97B5CBC}" type="slidenum">
-              <a:rPr b="0" lang="en-US"/>
+              <a:rPr b="1" lang="en-US"/>
               <a:t>7</a:t>
             </a:fld>
             <a:endParaRPr lang="en-US"/>
@@ -7843,18 +8026,92 @@
           <a:chExt cx="0" cy="0"/>
         </a:xfrm>
       </p:grpSpPr>
-      <p:sp>
-        <p:nvSpPr>
-          <p:cNvPr id="2" name="Text 0"/>
-          <p:cNvSpPr/>
-          <p:nvPr>
-            <p:ph idx="100" type="title" hasCustomPrompt="1"/>
-          </p:nvPr>
-        </p:nvSpPr>
-        <p:spPr>
-          <a:xfrm>
-            <a:off x="548640" y="1463040"/>
-            <a:ext cx="8046720" cy="1005840"/>
+      <p:pic>
+        <p:nvPicPr>
+          <p:cNvPr id="2" name="portrait" descr="講師 笹原彰朗">    </p:cNvPr>
+          <p:cNvPicPr>
+            <a:picLocks noChangeAspect="1"/>
+          </p:cNvPicPr>
+          <p:nvPr/>
+        </p:nvPicPr>
+        <p:blipFill>
+          <a:blip r:embed="rId1"/>
+          <a:stretch>
+            <a:fillRect/>
+          </a:stretch>
+        </p:blipFill>
+        <p:spPr>
+          <a:xfrm>
+            <a:off x="6003588" y="1211580"/>
+            <a:ext cx="2866092" cy="3931920"/>
+          </a:xfrm>
+          <a:prstGeom prst="rect">
+            <a:avLst/>
+          </a:prstGeom>
+        </p:spPr>
+      </p:pic>
+      <p:sp>
+        <p:nvSpPr>
+          <p:cNvPr id="3" name="Text 0"/>
+          <p:cNvSpPr txBox="1"/>
+          <p:nvPr/>
+        </p:nvSpPr>
+        <p:spPr>
+          <a:xfrm rot="-240000">
+            <a:off x="457200" y="548640"/>
+            <a:ext cx="1280160" cy="548640"/>
+          </a:xfrm>
+          <a:prstGeom prst="rect">
+            <a:avLst/>
+          </a:prstGeom>
+          <a:solidFill>
+            <a:srgbClr val="1A1A1A"/>
+          </a:solidFill>
+          <a:ln>
+            <a:solidFill>
+              <a:srgbClr val="1A1A1A"/>
+            </a:solidFill>
+          </a:ln>
+          <a:effectLst>
+            <a:outerShdw sx="100000" sy="100000" kx="0" ky="0" algn="bl" rotWithShape="0" blurRad="101600" dist="38100" dir="2700000">
+              <a:srgbClr val="1A1A1A">
+                <a:alpha val="100000"/>
+              </a:srgbClr>
+            </a:outerShdw>
+          </a:effectLst>
+        </p:spPr>
+        <p:txBody>
+          <a:bodyPr wrap="square" lIns="0" tIns="0" rIns="0" bIns="0" rtlCol="0" anchor="ctr"/>
+          <a:lstStyle/>
+          <a:p>
+            <a:pPr algn="ctr" indent="0" marL="0">
+              <a:buNone/>
+            </a:pPr>
+            <a:r>
+              <a:rPr lang="ja-JP" altLang="en-US" sz="2000" dirty="0">
+                <a:solidFill>
+                  <a:srgbClr val="FFD600"/>
+                </a:solidFill>
+                <a:latin typeface="Dela Gothic One" pitchFamily="34" charset="0"/>
+                <a:ea typeface="けいふぉんと" pitchFamily="34" charset="-122"/>
+                <a:cs typeface="Dela Gothic One" pitchFamily="34" charset="-120"/>
+              </a:rPr>
+              <a:t>修了</a:t>
+            </a:r>
+            <a:endParaRPr lang="ja-JP" sz="2000" dirty="0"/>
+          </a:p>
+        </p:txBody>
+      </p:sp>
+      <p:sp>
+        <p:nvSpPr>
+          <p:cNvPr id="4" name="Text 1"/>
+          <p:cNvSpPr txBox="1"/>
+          <p:nvPr/>
+        </p:nvSpPr>
+        <p:spPr>
+          <a:xfrm>
+            <a:off x="457200" y="1280160"/>
+            <a:ext cx="5852160" cy="1554480"/>
           </a:xfrm>
           <a:prstGeom prst="rect">
             <a:avLst/>
@@ -7863,73 +8120,175 @@
           <a:ln/>
         </p:spPr>
         <p:txBody>
-          <a:bodyPr wrap="square" lIns="0" tIns="0" rIns="0" bIns="0" rtlCol="0" anchor="t"/>
-          <a:lstStyle/>
-          <a:p>
-            <a:pPr algn="l" indent="0" marL="0">
-              <a:buNone/>
-            </a:pPr>
-            <a:r>
-              <a:rPr lang="en-US" sz="3000" b="1" dirty="0">
-                <a:solidFill>
-                  <a:schemeClr val="accent1"/>
-                </a:solidFill>
-              </a:rPr>
-              <a:t>修了おめでとうございます</a:t>
-            </a:r>
-            <a:endParaRPr lang="en-US" sz="3000" dirty="0"/>
-          </a:p>
-        </p:txBody>
-      </p:sp>
-      <p:sp>
-        <p:nvSpPr>
-          <p:cNvPr id="3" name="Text 0"/>
-          <p:cNvSpPr/>
-          <p:nvPr>
-            <p:ph idx="101" type="body" hasCustomPrompt="1"/>
-          </p:nvPr>
-        </p:nvSpPr>
-        <p:spPr>
-          <a:xfrm>
-            <a:off x="548640" y="2606040"/>
-            <a:ext cx="8046720" cy="1097280"/>
-          </a:xfrm>
-          <a:prstGeom prst="rect">
-            <a:avLst/>
-          </a:prstGeom>
-          <a:noFill/>
-          <a:ln/>
-        </p:spPr>
-        <p:txBody>
-          <a:bodyPr wrap="square" lIns="0" tIns="0" rIns="0" bIns="0" rtlCol="0" anchor="t"/>
+          <a:bodyPr wrap="square" lIns="0" tIns="0" rIns="0" bIns="0" rtlCol="0" anchor="ctr">
+            <a:normAutofit/>
+          </a:bodyPr>
           <a:lstStyle/>
           <a:p>
             <a:pPr indent="0" marL="0">
               <a:buNone/>
             </a:pPr>
             <a:r>
-              <a:rPr lang="en-US" sz="1500" dirty="0">
+              <a:rPr lang="ja-JP" altLang="en-US" sz="3200" dirty="0">
                 <a:solidFill>
-                  <a:schemeClr val="bg1"/>
+                  <a:srgbClr val="DD6420"/>
                 </a:solidFill>
+                <a:latin typeface="Dela Gothic One" pitchFamily="34" charset="0"/>
+                <a:ea typeface="けいふぉんと" pitchFamily="34" charset="-122"/>
+                <a:cs typeface="Dela Gothic One" pitchFamily="34" charset="-120"/>
               </a:rPr>
-              <a:t>あなたはもう、自社のしくみを作れる「構築者」です。</a:t>
-            </a:r>
-            <a:endParaRPr lang="en-US" sz="1500" dirty="0"/>
+              <a:t>修了、</a:t>
+            </a:r>
+            <a:endParaRPr lang="ja-JP" sz="3200" dirty="0"/>
           </a:p>
           <a:p>
             <a:pPr indent="0" marL="0">
               <a:buNone/>
             </a:pPr>
             <a:r>
-              <a:rPr lang="en-US" sz="1500" dirty="0">
+              <a:rPr lang="ja-JP" altLang="en-US" sz="3200" dirty="0">
                 <a:solidFill>
-                  <a:schemeClr val="bg1"/>
+                  <a:srgbClr val="1A1A1A"/>
                 </a:solidFill>
+                <a:latin typeface="Dela Gothic One" pitchFamily="34" charset="0"/>
+                <a:ea typeface="けいふぉんと" pitchFamily="34" charset="-122"/>
+                <a:cs typeface="Dela Gothic One" pitchFamily="34" charset="-120"/>
+              </a:rPr>
+              <a:t>おめでとうございます!</a:t>
+            </a:r>
+            <a:endParaRPr lang="ja-JP" sz="3200" dirty="0"/>
+          </a:p>
+        </p:txBody>
+      </p:sp>
+      <p:sp>
+        <p:nvSpPr>
+          <p:cNvPr id="5" name="card"/>
+          <p:cNvSpPr/>
+          <p:nvPr/>
+        </p:nvSpPr>
+        <p:spPr>
+          <a:xfrm>
+            <a:off x="457200" y="3108960"/>
+            <a:ext cx="5394960" cy="1325880"/>
+          </a:xfrm>
+          <a:prstGeom prst="roundRect">
+            <a:avLst>
+              <a:gd name="adj" fmla="val 6897"/>
+            </a:avLst>
+          </a:prstGeom>
+          <a:solidFill>
+            <a:srgbClr val="FFFFFF"/>
+          </a:solidFill>
+          <a:ln w="25400">
+            <a:solidFill>
+              <a:srgbClr val="1A1A1A"/>
+            </a:solidFill>
+            <a:prstDash val="solid"/>
+          </a:ln>
+          <a:effectLst>
+            <a:outerShdw sx="100000" sy="100000" kx="0" ky="0" algn="bl" rotWithShape="0" blurRad="101600" dist="50800" dir="2700000">
+              <a:srgbClr val="1A1A1A">
+                <a:alpha val="100000"/>
+              </a:srgbClr>
+            </a:outerShdw>
+          </a:effectLst>
+        </p:spPr>
+      </p:sp>
+      <p:sp>
+        <p:nvSpPr>
+          <p:cNvPr id="6" name="Text 3"/>
+          <p:cNvSpPr txBox="1"/>
+          <p:nvPr/>
+        </p:nvSpPr>
+        <p:spPr>
+          <a:xfrm>
+            <a:off x="685800" y="3200400"/>
+            <a:ext cx="4937760" cy="1143000"/>
+          </a:xfrm>
+          <a:prstGeom prst="rect">
+            <a:avLst/>
+          </a:prstGeom>
+          <a:noFill/>
+          <a:ln/>
+        </p:spPr>
+        <p:txBody>
+          <a:bodyPr wrap="square" lIns="0" tIns="0" rIns="0" bIns="0" rtlCol="0" anchor="ctr">
+            <a:normAutofit/>
+          </a:bodyPr>
+          <a:lstStyle/>
+          <a:p>
+            <a:pPr indent="0" marL="0">
+              <a:spcAft>
+                <a:spcPts val="400"/>
+              </a:spcAft>
+              <a:buNone/>
+            </a:pPr>
+            <a:r>
+              <a:rPr lang="ja-JP" altLang="en-US" sz="1400" b="1" dirty="0">
+                <a:solidFill>
+                  <a:srgbClr val="1A1A1A"/>
+                </a:solidFill>
+                <a:latin typeface="Noto Sans JP" pitchFamily="34" charset="0"/>
+                <a:ea typeface="Noto Sans JP" pitchFamily="34" charset="-122"/>
+                <a:cs typeface="Noto Sans JP" pitchFamily="34" charset="-120"/>
+              </a:rPr>
+              <a:t>あなたはもう、自社のしくみを作れる</a:t>
+            </a:r>
+            <a:pPr indent="0" marL="0">
+              <a:spcAft>
+                <a:spcPts val="400"/>
+              </a:spcAft>
+              <a:buNone/>
+            </a:pPr>
+            <a:r>
+              <a:rPr lang="ja-JP" altLang="en-US" sz="1400" b="1" dirty="0">
+                <a:solidFill>
+                  <a:srgbClr val="DD6420"/>
+                </a:solidFill>
+                <a:latin typeface="Noto Sans JP" pitchFamily="34" charset="0"/>
+                <a:ea typeface="Noto Sans JP" pitchFamily="34" charset="-122"/>
+                <a:cs typeface="Noto Sans JP" pitchFamily="34" charset="-120"/>
+              </a:rPr>
+              <a:t>「構築者」</a:t>
+            </a:r>
+            <a:pPr indent="0" marL="0">
+              <a:spcAft>
+                <a:spcPts val="400"/>
+              </a:spcAft>
+              <a:buNone/>
+            </a:pPr>
+            <a:r>
+              <a:rPr lang="ja-JP" altLang="en-US" sz="1400" b="1" dirty="0">
+                <a:solidFill>
+                  <a:srgbClr val="1A1A1A"/>
+                </a:solidFill>
+                <a:latin typeface="Noto Sans JP" pitchFamily="34" charset="0"/>
+                <a:ea typeface="Noto Sans JP" pitchFamily="34" charset="-122"/>
+                <a:cs typeface="Noto Sans JP" pitchFamily="34" charset="-120"/>
+              </a:rPr>
+              <a:t>です。</a:t>
+            </a:r>
+            <a:endParaRPr lang="ja-JP" sz="1400" dirty="0"/>
+          </a:p>
+          <a:p>
+            <a:pPr indent="0" marL="0">
+              <a:spcAft>
+                <a:spcPts val="400"/>
+              </a:spcAft>
+              <a:buNone/>
+            </a:pPr>
+            <a:r>
+              <a:rPr lang="ja-JP" altLang="en-US" sz="1400" b="1" dirty="0">
+                <a:solidFill>
+                  <a:srgbClr val="1A1A1A"/>
+                </a:solidFill>
+                <a:latin typeface="Noto Sans JP" pitchFamily="34" charset="0"/>
+                <a:ea typeface="Noto Sans JP" pitchFamily="34" charset="-122"/>
+                <a:cs typeface="Noto Sans JP" pitchFamily="34" charset="-120"/>
               </a:rPr>
               <a:t>作ったしくみを、使われながら育てていきましょう。</a:t>
             </a:r>
-            <a:endParaRPr lang="en-US" sz="1500" dirty="0"/>
+            <a:endParaRPr lang="ja-JP" sz="1400" dirty="0"/>
           </a:p>
         </p:txBody>
       </p:sp>
@@ -7942,9 +8301,9 @@
 </file>
 
 <file path=ppt/theme/theme1.xml><?xml version="1.0" encoding="utf-8"?>
-<a:theme xmlns:a="http://schemas.openxmlformats.org/drawingml/2006/main" name="Manaberu">
+<a:theme xmlns:a="http://schemas.openxmlformats.org/drawingml/2006/main" name="SasaYell">
   <a:themeElements>
-    <a:clrScheme name="Manaberu">
+    <a:clrScheme name="SasaYell">
       <a:dk1>
         <a:srgbClr val="1A1A1A"/>
       </a:dk1>
@@ -7952,10 +8311,10 @@
         <a:srgbClr val="FFFFFF"/>
       </a:lt1>
       <a:dk2>
-        <a:srgbClr val="5A6872"/>
+        <a:srgbClr val="1A1A1A"/>
       </a:dk2>
       <a:lt2>
-        <a:srgbClr val="FFF6CC"/>
+        <a:srgbClr val="FFD600"/>
       </a:lt2>
       <a:accent1>
         <a:srgbClr val="FFD600"/>
@@ -7964,128 +8323,34 @@
         <a:srgbClr val="DD6420"/>
       </a:accent2>
       <a:accent3>
-        <a:srgbClr val="3370FF"/>
+        <a:srgbClr val="F5A623"/>
       </a:accent3>
       <a:accent4>
-        <a:srgbClr val="06C755"/>
+        <a:srgbClr val="1A1A1A"/>
       </a:accent4>
       <a:accent5>
-        <a:srgbClr val="E53935"/>
+        <a:srgbClr val="FFFFFF"/>
       </a:accent5>
       <a:accent6>
-        <a:srgbClr val="F5A623"/>
+        <a:srgbClr val="DD6420"/>
       </a:accent6>
       <a:hlink>
-        <a:srgbClr val="3370FF"/>
+        <a:srgbClr val="DD6420"/>
       </a:hlink>
       <a:folHlink>
-        <a:srgbClr val="6B4FBB"/>
+        <a:srgbClr val="F5A623"/>
       </a:folHlink>
     </a:clrScheme>
-    <a:fontScheme name="Manaberu">
+    <a:fontScheme name="SasaYell">
       <a:majorFont>
-        <a:latin typeface="Yu Gothic"/>
-        <a:ea typeface=""/>
+        <a:latin typeface="Dela Gothic One"/>
+        <a:ea typeface="けいふぉんと"/>
         <a:cs typeface=""/>
-        <a:font script="Jpan" typeface="游ゴシック Light"/>
-        <a:font script="Hang" typeface="맑은 고딕"/>
-        <a:font script="Hans" typeface="等线 Light"/>
-        <a:font script="Hant" typeface="新細明體"/>
-        <a:font script="Arab" typeface="Times New Roman"/>
-        <a:font script="Hebr" typeface="Times New Roman"/>
-        <a:font script="Thai" typeface="Angsana New"/>
-        <a:font script="Ethi" typeface="Nyala"/>
-        <a:font script="Beng" typeface="Vrinda"/>
-        <a:font script="Gujr" typeface="Shruti"/>
-        <a:font script="Khmr" typeface="MoolBoran"/>
-        <a:font script="Knda" typeface="Tunga"/>
-        <a:font script="Guru" typeface="Raavi"/>
-        <a:font script="Cans" typeface="Euphemia"/>
-        <a:font script="Cher" typeface="Plantagenet Cherokee"/>
-        <a:font script="Yiii" typeface="Microsoft Yi Baiti"/>
-        <a:font script="Tibt" typeface="Microsoft Himalaya"/>
-        <a:font script="Thaa" typeface="MV Boli"/>
-        <a:font script="Deva" typeface="Mangal"/>
-        <a:font script="Telu" typeface="Gautami"/>
-        <a:font script="Taml" typeface="Latha"/>
-        <a:font script="Syrc" typeface="Estrangelo Edessa"/>
-        <a:font script="Orya" typeface="Kalinga"/>
-        <a:font script="Mlym" typeface="Kartika"/>
-        <a:font script="Laoo" typeface="DokChampa"/>
-        <a:font script="Sinh" typeface="Iskoola Pota"/>
-        <a:font script="Mong" typeface="Mongolian Baiti"/>
-        <a:font script="Viet" typeface="Times New Roman"/>
-        <a:font script="Uigh" typeface="Microsoft Uighur"/>
-        <a:font script="Geor" typeface="Sylfaen"/>
-        <a:font script="Armn" typeface="Arial"/>
-        <a:font script="Bugi" typeface="Leelawadee UI"/>
-        <a:font script="Bopo" typeface="Microsoft JhengHei"/>
-        <a:font script="Java" typeface="Javanese Text"/>
-        <a:font script="Lisu" typeface="Segoe UI"/>
-        <a:font script="Mymr" typeface="Myanmar Text"/>
-        <a:font script="Nkoo" typeface="Ebrima"/>
-        <a:font script="Olck" typeface="Nirmala UI"/>
-        <a:font script="Osma" typeface="Ebrima"/>
-        <a:font script="Phag" typeface="Phagspa"/>
-        <a:font script="Syrn" typeface="Estrangelo Edessa"/>
-        <a:font script="Syrj" typeface="Estrangelo Edessa"/>
-        <a:font script="Syre" typeface="Estrangelo Edessa"/>
-        <a:font script="Sora" typeface="Nirmala UI"/>
-        <a:font script="Tale" typeface="Microsoft Tai Le"/>
-        <a:font script="Talu" typeface="Microsoft New Tai Lue"/>
-        <a:font script="Tfng" typeface="Ebrima"/>
       </a:majorFont>
       <a:minorFont>
-        <a:latin typeface="Yu Gothic"/>
-        <a:ea typeface=""/>
+        <a:latin typeface="Noto Sans JP"/>
+        <a:ea typeface="Noto Sans JP"/>
         <a:cs typeface=""/>
-        <a:font script="Jpan" typeface="游ゴシック"/>
-        <a:font script="Hang" typeface="맑은 고딕"/>
-        <a:font script="Hans" typeface="等线"/>
-        <a:font script="Hant" typeface="新細明體"/>
-        <a:font script="Arab" typeface="Arial"/>
-        <a:font script="Hebr" typeface="Arial"/>
-        <a:font script="Thai" typeface="Cordia New"/>
-        <a:font script="Ethi" typeface="Nyala"/>
-        <a:font script="Beng" typeface="Vrinda"/>
-        <a:font script="Gujr" typeface="Shruti"/>
-        <a:font script="Khmr" typeface="DaunPenh"/>
-        <a:font script="Knda" typeface="Tunga"/>
-        <a:font script="Guru" typeface="Raavi"/>
-        <a:font script="Cans" typeface="Euphemia"/>
-        <a:font script="Cher" typeface="Plantagenet Cherokee"/>
-        <a:font script="Yiii" typeface="Microsoft Yi Baiti"/>
-        <a:font script="Tibt" typeface="Microsoft Himalaya"/>
-        <a:font script="Thaa" typeface="MV Boli"/>
-        <a:font script="Deva" typeface="Mangal"/>
-        <a:font script="Telu" typeface="Gautami"/>
-        <a:font script="Taml" typeface="Latha"/>
-        <a:font script="Syrc" typeface="Estrangelo Edessa"/>
-        <a:font script="Orya" typeface="Kalinga"/>
-        <a:font script="Mlym" typeface="Kartika"/>
-        <a:font script="Laoo" typeface="DokChampa"/>
-        <a:font script="Sinh" typeface="Iskoola Pota"/>
-        <a:font script="Mong" typeface="Mongolian Baiti"/>
-        <a:font script="Viet" typeface="Arial"/>
-        <a:font script="Uigh" typeface="Microsoft Uighur"/>
-        <a:font script="Geor" typeface="Sylfaen"/>
-        <a:font script="Armn" typeface="Arial"/>
-        <a:font script="Bugi" typeface="Leelawadee UI"/>
-        <a:font script="Bopo" typeface="Microsoft JhengHei"/>
-        <a:font script="Java" typeface="Javanese Text"/>
-        <a:font script="Lisu" typeface="Segoe UI"/>
-        <a:font script="Mymr" typeface="Myanmar Text"/>
-        <a:font script="Nkoo" typeface="Ebrima"/>
-        <a:font script="Olck" typeface="Nirmala UI"/>
-        <a:font script="Osma" typeface="Ebrima"/>
-        <a:font script="Phag" typeface="Phagspa"/>
-        <a:font script="Syrn" typeface="Estrangelo Edessa"/>
-        <a:font script="Syrj" typeface="Estrangelo Edessa"/>
-        <a:font script="Syre" typeface="Estrangelo Edessa"/>
-        <a:font script="Sora" typeface="Nirmala UI"/>
-        <a:font script="Tale" typeface="Microsoft Tai Le"/>
-        <a:font script="Talu" typeface="Microsoft New Tai Lue"/>
-        <a:font script="Tfng" typeface="Ebrima"/>
       </a:minorFont>
     </a:fontScheme>
     <a:fmtScheme name="Office">
